--- a/CareerCast_Milestone1_Presentation.pptx
+++ b/CareerCast_Milestone1_Presentation.pptx
@@ -511,7 +511,7 @@
           <a:lstStyle/>
           <a:p>
             <a:r>
-              <a:t>Good morning, respected teacher. Today, I am proud to present the progress of our AI-Powered Career Intelligence Platform called CareerCast / CareerInfinity. We have 100% completed all requirements for Milestone 1, which includes our SpaCy NER resume parser and baseline Logistic Regression model. In fact, we are ahead of schedule and have also implemented core parts of Milestone 2, including an ensemble of Random Forest and XGBoost, Skill Gap Analysis, and a live Supabase PostgreSQL database.</a:t>
+              <a:t>Good morning, respected teacher. Today I am presenting our AI-Powered Career Path Prediction and Skill Intelligence Platform called CareerCast / CareerInfinity. We have 100% completed Milestone 1, which includes our SpaCy NER resume parser and baseline Logistic Regression model. Furthermore, we are ahead of schedule and have also built major parts of Milestone 2, including Random Forest and XGBoost model comparisons, Skill Gap Analysis, and a live Supabase PostgreSQL database.</a:t>
             </a:r>
           </a:p>
         </p:txBody>
@@ -581,7 +581,7 @@
           <a:lstStyle/>
           <a:p>
             <a:r>
-              <a:t>In conclusion: Milestone 1 is 100% completed and verified, and Milestone 2 is already 90% implemented. All code is live on GitHub and running locally on both frontend and backend. For Milestone 3, we will add automated GitHub Actions CI/CD testing and PDF roadmap downloads. Thank you! I would now be delighted to answer any questions or demonstrate the live software.</a:t>
+              <a:t>In conclusion: Milestone 1 is 100% completed and verified, and Milestone 2 is already 90% implemented. All code is committed to GitHub and running locally on both frontend and backend. For Milestone 3, we will add automated GitHub Actions CI/CD testing and PDF roadmap downloads. Thank you! I would now be delighted to answer any questions or demonstrate the live software.</a:t>
             </a:r>
           </a:p>
         </p:txBody>
@@ -651,7 +651,7 @@
           <a:lstStyle/>
           <a:p>
             <a:r>
-              <a:t>Ma'am/Sir, our project solves a major real-world challenge: many students don't know what career path best fits their profile or which exact skills they are missing. Our platform takes a student's resume, extracts their skills automatically with AI, predicts their best career fit with probability scores, and tells them exactly what missing skills they need to learn.</a:t>
+              <a:t>Ma'am/Sir, our project tackles a major issue for engineering students: career confusion. Students often don't know which roles best match their abilities or what skills they lack. CareerCast takes their resume, automatically extracts their technical skills, predicts their best career trajectory with calibrated probabilities, and gives them an actionable skill gap roadmap.</a:t>
             </a:r>
           </a:p>
         </p:txBody>
@@ -721,7 +721,7 @@
           <a:lstStyle/>
           <a:p>
             <a:r>
-              <a:t>Here is our system architecture. We built a modern 4-tier stack: The frontend is built in React and Vite. The backend is powered by a FastAPI Python server. The machine learning engine uses SpaCy for NLP and Scikit-Learn with XGBoost for classification. And all user profiles, resumes, and prediction logs are securely saved in a cloud PostgreSQL database via Supabase.</a:t>
+              <a:t>Here is our system architecture. We designed a clean 4-tier stack: The client is built in React 18 with Vite. The backend is powered by a FastAPI Python server on port 8000. Our AI pipeline uses SpaCy for entity extraction and Scikit-Learn with XGBoost for classification. All records are persisted in a cloud PostgreSQL database on Supabase.</a:t>
             </a:r>
           </a:p>
         </p:txBody>
@@ -791,7 +791,7 @@
           <a:lstStyle/>
           <a:p>
             <a:r>
-              <a:t>On this slide is our Milestone 1 resume parser. Instead of manual data entry, the student simply drops their resume file. Our SpaCy NER pipeline extracts their skills like Python, Machine Learning, and SQL, their job roles, and degrees. While the assignment required 90% precision, our parser achieved 100% precision on our evaluation test set.</a:t>
+              <a:t>This slide shows our Milestone 1 resume parser running live on the website. A student uploads their PDF resume, and our SpaCy NER pipeline extracts their skills—like Python, Machine Learning, and SQL—along with their degree and university. While the project guideline required 90% precision, our model achieved 100% precision on the validation test set.</a:t>
             </a:r>
           </a:p>
         </p:txBody>
@@ -861,7 +861,7 @@
           <a:lstStyle/>
           <a:p>
             <a:r>
-              <a:t>This slide demonstrates the core of Milestone 1: the baseline Machine Learning classifier. We trained a Logistic Regression model on historical career profile transitions. The project benchmark specified a minimum 65% Top-1 accuracy. As shown on the chart, our model achieved 100% Top-1 accuracy on the 100-resume validation split, comfortably exceeding the project's target threshold.</a:t>
+              <a:t>This slide proves our Milestone 1 baseline Machine Learning model. We trained a Logistic Regression classifier on 400 career profiles. The project brief set a benchmark of at least 65% Top-1 accuracy. As shown on the chart, our baseline model achieved 100% Top-1 accuracy on the 100-resume validation split, exceeding the required passing threshold.</a:t>
             </a:r>
           </a:p>
         </p:txBody>
@@ -931,7 +931,7 @@
           <a:lstStyle/>
           <a:p>
             <a:r>
-              <a:t>Ma'am/Sir, we didn't stop at Milestone 1—we also completed the multi-model comparison for Milestone 2! We trained and compared three distinct algorithms: Logistic Regression, Random Forest, and XGBoost. The project required an 80% F1-score for Milestone 2. All three models scored 98% to 100%, and XGBoost serves as our production recommendation engine.</a:t>
+              <a:t>Ahead of schedule, we also completed the Milestone 2 multi-model benchmark. We trained and compared three algorithms: Logistic Regression, Random Forest, and XGBoost. The Milestone 2 criteria required an 80% F1-score. As seen on the screenshot from our live website, all three models scored between 98% and 100%, and XGBoost serves as our production recommendation engine.</a:t>
             </a:r>
           </a:p>
         </p:txBody>
@@ -1001,7 +1001,7 @@
           <a:lstStyle/>
           <a:p>
             <a:r>
-              <a:t>Here is our Skill Gap Analysis and Career Ranking module from Milestone 2. When a student selects a target role, like Machine Learning Engineer, our system compares their verified skills against what top companies require. In green are their verified skills, and in red are the missing skills like Docker and MLOps. This provides an exact roadmap of what to study next.</a:t>
+              <a:t>Here is our Skill Gap Analysis and Top-5 Recommendation Engine from Milestone 2 running live. When a student chooses a target job, like Machine Learning Engineer, our system compares their verified skills in green against missing industry skills in red, such as Docker and MLOps. This shows them exactly what skills they must build to become job-ready.</a:t>
             </a:r>
           </a:p>
         </p:txBody>
@@ -1071,7 +1071,7 @@
           <a:lstStyle/>
           <a:p>
             <a:r>
-              <a:t>This slide highlights our database integration. We wrote and deployed a full SQL schema on Supabase PostgreSQL. It maintains profiles, uploaded resumes, and prediction history. We also enabled Row Level Security so every student's academic data is completely private and isolated. Everything syncs live between our React frontend and the database.</a:t>
+              <a:t>For data persistence, we executed our PostgreSQL schema on Supabase. As shown on this live screenshot, we have three active tables: profiles, resumes, and predictions. We also enabled Row Level Security so every student's data remains completely private. Everything syncs live between our React frontend and the cloud database.</a:t>
             </a:r>
           </a:p>
         </p:txBody>
@@ -1141,7 +1141,7 @@
           <a:lstStyle/>
           <a:p>
             <a:r>
-              <a:t>As instructed by our teacher, we restructured the platform navigation to match the reference pattern provided. It features the exact 12 side headings, clean SaaS cards, a top search bar, notification indicators, and user profile badges, while preserving our sleek dark-mode visual aesthetic.</a:t>
+              <a:t>As instructed by our teacher, we reorganized our platform navigation to match the reference layout provided. It features the exact 12 side navigation items, top search bar, notification counter, and student profile details, all while keeping our clean dark-mode aesthetic.</a:t>
             </a:r>
           </a:p>
         </p:txBody>
@@ -4162,7 +4162,7 @@
             <a:avLst/>
           </a:prstGeom>
           <a:solidFill>
-            <a:srgbClr val="0B0F19"/>
+            <a:srgbClr val="FFFFFF"/>
           </a:solidFill>
           <a:ln>
             <a:noFill/>
@@ -4198,18 +4198,18 @@
         </p:nvSpPr>
         <p:spPr>
           <a:xfrm>
-            <a:off x="914400" y="731520"/>
-            <a:ext cx="10362895" cy="5394960"/>
+            <a:off x="731520" y="320040"/>
+            <a:ext cx="5029200" cy="292608"/>
           </a:xfrm>
           <a:prstGeom prst="roundRect">
             <a:avLst/>
           </a:prstGeom>
           <a:solidFill>
-            <a:srgbClr val="111827"/>
-          </a:solidFill>
-          <a:ln w="19050">
+            <a:srgbClr val="EFF6FF"/>
+          </a:solidFill>
+          <a:ln w="12700">
             <a:solidFill>
-              <a:srgbClr val="38BDF8"/>
+              <a:srgbClr val="BFDBFE"/>
             </a:solidFill>
           </a:ln>
         </p:spPr>
@@ -4228,21 +4228,196 @@
           </a:fontRef>
         </p:style>
         <p:txBody>
-          <a:bodyPr rtlCol="0" anchor="ctr" wrap="square" tIns="548640" lIns="731520" rIns="731520"/>
+          <a:bodyPr rtlCol="0" anchor="ctr" tIns="36576" lIns="137160"/>
+          <a:lstStyle/>
+          <a:p>
+            <a:pPr algn="ctr">
+              <a:defRPr sz="850" b="1">
+                <a:solidFill>
+                  <a:srgbClr val="2563EB"/>
+                </a:solidFill>
+              </a:defRPr>
+            </a:pPr>
+            <a:r>
+              <a:t>SMART INDIA HACKATHON 2025 | AI CAREER INTELLIGENCE PLATFORM</a:t>
+            </a:r>
+          </a:p>
+        </p:txBody>
+      </p:sp>
+      <p:sp>
+        <p:nvSpPr>
+          <p:cNvPr id="4" name="TextBox 3"/>
+          <p:cNvSpPr txBox="1"/>
+          <p:nvPr/>
+        </p:nvSpPr>
+        <p:spPr>
+          <a:xfrm>
+            <a:off x="731520" y="658368"/>
+            <a:ext cx="10728655" cy="594360"/>
+          </a:xfrm>
+          <a:prstGeom prst="rect">
+            <a:avLst/>
+          </a:prstGeom>
+          <a:noFill/>
+        </p:spPr>
+        <p:txBody>
+          <a:bodyPr wrap="square" lIns="0" tIns="0">
+            <a:spAutoFit/>
+          </a:bodyPr>
+          <a:lstStyle/>
+          <a:p>
+            <a:pPr>
+              <a:defRPr sz="2200" b="1">
+                <a:solidFill>
+                  <a:srgbClr val="0F172A"/>
+                </a:solidFill>
+              </a:defRPr>
+            </a:pPr>
+            <a:r>
+              <a:t>CareerCast / CareerInfinity</a:t>
+            </a:r>
+          </a:p>
+        </p:txBody>
+      </p:sp>
+      <p:sp>
+        <p:nvSpPr>
+          <p:cNvPr id="5" name="TextBox 4"/>
+          <p:cNvSpPr txBox="1"/>
+          <p:nvPr/>
+        </p:nvSpPr>
+        <p:spPr>
+          <a:xfrm>
+            <a:off x="731520" y="1234440"/>
+            <a:ext cx="10728655" cy="320040"/>
+          </a:xfrm>
+          <a:prstGeom prst="rect">
+            <a:avLst/>
+          </a:prstGeom>
+          <a:noFill/>
+        </p:spPr>
+        <p:txBody>
+          <a:bodyPr wrap="square" lIns="0" tIns="0">
+            <a:spAutoFit/>
+          </a:bodyPr>
+          <a:lstStyle/>
+          <a:p>
+            <a:pPr>
+              <a:defRPr sz="1200">
+                <a:solidFill>
+                  <a:srgbClr val="475569"/>
+                </a:solidFill>
+              </a:defRPr>
+            </a:pPr>
+            <a:r>
+              <a:t>AI-Powered Career Path Prediction &amp; Skill Intelligence Platform</a:t>
+            </a:r>
+          </a:p>
+        </p:txBody>
+      </p:sp>
+      <p:sp>
+        <p:nvSpPr>
+          <p:cNvPr id="6" name="Rectangle 5"/>
+          <p:cNvSpPr/>
+          <p:nvPr/>
+        </p:nvSpPr>
+        <p:spPr>
+          <a:xfrm>
+            <a:off x="731520" y="1572768"/>
+            <a:ext cx="10728655" cy="18288"/>
+          </a:xfrm>
+          <a:prstGeom prst="rect">
+            <a:avLst/>
+          </a:prstGeom>
+          <a:solidFill>
+            <a:srgbClr val="E2E8F0"/>
+          </a:solidFill>
+          <a:ln>
+            <a:noFill/>
+          </a:ln>
+        </p:spPr>
+        <p:style>
+          <a:lnRef idx="1">
+            <a:schemeClr val="accent1"/>
+          </a:lnRef>
+          <a:fillRef idx="3">
+            <a:schemeClr val="accent1"/>
+          </a:fillRef>
+          <a:effectRef idx="2">
+            <a:schemeClr val="accent1"/>
+          </a:effectRef>
+          <a:fontRef idx="minor">
+            <a:schemeClr val="lt1"/>
+          </a:fontRef>
+        </p:style>
+        <p:txBody>
+          <a:bodyPr rtlCol="0" anchor="ctr"/>
+          <a:lstStyle/>
+          <a:p>
+            <a:pPr algn="ctr"/>
+          </a:p>
+        </p:txBody>
+      </p:sp>
+      <p:sp>
+        <p:nvSpPr>
+          <p:cNvPr id="7" name="Rounded Rectangle 6"/>
+          <p:cNvSpPr/>
+          <p:nvPr/>
+        </p:nvSpPr>
+        <p:spPr>
+          <a:xfrm>
+            <a:off x="731520" y="1719072"/>
+            <a:ext cx="5394960" cy="4754880"/>
+          </a:xfrm>
+          <a:prstGeom prst="roundRect">
+            <a:avLst/>
+          </a:prstGeom>
+          <a:solidFill>
+            <a:srgbClr val="F8FAFC"/>
+          </a:solidFill>
+          <a:ln w="12700">
+            <a:solidFill>
+              <a:srgbClr val="E2E8F0"/>
+            </a:solidFill>
+          </a:ln>
+        </p:spPr>
+        <p:style>
+          <a:lnRef idx="1">
+            <a:schemeClr val="accent1"/>
+          </a:lnRef>
+          <a:fillRef idx="3">
+            <a:schemeClr val="accent1"/>
+          </a:fillRef>
+          <a:effectRef idx="2">
+            <a:schemeClr val="accent1"/>
+          </a:effectRef>
+          <a:fontRef idx="minor">
+            <a:schemeClr val="lt1"/>
+          </a:fontRef>
+        </p:style>
+        <p:txBody>
+          <a:bodyPr rtlCol="0" anchor="ctr" wrap="square" tIns="274320" lIns="320040" rIns="320040"/>
           <a:lstStyle/>
           <a:p>
             <a:pPr algn="ctr">
               <a:spcAft>
-                <a:spcPts val="1400"/>
+                <a:spcPts val="1000"/>
               </a:spcAft>
-              <a:defRPr sz="1200" b="1">
-                <a:solidFill>
-                  <a:srgbClr val="38BDF8"/>
+              <a:defRPr sz="1100" b="1">
+                <a:solidFill>
+                  <a:srgbClr val="2563EB"/>
                 </a:solidFill>
               </a:defRPr>
             </a:pPr>
             <a:r>
-              <a:t>SMART INDIA HACKATHON 2025 | STUDENT PROJECT</a:t>
+              <a:t>• Milestone 1 (Verified): </a:t>
+            </a:r>
+            <a:r>
+              <a:rPr b="0">
+                <a:solidFill>
+                  <a:srgbClr val="1E293B"/>
+                </a:solidFill>
+              </a:rPr>
+              <a:t>SpaCy NER Resume Parser + Baseline Logistic Regression Classifier</a:t>
             </a:r>
           </a:p>
           <a:p>
@@ -4250,49 +4425,348 @@
               <a:spcAft>
                 <a:spcPts val="1000"/>
               </a:spcAft>
-              <a:defRPr sz="3600" b="1">
-                <a:solidFill>
-                  <a:srgbClr val="FFFFFF"/>
+              <a:defRPr sz="1100" b="1">
+                <a:solidFill>
+                  <a:srgbClr val="2563EB"/>
                 </a:solidFill>
               </a:defRPr>
             </a:pPr>
             <a:r>
-              <a:t>CareerCast / CareerInfinity</a:t>
+              <a:t>• Milestone 2 (Ahead of Schedule): </a:t>
+            </a:r>
+            <a:r>
+              <a:rPr b="0">
+                <a:solidFill>
+                  <a:srgbClr val="1E293B"/>
+                </a:solidFill>
+              </a:rPr>
+              <a:t>XGBoost &amp; Random Forest Ensemble + Skill Gap Analysis</a:t>
             </a:r>
           </a:p>
           <a:p>
             <a:pPr>
               <a:spcAft>
-                <a:spcPts val="2400"/>
+                <a:spcPts val="1000"/>
               </a:spcAft>
-              <a:defRPr sz="1800">
-                <a:solidFill>
-                  <a:srgbClr val="94A3B8"/>
+              <a:defRPr sz="1100" b="1">
+                <a:solidFill>
+                  <a:srgbClr val="2563EB"/>
                 </a:solidFill>
               </a:defRPr>
             </a:pPr>
             <a:r>
-              <a:t>AI-Powered Career Path Prediction &amp; Skill Intelligence Platform</a:t>
+              <a:t>• Cloud Infrastructure: </a:t>
+            </a:r>
+            <a:r>
+              <a:rPr b="0">
+                <a:solidFill>
+                  <a:srgbClr val="1E293B"/>
+                </a:solidFill>
+              </a:rPr>
+              <a:t>Supabase PostgreSQL Database + FastAPI REST ML Service</a:t>
             </a:r>
           </a:p>
           <a:p>
             <a:pPr>
-              <a:defRPr sz="1400">
-                <a:solidFill>
-                  <a:srgbClr val="E2E8F0"/>
+              <a:spcAft>
+                <a:spcPts val="1000"/>
+              </a:spcAft>
+              <a:defRPr sz="1100" b="1">
+                <a:solidFill>
+                  <a:srgbClr val="2563EB"/>
                 </a:solidFill>
               </a:defRPr>
             </a:pPr>
             <a:r>
-              <a:t>Milestone 1 Presentation (with Milestone 2 Preview)</a:t>
-            </a:r>
-            <a:br/>
-            <a:r>
-              <a:t>Presented by: Aishwarya T C | Computer Science &amp; Engineering</a:t>
-            </a:r>
-          </a:p>
-        </p:txBody>
-      </p:sp>
+              <a:t>• Presented By: </a:t>
+            </a:r>
+            <a:r>
+              <a:rPr b="0">
+                <a:solidFill>
+                  <a:srgbClr val="1E293B"/>
+                </a:solidFill>
+              </a:rPr>
+              <a:t>Aishwarya T C | Computer Science &amp; Engineering Student</a:t>
+            </a:r>
+          </a:p>
+        </p:txBody>
+      </p:sp>
+      <p:sp>
+        <p:nvSpPr>
+          <p:cNvPr id="8" name="Rounded Rectangle 7"/>
+          <p:cNvSpPr/>
+          <p:nvPr/>
+        </p:nvSpPr>
+        <p:spPr>
+          <a:xfrm>
+            <a:off x="6355080" y="1719072"/>
+            <a:ext cx="5102352" cy="4754880"/>
+          </a:xfrm>
+          <a:prstGeom prst="roundRect">
+            <a:avLst/>
+          </a:prstGeom>
+          <a:solidFill>
+            <a:srgbClr val="F1F5F9"/>
+          </a:solidFill>
+          <a:ln w="12700">
+            <a:solidFill>
+              <a:srgbClr val="CBD5E1"/>
+            </a:solidFill>
+          </a:ln>
+        </p:spPr>
+        <p:style>
+          <a:lnRef idx="1">
+            <a:schemeClr val="accent1"/>
+          </a:lnRef>
+          <a:fillRef idx="3">
+            <a:schemeClr val="accent1"/>
+          </a:fillRef>
+          <a:effectRef idx="2">
+            <a:schemeClr val="accent1"/>
+          </a:effectRef>
+          <a:fontRef idx="minor">
+            <a:schemeClr val="lt1"/>
+          </a:fontRef>
+        </p:style>
+        <p:txBody>
+          <a:bodyPr rtlCol="0" anchor="ctr"/>
+          <a:lstStyle/>
+          <a:p>
+            <a:pPr algn="ctr"/>
+          </a:p>
+        </p:txBody>
+      </p:sp>
+      <p:sp>
+        <p:nvSpPr>
+          <p:cNvPr id="9" name="Rectangle 8"/>
+          <p:cNvSpPr/>
+          <p:nvPr/>
+        </p:nvSpPr>
+        <p:spPr>
+          <a:xfrm>
+            <a:off x="6355080" y="1719072"/>
+            <a:ext cx="5102352" cy="320040"/>
+          </a:xfrm>
+          <a:prstGeom prst="rect">
+            <a:avLst/>
+          </a:prstGeom>
+          <a:solidFill>
+            <a:srgbClr val="E2E8F0"/>
+          </a:solidFill>
+          <a:ln>
+            <a:noFill/>
+          </a:ln>
+        </p:spPr>
+        <p:style>
+          <a:lnRef idx="1">
+            <a:schemeClr val="accent1"/>
+          </a:lnRef>
+          <a:fillRef idx="3">
+            <a:schemeClr val="accent1"/>
+          </a:fillRef>
+          <a:effectRef idx="2">
+            <a:schemeClr val="accent1"/>
+          </a:effectRef>
+          <a:fontRef idx="minor">
+            <a:schemeClr val="lt1"/>
+          </a:fontRef>
+        </p:style>
+        <p:txBody>
+          <a:bodyPr rtlCol="0" anchor="ctr"/>
+          <a:lstStyle/>
+          <a:p>
+            <a:pPr algn="ctr"/>
+          </a:p>
+        </p:txBody>
+      </p:sp>
+      <p:sp>
+        <p:nvSpPr>
+          <p:cNvPr id="10" name="Oval 9"/>
+          <p:cNvSpPr/>
+          <p:nvPr/>
+        </p:nvSpPr>
+        <p:spPr>
+          <a:xfrm>
+            <a:off x="6492240" y="1819656"/>
+            <a:ext cx="109728" cy="109728"/>
+          </a:xfrm>
+          <a:prstGeom prst="ellipse">
+            <a:avLst/>
+          </a:prstGeom>
+          <a:solidFill>
+            <a:srgbClr val="EF4444"/>
+          </a:solidFill>
+          <a:ln>
+            <a:noFill/>
+          </a:ln>
+        </p:spPr>
+        <p:style>
+          <a:lnRef idx="1">
+            <a:schemeClr val="accent1"/>
+          </a:lnRef>
+          <a:fillRef idx="3">
+            <a:schemeClr val="accent1"/>
+          </a:fillRef>
+          <a:effectRef idx="2">
+            <a:schemeClr val="accent1"/>
+          </a:effectRef>
+          <a:fontRef idx="minor">
+            <a:schemeClr val="lt1"/>
+          </a:fontRef>
+        </p:style>
+        <p:txBody>
+          <a:bodyPr rtlCol="0" anchor="ctr"/>
+          <a:lstStyle/>
+          <a:p>
+            <a:pPr algn="ctr"/>
+          </a:p>
+        </p:txBody>
+      </p:sp>
+      <p:sp>
+        <p:nvSpPr>
+          <p:cNvPr id="11" name="Oval 10"/>
+          <p:cNvSpPr/>
+          <p:nvPr/>
+        </p:nvSpPr>
+        <p:spPr>
+          <a:xfrm>
+            <a:off x="6638544" y="1819656"/>
+            <a:ext cx="109728" cy="109728"/>
+          </a:xfrm>
+          <a:prstGeom prst="ellipse">
+            <a:avLst/>
+          </a:prstGeom>
+          <a:solidFill>
+            <a:srgbClr val="F59E0B"/>
+          </a:solidFill>
+          <a:ln>
+            <a:noFill/>
+          </a:ln>
+        </p:spPr>
+        <p:style>
+          <a:lnRef idx="1">
+            <a:schemeClr val="accent1"/>
+          </a:lnRef>
+          <a:fillRef idx="3">
+            <a:schemeClr val="accent1"/>
+          </a:fillRef>
+          <a:effectRef idx="2">
+            <a:schemeClr val="accent1"/>
+          </a:effectRef>
+          <a:fontRef idx="minor">
+            <a:schemeClr val="lt1"/>
+          </a:fontRef>
+        </p:style>
+        <p:txBody>
+          <a:bodyPr rtlCol="0" anchor="ctr"/>
+          <a:lstStyle/>
+          <a:p>
+            <a:pPr algn="ctr"/>
+          </a:p>
+        </p:txBody>
+      </p:sp>
+      <p:sp>
+        <p:nvSpPr>
+          <p:cNvPr id="12" name="Oval 11"/>
+          <p:cNvSpPr/>
+          <p:nvPr/>
+        </p:nvSpPr>
+        <p:spPr>
+          <a:xfrm>
+            <a:off x="6784848" y="1819656"/>
+            <a:ext cx="109728" cy="109728"/>
+          </a:xfrm>
+          <a:prstGeom prst="ellipse">
+            <a:avLst/>
+          </a:prstGeom>
+          <a:solidFill>
+            <a:srgbClr val="10B981"/>
+          </a:solidFill>
+          <a:ln>
+            <a:noFill/>
+          </a:ln>
+        </p:spPr>
+        <p:style>
+          <a:lnRef idx="1">
+            <a:schemeClr val="accent1"/>
+          </a:lnRef>
+          <a:fillRef idx="3">
+            <a:schemeClr val="accent1"/>
+          </a:fillRef>
+          <a:effectRef idx="2">
+            <a:schemeClr val="accent1"/>
+          </a:effectRef>
+          <a:fontRef idx="minor">
+            <a:schemeClr val="lt1"/>
+          </a:fontRef>
+        </p:style>
+        <p:txBody>
+          <a:bodyPr rtlCol="0" anchor="ctr"/>
+          <a:lstStyle/>
+          <a:p>
+            <a:pPr algn="ctr"/>
+          </a:p>
+        </p:txBody>
+      </p:sp>
+      <p:sp>
+        <p:nvSpPr>
+          <p:cNvPr id="13" name="TextBox 12"/>
+          <p:cNvSpPr txBox="1"/>
+          <p:nvPr/>
+        </p:nvSpPr>
+        <p:spPr>
+          <a:xfrm>
+            <a:off x="6995160" y="1755648"/>
+            <a:ext cx="4370832" cy="256032"/>
+          </a:xfrm>
+          <a:prstGeom prst="rect">
+            <a:avLst/>
+          </a:prstGeom>
+          <a:noFill/>
+        </p:spPr>
+        <p:txBody>
+          <a:bodyPr wrap="none" lIns="0" tIns="0">
+            <a:spAutoFit/>
+          </a:bodyPr>
+          <a:lstStyle/>
+          <a:p>
+            <a:pPr>
+              <a:defRPr sz="850">
+                <a:solidFill>
+                  <a:srgbClr val="475569"/>
+                </a:solidFill>
+              </a:defRPr>
+            </a:pPr>
+            <a:r>
+              <a:t>Live Platform Dashboard (http://localhost:5173)</a:t>
+            </a:r>
+          </a:p>
+        </p:txBody>
+      </p:sp>
+      <p:pic>
+        <p:nvPicPr>
+          <p:cNvPr id="14" name="Picture 13" descr="shot_dashboard.png"/>
+          <p:cNvPicPr>
+            <a:picLocks noChangeAspect="1"/>
+          </p:cNvPicPr>
+          <p:nvPr/>
+        </p:nvPicPr>
+        <p:blipFill>
+          <a:blip r:embed="rId3"/>
+          <a:stretch>
+            <a:fillRect/>
+          </a:stretch>
+        </p:blipFill>
+        <p:spPr>
+          <a:xfrm>
+            <a:off x="6355080" y="2039112"/>
+            <a:ext cx="5102352" cy="4434840"/>
+          </a:xfrm>
+          <a:prstGeom prst="rect">
+            <a:avLst/>
+          </a:prstGeom>
+        </p:spPr>
+      </p:pic>
     </p:spTree>
   </p:cSld>
   <p:clrMapOvr>
@@ -4326,7 +4800,7 @@
             <a:avLst/>
           </a:prstGeom>
           <a:solidFill>
-            <a:srgbClr val="0B0F19"/>
+            <a:srgbClr val="FFFFFF"/>
           </a:solidFill>
           <a:ln>
             <a:noFill/>
@@ -4362,18 +4836,18 @@
         </p:nvSpPr>
         <p:spPr>
           <a:xfrm>
-            <a:off x="914400" y="731520"/>
-            <a:ext cx="10362895" cy="5394960"/>
+            <a:off x="731520" y="320040"/>
+            <a:ext cx="5029200" cy="292608"/>
           </a:xfrm>
           <a:prstGeom prst="roundRect">
             <a:avLst/>
           </a:prstGeom>
           <a:solidFill>
-            <a:srgbClr val="111827"/>
-          </a:solidFill>
-          <a:ln w="19050">
+            <a:srgbClr val="EFF6FF"/>
+          </a:solidFill>
+          <a:ln w="12700">
             <a:solidFill>
-              <a:srgbClr val="38BDF8"/>
+              <a:srgbClr val="BFDBFE"/>
             </a:solidFill>
           </a:ln>
         </p:spPr>
@@ -4392,21 +4866,196 @@
           </a:fontRef>
         </p:style>
         <p:txBody>
-          <a:bodyPr rtlCol="0" anchor="ctr" wrap="square" tIns="548640" lIns="731520" rIns="731520"/>
+          <a:bodyPr rtlCol="0" anchor="ctr" tIns="36576" lIns="137160"/>
+          <a:lstStyle/>
+          <a:p>
+            <a:pPr algn="ctr">
+              <a:defRPr sz="850" b="1">
+                <a:solidFill>
+                  <a:srgbClr val="2563EB"/>
+                </a:solidFill>
+              </a:defRPr>
+            </a:pPr>
+            <a:r>
+              <a:t>PROJECT SUMMARY &amp; ROADMAP</a:t>
+            </a:r>
+          </a:p>
+        </p:txBody>
+      </p:sp>
+      <p:sp>
+        <p:nvSpPr>
+          <p:cNvPr id="4" name="TextBox 3"/>
+          <p:cNvSpPr txBox="1"/>
+          <p:nvPr/>
+        </p:nvSpPr>
+        <p:spPr>
+          <a:xfrm>
+            <a:off x="731520" y="658368"/>
+            <a:ext cx="10728655" cy="594360"/>
+          </a:xfrm>
+          <a:prstGeom prst="rect">
+            <a:avLst/>
+          </a:prstGeom>
+          <a:noFill/>
+        </p:spPr>
+        <p:txBody>
+          <a:bodyPr wrap="square" lIns="0" tIns="0">
+            <a:spAutoFit/>
+          </a:bodyPr>
+          <a:lstStyle/>
+          <a:p>
+            <a:pPr>
+              <a:defRPr sz="2200" b="1">
+                <a:solidFill>
+                  <a:srgbClr val="0F172A"/>
+                </a:solidFill>
+              </a:defRPr>
+            </a:pPr>
+            <a:r>
+              <a:t>Summary &amp; Next Milestones</a:t>
+            </a:r>
+          </a:p>
+        </p:txBody>
+      </p:sp>
+      <p:sp>
+        <p:nvSpPr>
+          <p:cNvPr id="5" name="TextBox 4"/>
+          <p:cNvSpPr txBox="1"/>
+          <p:nvPr/>
+        </p:nvSpPr>
+        <p:spPr>
+          <a:xfrm>
+            <a:off x="731520" y="1234440"/>
+            <a:ext cx="10728655" cy="320040"/>
+          </a:xfrm>
+          <a:prstGeom prst="rect">
+            <a:avLst/>
+          </a:prstGeom>
+          <a:noFill/>
+        </p:spPr>
+        <p:txBody>
+          <a:bodyPr wrap="square" lIns="0" tIns="0">
+            <a:spAutoFit/>
+          </a:bodyPr>
+          <a:lstStyle/>
+          <a:p>
+            <a:pPr>
+              <a:defRPr sz="1200">
+                <a:solidFill>
+                  <a:srgbClr val="475569"/>
+                </a:solidFill>
+              </a:defRPr>
+            </a:pPr>
+            <a:r>
+              <a:t>Milestone 1 Completed (100%) | Milestone 2 Implemented (90%)</a:t>
+            </a:r>
+          </a:p>
+        </p:txBody>
+      </p:sp>
+      <p:sp>
+        <p:nvSpPr>
+          <p:cNvPr id="6" name="Rectangle 5"/>
+          <p:cNvSpPr/>
+          <p:nvPr/>
+        </p:nvSpPr>
+        <p:spPr>
+          <a:xfrm>
+            <a:off x="731520" y="1572768"/>
+            <a:ext cx="10728655" cy="18288"/>
+          </a:xfrm>
+          <a:prstGeom prst="rect">
+            <a:avLst/>
+          </a:prstGeom>
+          <a:solidFill>
+            <a:srgbClr val="E2E8F0"/>
+          </a:solidFill>
+          <a:ln>
+            <a:noFill/>
+          </a:ln>
+        </p:spPr>
+        <p:style>
+          <a:lnRef idx="1">
+            <a:schemeClr val="accent1"/>
+          </a:lnRef>
+          <a:fillRef idx="3">
+            <a:schemeClr val="accent1"/>
+          </a:fillRef>
+          <a:effectRef idx="2">
+            <a:schemeClr val="accent1"/>
+          </a:effectRef>
+          <a:fontRef idx="minor">
+            <a:schemeClr val="lt1"/>
+          </a:fontRef>
+        </p:style>
+        <p:txBody>
+          <a:bodyPr rtlCol="0" anchor="ctr"/>
+          <a:lstStyle/>
+          <a:p>
+            <a:pPr algn="ctr"/>
+          </a:p>
+        </p:txBody>
+      </p:sp>
+      <p:sp>
+        <p:nvSpPr>
+          <p:cNvPr id="7" name="Rounded Rectangle 6"/>
+          <p:cNvSpPr/>
+          <p:nvPr/>
+        </p:nvSpPr>
+        <p:spPr>
+          <a:xfrm>
+            <a:off x="731520" y="1719072"/>
+            <a:ext cx="5394960" cy="4754880"/>
+          </a:xfrm>
+          <a:prstGeom prst="roundRect">
+            <a:avLst/>
+          </a:prstGeom>
+          <a:solidFill>
+            <a:srgbClr val="F8FAFC"/>
+          </a:solidFill>
+          <a:ln w="12700">
+            <a:solidFill>
+              <a:srgbClr val="E2E8F0"/>
+            </a:solidFill>
+          </a:ln>
+        </p:spPr>
+        <p:style>
+          <a:lnRef idx="1">
+            <a:schemeClr val="accent1"/>
+          </a:lnRef>
+          <a:fillRef idx="3">
+            <a:schemeClr val="accent1"/>
+          </a:fillRef>
+          <a:effectRef idx="2">
+            <a:schemeClr val="accent1"/>
+          </a:effectRef>
+          <a:fontRef idx="minor">
+            <a:schemeClr val="lt1"/>
+          </a:fontRef>
+        </p:style>
+        <p:txBody>
+          <a:bodyPr rtlCol="0" anchor="ctr" wrap="square" tIns="274320" lIns="320040" rIns="320040"/>
           <a:lstStyle/>
           <a:p>
             <a:pPr algn="ctr">
               <a:spcAft>
-                <a:spcPts val="1400"/>
+                <a:spcPts val="1000"/>
               </a:spcAft>
-              <a:defRPr sz="1200" b="1">
-                <a:solidFill>
-                  <a:srgbClr val="38BDF8"/>
+              <a:defRPr sz="1100" b="1">
+                <a:solidFill>
+                  <a:srgbClr val="2563EB"/>
                 </a:solidFill>
               </a:defRPr>
             </a:pPr>
             <a:r>
-              <a:t>PROJECT SUMMARY &amp; ROADMAP</a:t>
+              <a:t>• Milestone 1 (Weeks 1-2): </a:t>
+            </a:r>
+            <a:r>
+              <a:rPr b="0">
+                <a:solidFill>
+                  <a:srgbClr val="1E293B"/>
+                </a:solidFill>
+              </a:rPr>
+              <a:t>100% Completed &amp; Verified (SpaCy NER + Logistic Regression Baseline)</a:t>
             </a:r>
           </a:p>
           <a:p>
@@ -4414,82 +5063,348 @@
               <a:spcAft>
                 <a:spcPts val="1000"/>
               </a:spcAft>
-              <a:defRPr sz="3600" b="1">
-                <a:solidFill>
-                  <a:srgbClr val="FFFFFF"/>
+              <a:defRPr sz="1100" b="1">
+                <a:solidFill>
+                  <a:srgbClr val="2563EB"/>
                 </a:solidFill>
               </a:defRPr>
             </a:pPr>
             <a:r>
-              <a:t>Summary &amp; Next Milestones</a:t>
+              <a:t>• Milestone 2 (Weeks 3-4): </a:t>
+            </a:r>
+            <a:r>
+              <a:rPr b="0">
+                <a:solidFill>
+                  <a:srgbClr val="1E293B"/>
+                </a:solidFill>
+              </a:rPr>
+              <a:t>90% Completed (Multi-Model Ensemble, F1 Comparison, Skill Gap Analysis)</a:t>
             </a:r>
           </a:p>
           <a:p>
             <a:pPr>
               <a:spcAft>
-                <a:spcPts val="2400"/>
+                <a:spcPts val="1000"/>
               </a:spcAft>
-              <a:defRPr sz="1800">
-                <a:solidFill>
-                  <a:srgbClr val="94A3B8"/>
+              <a:defRPr sz="1100" b="1">
+                <a:solidFill>
+                  <a:srgbClr val="2563EB"/>
                 </a:solidFill>
               </a:defRPr>
             </a:pPr>
             <a:r>
-              <a:t>Milestone 1 Completed (100%) | Milestone 2 Implemented (90%)</a:t>
+              <a:t>• Backend &amp; Database: </a:t>
+            </a:r>
+            <a:r>
+              <a:rPr b="0">
+                <a:solidFill>
+                  <a:srgbClr val="1E293B"/>
+                </a:solidFill>
+              </a:rPr>
+              <a:t>100% Live (FastAPI Server on port 8000 + Supabase PostgreSQL Database)</a:t>
             </a:r>
           </a:p>
           <a:p>
             <a:pPr>
-              <a:defRPr sz="1400">
-                <a:solidFill>
-                  <a:srgbClr val="E2E8F0"/>
+              <a:spcAft>
+                <a:spcPts val="1000"/>
+              </a:spcAft>
+              <a:defRPr sz="1100" b="1">
+                <a:solidFill>
+                  <a:srgbClr val="2563EB"/>
                 </a:solidFill>
               </a:defRPr>
             </a:pPr>
             <a:r>
-              <a:t>Accomplished So Far:</a:t>
-            </a:r>
-            <a:br/>
-            <a:r>
-              <a:t>* SpaCy NER Resume Parser (100% Precision)</a:t>
-            </a:r>
-            <a:br/>
-            <a:r>
-              <a:t>* Baseline Logistic Regression (100% Top-1 Accuracy)</a:t>
-            </a:r>
-            <a:br/>
-            <a:r>
-              <a:t>* Random Forest &amp; XGBoost Ensemble Benchmark (F1: 0.98 - 1.00)</a:t>
-            </a:r>
-            <a:br/>
-            <a:r>
-              <a:t>* Skill Gap Analysis &amp; Top-5 Career Ranking Engine</a:t>
-            </a:r>
-            <a:br/>
-            <a:r>
-              <a:t>* Supabase PostgreSQL Cloud Database &amp; FastAPI REST Service</a:t>
-            </a:r>
-            <a:br/>
-            <a:br/>
-            <a:r>
-              <a:t>Next Steps for Milestone 3 &amp; 4:</a:t>
-            </a:r>
-            <a:br/>
-            <a:r>
-              <a:t>* GitHub Actions Automated CI/CD Model Accuracy Gate</a:t>
-            </a:r>
-            <a:br/>
-            <a:r>
-              <a:t>* Export Personalized Career Roadmaps as PDF</a:t>
-            </a:r>
-            <a:br/>
-            <a:r>
-              <a:t>* Final Deployment on Cloud &amp; SIH Prototype Showcase</a:t>
-            </a:r>
-          </a:p>
-        </p:txBody>
-      </p:sp>
+              <a:t>• Next Steps (Milestone 3): </a:t>
+            </a:r>
+            <a:r>
+              <a:rPr b="0">
+                <a:solidFill>
+                  <a:srgbClr val="1E293B"/>
+                </a:solidFill>
+              </a:rPr>
+              <a:t>Automated GitHub Actions CI/CD Accuracy Gate + PDF Career Roadmap Export</a:t>
+            </a:r>
+          </a:p>
+        </p:txBody>
+      </p:sp>
+      <p:sp>
+        <p:nvSpPr>
+          <p:cNvPr id="8" name="Rounded Rectangle 7"/>
+          <p:cNvSpPr/>
+          <p:nvPr/>
+        </p:nvSpPr>
+        <p:spPr>
+          <a:xfrm>
+            <a:off x="6355080" y="1719072"/>
+            <a:ext cx="5102352" cy="4754880"/>
+          </a:xfrm>
+          <a:prstGeom prst="roundRect">
+            <a:avLst/>
+          </a:prstGeom>
+          <a:solidFill>
+            <a:srgbClr val="F1F5F9"/>
+          </a:solidFill>
+          <a:ln w="12700">
+            <a:solidFill>
+              <a:srgbClr val="CBD5E1"/>
+            </a:solidFill>
+          </a:ln>
+        </p:spPr>
+        <p:style>
+          <a:lnRef idx="1">
+            <a:schemeClr val="accent1"/>
+          </a:lnRef>
+          <a:fillRef idx="3">
+            <a:schemeClr val="accent1"/>
+          </a:fillRef>
+          <a:effectRef idx="2">
+            <a:schemeClr val="accent1"/>
+          </a:effectRef>
+          <a:fontRef idx="minor">
+            <a:schemeClr val="lt1"/>
+          </a:fontRef>
+        </p:style>
+        <p:txBody>
+          <a:bodyPr rtlCol="0" anchor="ctr"/>
+          <a:lstStyle/>
+          <a:p>
+            <a:pPr algn="ctr"/>
+          </a:p>
+        </p:txBody>
+      </p:sp>
+      <p:sp>
+        <p:nvSpPr>
+          <p:cNvPr id="9" name="Rectangle 8"/>
+          <p:cNvSpPr/>
+          <p:nvPr/>
+        </p:nvSpPr>
+        <p:spPr>
+          <a:xfrm>
+            <a:off x="6355080" y="1719072"/>
+            <a:ext cx="5102352" cy="320040"/>
+          </a:xfrm>
+          <a:prstGeom prst="rect">
+            <a:avLst/>
+          </a:prstGeom>
+          <a:solidFill>
+            <a:srgbClr val="E2E8F0"/>
+          </a:solidFill>
+          <a:ln>
+            <a:noFill/>
+          </a:ln>
+        </p:spPr>
+        <p:style>
+          <a:lnRef idx="1">
+            <a:schemeClr val="accent1"/>
+          </a:lnRef>
+          <a:fillRef idx="3">
+            <a:schemeClr val="accent1"/>
+          </a:fillRef>
+          <a:effectRef idx="2">
+            <a:schemeClr val="accent1"/>
+          </a:effectRef>
+          <a:fontRef idx="minor">
+            <a:schemeClr val="lt1"/>
+          </a:fontRef>
+        </p:style>
+        <p:txBody>
+          <a:bodyPr rtlCol="0" anchor="ctr"/>
+          <a:lstStyle/>
+          <a:p>
+            <a:pPr algn="ctr"/>
+          </a:p>
+        </p:txBody>
+      </p:sp>
+      <p:sp>
+        <p:nvSpPr>
+          <p:cNvPr id="10" name="Oval 9"/>
+          <p:cNvSpPr/>
+          <p:nvPr/>
+        </p:nvSpPr>
+        <p:spPr>
+          <a:xfrm>
+            <a:off x="6492240" y="1819656"/>
+            <a:ext cx="109728" cy="109728"/>
+          </a:xfrm>
+          <a:prstGeom prst="ellipse">
+            <a:avLst/>
+          </a:prstGeom>
+          <a:solidFill>
+            <a:srgbClr val="EF4444"/>
+          </a:solidFill>
+          <a:ln>
+            <a:noFill/>
+          </a:ln>
+        </p:spPr>
+        <p:style>
+          <a:lnRef idx="1">
+            <a:schemeClr val="accent1"/>
+          </a:lnRef>
+          <a:fillRef idx="3">
+            <a:schemeClr val="accent1"/>
+          </a:fillRef>
+          <a:effectRef idx="2">
+            <a:schemeClr val="accent1"/>
+          </a:effectRef>
+          <a:fontRef idx="minor">
+            <a:schemeClr val="lt1"/>
+          </a:fontRef>
+        </p:style>
+        <p:txBody>
+          <a:bodyPr rtlCol="0" anchor="ctr"/>
+          <a:lstStyle/>
+          <a:p>
+            <a:pPr algn="ctr"/>
+          </a:p>
+        </p:txBody>
+      </p:sp>
+      <p:sp>
+        <p:nvSpPr>
+          <p:cNvPr id="11" name="Oval 10"/>
+          <p:cNvSpPr/>
+          <p:nvPr/>
+        </p:nvSpPr>
+        <p:spPr>
+          <a:xfrm>
+            <a:off x="6638544" y="1819656"/>
+            <a:ext cx="109728" cy="109728"/>
+          </a:xfrm>
+          <a:prstGeom prst="ellipse">
+            <a:avLst/>
+          </a:prstGeom>
+          <a:solidFill>
+            <a:srgbClr val="F59E0B"/>
+          </a:solidFill>
+          <a:ln>
+            <a:noFill/>
+          </a:ln>
+        </p:spPr>
+        <p:style>
+          <a:lnRef idx="1">
+            <a:schemeClr val="accent1"/>
+          </a:lnRef>
+          <a:fillRef idx="3">
+            <a:schemeClr val="accent1"/>
+          </a:fillRef>
+          <a:effectRef idx="2">
+            <a:schemeClr val="accent1"/>
+          </a:effectRef>
+          <a:fontRef idx="minor">
+            <a:schemeClr val="lt1"/>
+          </a:fontRef>
+        </p:style>
+        <p:txBody>
+          <a:bodyPr rtlCol="0" anchor="ctr"/>
+          <a:lstStyle/>
+          <a:p>
+            <a:pPr algn="ctr"/>
+          </a:p>
+        </p:txBody>
+      </p:sp>
+      <p:sp>
+        <p:nvSpPr>
+          <p:cNvPr id="12" name="Oval 11"/>
+          <p:cNvSpPr/>
+          <p:nvPr/>
+        </p:nvSpPr>
+        <p:spPr>
+          <a:xfrm>
+            <a:off x="6784848" y="1819656"/>
+            <a:ext cx="109728" cy="109728"/>
+          </a:xfrm>
+          <a:prstGeom prst="ellipse">
+            <a:avLst/>
+          </a:prstGeom>
+          <a:solidFill>
+            <a:srgbClr val="10B981"/>
+          </a:solidFill>
+          <a:ln>
+            <a:noFill/>
+          </a:ln>
+        </p:spPr>
+        <p:style>
+          <a:lnRef idx="1">
+            <a:schemeClr val="accent1"/>
+          </a:lnRef>
+          <a:fillRef idx="3">
+            <a:schemeClr val="accent1"/>
+          </a:fillRef>
+          <a:effectRef idx="2">
+            <a:schemeClr val="accent1"/>
+          </a:effectRef>
+          <a:fontRef idx="minor">
+            <a:schemeClr val="lt1"/>
+          </a:fontRef>
+        </p:style>
+        <p:txBody>
+          <a:bodyPr rtlCol="0" anchor="ctr"/>
+          <a:lstStyle/>
+          <a:p>
+            <a:pPr algn="ctr"/>
+          </a:p>
+        </p:txBody>
+      </p:sp>
+      <p:sp>
+        <p:nvSpPr>
+          <p:cNvPr id="13" name="TextBox 12"/>
+          <p:cNvSpPr txBox="1"/>
+          <p:nvPr/>
+        </p:nvSpPr>
+        <p:spPr>
+          <a:xfrm>
+            <a:off x="6995160" y="1755648"/>
+            <a:ext cx="4370832" cy="256032"/>
+          </a:xfrm>
+          <a:prstGeom prst="rect">
+            <a:avLst/>
+          </a:prstGeom>
+          <a:noFill/>
+        </p:spPr>
+        <p:txBody>
+          <a:bodyPr wrap="none" lIns="0" tIns="0">
+            <a:spAutoFit/>
+          </a:bodyPr>
+          <a:lstStyle/>
+          <a:p>
+            <a:pPr>
+              <a:defRPr sz="850">
+                <a:solidFill>
+                  <a:srgbClr val="475569"/>
+                </a:solidFill>
+              </a:defRPr>
+            </a:pPr>
+            <a:r>
+              <a:t>Completed Career Platform Ready for Live Demo</a:t>
+            </a:r>
+          </a:p>
+        </p:txBody>
+      </p:sp>
+      <p:pic>
+        <p:nvPicPr>
+          <p:cNvPr id="14" name="Picture 13" descr="shot_dashboard.png"/>
+          <p:cNvPicPr>
+            <a:picLocks noChangeAspect="1"/>
+          </p:cNvPicPr>
+          <p:nvPr/>
+        </p:nvPicPr>
+        <p:blipFill>
+          <a:blip r:embed="rId3"/>
+          <a:stretch>
+            <a:fillRect/>
+          </a:stretch>
+        </p:blipFill>
+        <p:spPr>
+          <a:xfrm>
+            <a:off x="6355080" y="2039112"/>
+            <a:ext cx="5102352" cy="4434840"/>
+          </a:xfrm>
+          <a:prstGeom prst="rect">
+            <a:avLst/>
+          </a:prstGeom>
+        </p:spPr>
+      </p:pic>
     </p:spTree>
   </p:cSld>
   <p:clrMapOvr>
@@ -4523,7 +5438,7 @@
             <a:avLst/>
           </a:prstGeom>
           <a:solidFill>
-            <a:srgbClr val="0B0F19"/>
+            <a:srgbClr val="FFFFFF"/>
           </a:solidFill>
           <a:ln>
             <a:noFill/>
@@ -4553,74 +5468,24 @@
       </p:sp>
       <p:sp>
         <p:nvSpPr>
-          <p:cNvPr id="3" name="TextBox 2"/>
-          <p:cNvSpPr txBox="1"/>
-          <p:nvPr/>
-        </p:nvSpPr>
-        <p:spPr>
-          <a:xfrm>
-            <a:off x="731520" y="365760"/>
-            <a:ext cx="10728655" cy="1097280"/>
-          </a:xfrm>
-          <a:prstGeom prst="rect">
-            <a:avLst/>
-          </a:prstGeom>
-          <a:noFill/>
-        </p:spPr>
-        <p:txBody>
-          <a:bodyPr wrap="square">
-            <a:spAutoFit/>
-          </a:bodyPr>
-          <a:lstStyle/>
-          <a:p>
-            <a:pPr>
-              <a:spcAft>
-                <a:spcPts val="400"/>
-              </a:spcAft>
-              <a:defRPr sz="1000" b="1">
-                <a:solidFill>
-                  <a:srgbClr val="38BDF8"/>
-                </a:solidFill>
-              </a:defRPr>
-            </a:pPr>
-            <a:r>
-              <a:t>PROJECT MOTIVATION &amp; OVERVIEW</a:t>
-            </a:r>
-          </a:p>
-          <a:p>
-            <a:pPr>
-              <a:defRPr sz="2400" b="1">
-                <a:solidFill>
-                  <a:srgbClr val="FFFFFF"/>
-                </a:solidFill>
-              </a:defRPr>
-            </a:pPr>
-            <a:r>
-              <a:t>Problem Statement &amp; Platform Vision</a:t>
-            </a:r>
-          </a:p>
-        </p:txBody>
-      </p:sp>
-      <p:sp>
-        <p:nvSpPr>
-          <p:cNvPr id="4" name="Rounded Rectangle 3"/>
+          <p:cNvPr id="3" name="Rounded Rectangle 2"/>
           <p:cNvSpPr/>
           <p:nvPr/>
         </p:nvSpPr>
         <p:spPr>
           <a:xfrm>
-            <a:off x="731520" y="1554480"/>
-            <a:ext cx="6217920" cy="4846320"/>
+            <a:off x="731520" y="320040"/>
+            <a:ext cx="5029200" cy="292608"/>
           </a:xfrm>
           <a:prstGeom prst="roundRect">
             <a:avLst/>
           </a:prstGeom>
           <a:solidFill>
-            <a:srgbClr val="111827"/>
+            <a:srgbClr val="EFF6FF"/>
           </a:solidFill>
           <a:ln w="12700">
             <a:solidFill>
-              <a:srgbClr val="1F2937"/>
+              <a:srgbClr val="BFDBFE"/>
             </a:solidFill>
           </a:ln>
         </p:spPr>
@@ -4639,123 +5504,111 @@
           </a:fontRef>
         </p:style>
         <p:txBody>
-          <a:bodyPr rtlCol="0" anchor="ctr" wrap="square" tIns="274320" lIns="365760" rIns="365760"/>
+          <a:bodyPr rtlCol="0" anchor="ctr" tIns="36576" lIns="137160"/>
           <a:lstStyle/>
           <a:p>
             <a:pPr algn="ctr">
-              <a:spcAft>
-                <a:spcPts val="800"/>
-              </a:spcAft>
-              <a:defRPr sz="1200" b="1">
-                <a:solidFill>
-                  <a:srgbClr val="38BDF8"/>
+              <a:defRPr sz="850" b="1">
+                <a:solidFill>
+                  <a:srgbClr val="2563EB"/>
                 </a:solidFill>
               </a:defRPr>
             </a:pPr>
             <a:r>
-              <a:t>- The Problem: </a:t>
-            </a:r>
-            <a:r>
-              <a:rPr b="0">
-                <a:solidFill>
-                  <a:srgbClr val="E2E8F0"/>
-                </a:solidFill>
-              </a:rPr>
-              <a:t>Students and early-career engineers struggle with career ambiguity, fragmented curriculum pathways, and lack of visibility into rapidly evolving industry skill demands.</a:t>
-            </a:r>
-          </a:p>
+              <a:t>PROJECT MOTIVATION &amp; OBJECTIVES</a:t>
+            </a:r>
+          </a:p>
+        </p:txBody>
+      </p:sp>
+      <p:sp>
+        <p:nvSpPr>
+          <p:cNvPr id="4" name="TextBox 3"/>
+          <p:cNvSpPr txBox="1"/>
+          <p:nvPr/>
+        </p:nvSpPr>
+        <p:spPr>
+          <a:xfrm>
+            <a:off x="731520" y="658368"/>
+            <a:ext cx="10728655" cy="594360"/>
+          </a:xfrm>
+          <a:prstGeom prst="rect">
+            <a:avLst/>
+          </a:prstGeom>
+          <a:noFill/>
+        </p:spPr>
+        <p:txBody>
+          <a:bodyPr wrap="square" lIns="0" tIns="0">
+            <a:spAutoFit/>
+          </a:bodyPr>
+          <a:lstStyle/>
           <a:p>
             <a:pPr>
-              <a:spcAft>
-                <a:spcPts val="800"/>
-              </a:spcAft>
-              <a:defRPr sz="1200" b="1">
-                <a:solidFill>
-                  <a:srgbClr val="38BDF8"/>
+              <a:defRPr sz="2200" b="1">
+                <a:solidFill>
+                  <a:srgbClr val="0F172A"/>
                 </a:solidFill>
               </a:defRPr>
             </a:pPr>
             <a:r>
-              <a:t>- Our Solution: </a:t>
-            </a:r>
-            <a:r>
-              <a:rPr b="0">
-                <a:solidFill>
-                  <a:srgbClr val="E2E8F0"/>
-                </a:solidFill>
-              </a:rPr>
-              <a:t>An end-to-end AI platform that parses unstructured resumes, models career transition probabilities, ranks personalized pathways, and provides actionable skill gap roadmaps.</a:t>
-            </a:r>
-          </a:p>
+              <a:t>Problem Statement &amp; Platform Objectives</a:t>
+            </a:r>
+          </a:p>
+        </p:txBody>
+      </p:sp>
+      <p:sp>
+        <p:nvSpPr>
+          <p:cNvPr id="5" name="TextBox 4"/>
+          <p:cNvSpPr txBox="1"/>
+          <p:nvPr/>
+        </p:nvSpPr>
+        <p:spPr>
+          <a:xfrm>
+            <a:off x="731520" y="1234440"/>
+            <a:ext cx="10728655" cy="320040"/>
+          </a:xfrm>
+          <a:prstGeom prst="rect">
+            <a:avLst/>
+          </a:prstGeom>
+          <a:noFill/>
+        </p:spPr>
+        <p:txBody>
+          <a:bodyPr wrap="square" lIns="0" tIns="0">
+            <a:spAutoFit/>
+          </a:bodyPr>
+          <a:lstStyle/>
           <a:p>
             <a:pPr>
-              <a:spcAft>
-                <a:spcPts val="800"/>
-              </a:spcAft>
-              <a:defRPr sz="1200" b="1">
-                <a:solidFill>
-                  <a:srgbClr val="38BDF8"/>
+              <a:defRPr sz="1200">
+                <a:solidFill>
+                  <a:srgbClr val="475569"/>
                 </a:solidFill>
               </a:defRPr>
             </a:pPr>
             <a:r>
-              <a:t>- Academic Rigor: </a:t>
-            </a:r>
-            <a:r>
-              <a:rPr b="0">
-                <a:solidFill>
-                  <a:srgbClr val="E2E8F0"/>
-                </a:solidFill>
-              </a:rPr>
-              <a:t>Designed strictly according to the SIH 2025 assignment guidelines, achieving quantitative precision targets and verified F1 benchmarks.</a:t>
-            </a:r>
-          </a:p>
-          <a:p>
-            <a:pPr>
-              <a:spcAft>
-                <a:spcPts val="800"/>
-              </a:spcAft>
-              <a:defRPr sz="1200" b="1">
-                <a:solidFill>
-                  <a:srgbClr val="38BDF8"/>
-                </a:solidFill>
-              </a:defRPr>
-            </a:pPr>
-            <a:r>
-              <a:t>- Teacher Reference Design: </a:t>
-            </a:r>
-            <a:r>
-              <a:rPr b="0">
-                <a:solidFill>
-                  <a:srgbClr val="E2E8F0"/>
-                </a:solidFill>
-              </a:rPr>
-              <a:t>Engineered with a 12-section SaaS dashboard matching our faculty reference specifications with dark-mode glassmorphism styling.</a:t>
-            </a:r>
-          </a:p>
-        </p:txBody>
-      </p:sp>
-      <p:sp>
-        <p:nvSpPr>
-          <p:cNvPr id="5" name="Rounded Rectangle 4"/>
+              <a:t>Solving Career Ambiguity with Data-Driven Machine Learning</a:t>
+            </a:r>
+          </a:p>
+        </p:txBody>
+      </p:sp>
+      <p:sp>
+        <p:nvSpPr>
+          <p:cNvPr id="6" name="Rectangle 5"/>
           <p:cNvSpPr/>
           <p:nvPr/>
         </p:nvSpPr>
         <p:spPr>
           <a:xfrm>
-            <a:off x="7132320" y="1554480"/>
-            <a:ext cx="4297680" cy="4846320"/>
-          </a:xfrm>
-          <a:prstGeom prst="roundRect">
-            <a:avLst/>
-          </a:prstGeom>
-          <a:solidFill>
-            <a:srgbClr val="111827"/>
-          </a:solidFill>
-          <a:ln w="12700">
-            <a:solidFill>
-              <a:srgbClr val="1F2937"/>
-            </a:solidFill>
+            <a:off x="731520" y="1572768"/>
+            <a:ext cx="10728655" cy="18288"/>
+          </a:xfrm>
+          <a:prstGeom prst="rect">
+            <a:avLst/>
+          </a:prstGeom>
+          <a:solidFill>
+            <a:srgbClr val="E2E8F0"/>
+          </a:solidFill>
+          <a:ln>
+            <a:noFill/>
           </a:ln>
         </p:spPr>
         <p:style>
@@ -4780,9 +5633,418 @@
           </a:p>
         </p:txBody>
       </p:sp>
+      <p:sp>
+        <p:nvSpPr>
+          <p:cNvPr id="7" name="Rounded Rectangle 6"/>
+          <p:cNvSpPr/>
+          <p:nvPr/>
+        </p:nvSpPr>
+        <p:spPr>
+          <a:xfrm>
+            <a:off x="731520" y="1719072"/>
+            <a:ext cx="5394960" cy="4754880"/>
+          </a:xfrm>
+          <a:prstGeom prst="roundRect">
+            <a:avLst/>
+          </a:prstGeom>
+          <a:solidFill>
+            <a:srgbClr val="F8FAFC"/>
+          </a:solidFill>
+          <a:ln w="12700">
+            <a:solidFill>
+              <a:srgbClr val="E2E8F0"/>
+            </a:solidFill>
+          </a:ln>
+        </p:spPr>
+        <p:style>
+          <a:lnRef idx="1">
+            <a:schemeClr val="accent1"/>
+          </a:lnRef>
+          <a:fillRef idx="3">
+            <a:schemeClr val="accent1"/>
+          </a:fillRef>
+          <a:effectRef idx="2">
+            <a:schemeClr val="accent1"/>
+          </a:effectRef>
+          <a:fontRef idx="minor">
+            <a:schemeClr val="lt1"/>
+          </a:fontRef>
+        </p:style>
+        <p:txBody>
+          <a:bodyPr rtlCol="0" anchor="ctr" wrap="square" tIns="274320" lIns="320040" rIns="320040"/>
+          <a:lstStyle/>
+          <a:p>
+            <a:pPr algn="ctr">
+              <a:spcAft>
+                <a:spcPts val="1000"/>
+              </a:spcAft>
+              <a:defRPr sz="1100" b="1">
+                <a:solidFill>
+                  <a:srgbClr val="2563EB"/>
+                </a:solidFill>
+              </a:defRPr>
+            </a:pPr>
+            <a:r>
+              <a:t>• The Core Challenge: </a:t>
+            </a:r>
+            <a:r>
+              <a:rPr b="0">
+                <a:solidFill>
+                  <a:srgbClr val="1E293B"/>
+                </a:solidFill>
+              </a:rPr>
+              <a:t>Students face career ambiguity, fragmented curriculum paths, and rapidly evolving industry skill demands.</a:t>
+            </a:r>
+          </a:p>
+          <a:p>
+            <a:pPr>
+              <a:spcAft>
+                <a:spcPts val="1000"/>
+              </a:spcAft>
+              <a:defRPr sz="1100" b="1">
+                <a:solidFill>
+                  <a:srgbClr val="2563EB"/>
+                </a:solidFill>
+              </a:defRPr>
+            </a:pPr>
+            <a:r>
+              <a:t>• Automated Resume Ingestion: </a:t>
+            </a:r>
+            <a:r>
+              <a:rPr b="0">
+                <a:solidFill>
+                  <a:srgbClr val="1E293B"/>
+                </a:solidFill>
+              </a:rPr>
+              <a:t>Replaces slow manual profile forms with automated SpaCy Natural Language Processing.</a:t>
+            </a:r>
+          </a:p>
+          <a:p>
+            <a:pPr>
+              <a:spcAft>
+                <a:spcPts val="1000"/>
+              </a:spcAft>
+              <a:defRPr sz="1100" b="1">
+                <a:solidFill>
+                  <a:srgbClr val="2563EB"/>
+                </a:solidFill>
+              </a:defRPr>
+            </a:pPr>
+            <a:r>
+              <a:t>• Probabilistic ML Prediction: </a:t>
+            </a:r>
+            <a:r>
+              <a:rPr b="0">
+                <a:solidFill>
+                  <a:srgbClr val="1E293B"/>
+                </a:solidFill>
+              </a:rPr>
+              <a:t>Evaluates candidate readiness across 5 distinct industry domains using multiclass classification.</a:t>
+            </a:r>
+          </a:p>
+          <a:p>
+            <a:pPr>
+              <a:spcAft>
+                <a:spcPts val="1000"/>
+              </a:spcAft>
+              <a:defRPr sz="1100" b="1">
+                <a:solidFill>
+                  <a:srgbClr val="2563EB"/>
+                </a:solidFill>
+              </a:defRPr>
+            </a:pPr>
+            <a:r>
+              <a:t>• Actionable Skill Gap Diagnostics: </a:t>
+            </a:r>
+            <a:r>
+              <a:rPr b="0">
+                <a:solidFill>
+                  <a:srgbClr val="1E293B"/>
+                </a:solidFill>
+              </a:rPr>
+              <a:t>Calculates verified vs. missing skills against real-world employer benchmarks.</a:t>
+            </a:r>
+          </a:p>
+          <a:p>
+            <a:pPr>
+              <a:spcAft>
+                <a:spcPts val="1000"/>
+              </a:spcAft>
+              <a:defRPr sz="1100" b="1">
+                <a:solidFill>
+                  <a:srgbClr val="2563EB"/>
+                </a:solidFill>
+              </a:defRPr>
+            </a:pPr>
+            <a:r>
+              <a:t>• Academic Benchmark Alignment: </a:t>
+            </a:r>
+            <a:r>
+              <a:rPr b="0">
+                <a:solidFill>
+                  <a:srgbClr val="1E293B"/>
+                </a:solidFill>
+              </a:rPr>
+              <a:t>Engineered strictly according to SIH 2025 requirements with quantitative accuracy metrics.</a:t>
+            </a:r>
+          </a:p>
+        </p:txBody>
+      </p:sp>
+      <p:sp>
+        <p:nvSpPr>
+          <p:cNvPr id="8" name="Rounded Rectangle 7"/>
+          <p:cNvSpPr/>
+          <p:nvPr/>
+        </p:nvSpPr>
+        <p:spPr>
+          <a:xfrm>
+            <a:off x="6355080" y="1719072"/>
+            <a:ext cx="5102352" cy="4754880"/>
+          </a:xfrm>
+          <a:prstGeom prst="roundRect">
+            <a:avLst/>
+          </a:prstGeom>
+          <a:solidFill>
+            <a:srgbClr val="F1F5F9"/>
+          </a:solidFill>
+          <a:ln w="12700">
+            <a:solidFill>
+              <a:srgbClr val="CBD5E1"/>
+            </a:solidFill>
+          </a:ln>
+        </p:spPr>
+        <p:style>
+          <a:lnRef idx="1">
+            <a:schemeClr val="accent1"/>
+          </a:lnRef>
+          <a:fillRef idx="3">
+            <a:schemeClr val="accent1"/>
+          </a:fillRef>
+          <a:effectRef idx="2">
+            <a:schemeClr val="accent1"/>
+          </a:effectRef>
+          <a:fontRef idx="minor">
+            <a:schemeClr val="lt1"/>
+          </a:fontRef>
+        </p:style>
+        <p:txBody>
+          <a:bodyPr rtlCol="0" anchor="ctr"/>
+          <a:lstStyle/>
+          <a:p>
+            <a:pPr algn="ctr"/>
+          </a:p>
+        </p:txBody>
+      </p:sp>
+      <p:sp>
+        <p:nvSpPr>
+          <p:cNvPr id="9" name="Rectangle 8"/>
+          <p:cNvSpPr/>
+          <p:nvPr/>
+        </p:nvSpPr>
+        <p:spPr>
+          <a:xfrm>
+            <a:off x="6355080" y="1719072"/>
+            <a:ext cx="5102352" cy="320040"/>
+          </a:xfrm>
+          <a:prstGeom prst="rect">
+            <a:avLst/>
+          </a:prstGeom>
+          <a:solidFill>
+            <a:srgbClr val="E2E8F0"/>
+          </a:solidFill>
+          <a:ln>
+            <a:noFill/>
+          </a:ln>
+        </p:spPr>
+        <p:style>
+          <a:lnRef idx="1">
+            <a:schemeClr val="accent1"/>
+          </a:lnRef>
+          <a:fillRef idx="3">
+            <a:schemeClr val="accent1"/>
+          </a:fillRef>
+          <a:effectRef idx="2">
+            <a:schemeClr val="accent1"/>
+          </a:effectRef>
+          <a:fontRef idx="minor">
+            <a:schemeClr val="lt1"/>
+          </a:fontRef>
+        </p:style>
+        <p:txBody>
+          <a:bodyPr rtlCol="0" anchor="ctr"/>
+          <a:lstStyle/>
+          <a:p>
+            <a:pPr algn="ctr"/>
+          </a:p>
+        </p:txBody>
+      </p:sp>
+      <p:sp>
+        <p:nvSpPr>
+          <p:cNvPr id="10" name="Oval 9"/>
+          <p:cNvSpPr/>
+          <p:nvPr/>
+        </p:nvSpPr>
+        <p:spPr>
+          <a:xfrm>
+            <a:off x="6492240" y="1819656"/>
+            <a:ext cx="109728" cy="109728"/>
+          </a:xfrm>
+          <a:prstGeom prst="ellipse">
+            <a:avLst/>
+          </a:prstGeom>
+          <a:solidFill>
+            <a:srgbClr val="EF4444"/>
+          </a:solidFill>
+          <a:ln>
+            <a:noFill/>
+          </a:ln>
+        </p:spPr>
+        <p:style>
+          <a:lnRef idx="1">
+            <a:schemeClr val="accent1"/>
+          </a:lnRef>
+          <a:fillRef idx="3">
+            <a:schemeClr val="accent1"/>
+          </a:fillRef>
+          <a:effectRef idx="2">
+            <a:schemeClr val="accent1"/>
+          </a:effectRef>
+          <a:fontRef idx="minor">
+            <a:schemeClr val="lt1"/>
+          </a:fontRef>
+        </p:style>
+        <p:txBody>
+          <a:bodyPr rtlCol="0" anchor="ctr"/>
+          <a:lstStyle/>
+          <a:p>
+            <a:pPr algn="ctr"/>
+          </a:p>
+        </p:txBody>
+      </p:sp>
+      <p:sp>
+        <p:nvSpPr>
+          <p:cNvPr id="11" name="Oval 10"/>
+          <p:cNvSpPr/>
+          <p:nvPr/>
+        </p:nvSpPr>
+        <p:spPr>
+          <a:xfrm>
+            <a:off x="6638544" y="1819656"/>
+            <a:ext cx="109728" cy="109728"/>
+          </a:xfrm>
+          <a:prstGeom prst="ellipse">
+            <a:avLst/>
+          </a:prstGeom>
+          <a:solidFill>
+            <a:srgbClr val="F59E0B"/>
+          </a:solidFill>
+          <a:ln>
+            <a:noFill/>
+          </a:ln>
+        </p:spPr>
+        <p:style>
+          <a:lnRef idx="1">
+            <a:schemeClr val="accent1"/>
+          </a:lnRef>
+          <a:fillRef idx="3">
+            <a:schemeClr val="accent1"/>
+          </a:fillRef>
+          <a:effectRef idx="2">
+            <a:schemeClr val="accent1"/>
+          </a:effectRef>
+          <a:fontRef idx="minor">
+            <a:schemeClr val="lt1"/>
+          </a:fontRef>
+        </p:style>
+        <p:txBody>
+          <a:bodyPr rtlCol="0" anchor="ctr"/>
+          <a:lstStyle/>
+          <a:p>
+            <a:pPr algn="ctr"/>
+          </a:p>
+        </p:txBody>
+      </p:sp>
+      <p:sp>
+        <p:nvSpPr>
+          <p:cNvPr id="12" name="Oval 11"/>
+          <p:cNvSpPr/>
+          <p:nvPr/>
+        </p:nvSpPr>
+        <p:spPr>
+          <a:xfrm>
+            <a:off x="6784848" y="1819656"/>
+            <a:ext cx="109728" cy="109728"/>
+          </a:xfrm>
+          <a:prstGeom prst="ellipse">
+            <a:avLst/>
+          </a:prstGeom>
+          <a:solidFill>
+            <a:srgbClr val="10B981"/>
+          </a:solidFill>
+          <a:ln>
+            <a:noFill/>
+          </a:ln>
+        </p:spPr>
+        <p:style>
+          <a:lnRef idx="1">
+            <a:schemeClr val="accent1"/>
+          </a:lnRef>
+          <a:fillRef idx="3">
+            <a:schemeClr val="accent1"/>
+          </a:fillRef>
+          <a:effectRef idx="2">
+            <a:schemeClr val="accent1"/>
+          </a:effectRef>
+          <a:fontRef idx="minor">
+            <a:schemeClr val="lt1"/>
+          </a:fontRef>
+        </p:style>
+        <p:txBody>
+          <a:bodyPr rtlCol="0" anchor="ctr"/>
+          <a:lstStyle/>
+          <a:p>
+            <a:pPr algn="ctr"/>
+          </a:p>
+        </p:txBody>
+      </p:sp>
+      <p:sp>
+        <p:nvSpPr>
+          <p:cNvPr id="13" name="TextBox 12"/>
+          <p:cNvSpPr txBox="1"/>
+          <p:nvPr/>
+        </p:nvSpPr>
+        <p:spPr>
+          <a:xfrm>
+            <a:off x="6995160" y="1755648"/>
+            <a:ext cx="4370832" cy="256032"/>
+          </a:xfrm>
+          <a:prstGeom prst="rect">
+            <a:avLst/>
+          </a:prstGeom>
+          <a:noFill/>
+        </p:spPr>
+        <p:txBody>
+          <a:bodyPr wrap="none" lIns="0" tIns="0">
+            <a:spAutoFit/>
+          </a:bodyPr>
+          <a:lstStyle/>
+          <a:p>
+            <a:pPr>
+              <a:defRPr sz="850">
+                <a:solidFill>
+                  <a:srgbClr val="475569"/>
+                </a:solidFill>
+              </a:defRPr>
+            </a:pPr>
+            <a:r>
+              <a:t>AI Career Readiness Dashboard with 85% Career Match Index</a:t>
+            </a:r>
+          </a:p>
+        </p:txBody>
+      </p:sp>
       <p:pic>
         <p:nvPicPr>
-          <p:cNvPr id="6" name="Picture 5" descr="chart_accuracy_gauge.png"/>
+          <p:cNvPr id="14" name="Picture 13" descr="shot_dashboard.png"/>
           <p:cNvPicPr>
             <a:picLocks noChangeAspect="1"/>
           </p:cNvPicPr>
@@ -4796,8 +6058,8 @@
         </p:blipFill>
         <p:spPr>
           <a:xfrm>
-            <a:off x="7315200" y="2103120"/>
-            <a:ext cx="3931920" cy="2621280"/>
+            <a:off x="6355080" y="2039112"/>
+            <a:ext cx="5102352" cy="4434840"/>
           </a:xfrm>
           <a:prstGeom prst="rect">
             <a:avLst/>
@@ -4837,7 +6099,7 @@
             <a:avLst/>
           </a:prstGeom>
           <a:solidFill>
-            <a:srgbClr val="0B0F19"/>
+            <a:srgbClr val="FFFFFF"/>
           </a:solidFill>
           <a:ln>
             <a:noFill/>
@@ -4867,74 +6129,24 @@
       </p:sp>
       <p:sp>
         <p:nvSpPr>
-          <p:cNvPr id="3" name="TextBox 2"/>
-          <p:cNvSpPr txBox="1"/>
-          <p:nvPr/>
-        </p:nvSpPr>
-        <p:spPr>
-          <a:xfrm>
-            <a:off x="731520" y="365760"/>
-            <a:ext cx="10728655" cy="1097280"/>
-          </a:xfrm>
-          <a:prstGeom prst="rect">
-            <a:avLst/>
-          </a:prstGeom>
-          <a:noFill/>
-        </p:spPr>
-        <p:txBody>
-          <a:bodyPr wrap="square">
-            <a:spAutoFit/>
-          </a:bodyPr>
-          <a:lstStyle/>
-          <a:p>
-            <a:pPr>
-              <a:spcAft>
-                <a:spcPts val="400"/>
-              </a:spcAft>
-              <a:defRPr sz="1000" b="1">
-                <a:solidFill>
-                  <a:srgbClr val="38BDF8"/>
-                </a:solidFill>
-              </a:defRPr>
-            </a:pPr>
-            <a:r>
-              <a:t>SYSTEM ARCHITECTURE &amp; TECH STACK</a:t>
-            </a:r>
-          </a:p>
-          <a:p>
-            <a:pPr>
-              <a:defRPr sz="2400" b="1">
-                <a:solidFill>
-                  <a:srgbClr val="FFFFFF"/>
-                </a:solidFill>
-              </a:defRPr>
-            </a:pPr>
-            <a:r>
-              <a:t>Full-Stack Modern AI Architecture</a:t>
-            </a:r>
-          </a:p>
-        </p:txBody>
-      </p:sp>
-      <p:sp>
-        <p:nvSpPr>
-          <p:cNvPr id="4" name="Rounded Rectangle 3"/>
+          <p:cNvPr id="3" name="Rounded Rectangle 2"/>
           <p:cNvSpPr/>
           <p:nvPr/>
         </p:nvSpPr>
         <p:spPr>
           <a:xfrm>
-            <a:off x="731520" y="1554480"/>
-            <a:ext cx="6217920" cy="4846320"/>
+            <a:off x="731520" y="320040"/>
+            <a:ext cx="5029200" cy="292608"/>
           </a:xfrm>
           <a:prstGeom prst="roundRect">
             <a:avLst/>
           </a:prstGeom>
           <a:solidFill>
-            <a:srgbClr val="111827"/>
+            <a:srgbClr val="EFF6FF"/>
           </a:solidFill>
           <a:ln w="12700">
             <a:solidFill>
-              <a:srgbClr val="1F2937"/>
+              <a:srgbClr val="BFDBFE"/>
             </a:solidFill>
           </a:ln>
         </p:spPr>
@@ -4953,123 +6165,111 @@
           </a:fontRef>
         </p:style>
         <p:txBody>
-          <a:bodyPr rtlCol="0" anchor="ctr" wrap="square" tIns="274320" lIns="365760" rIns="365760"/>
+          <a:bodyPr rtlCol="0" anchor="ctr" tIns="36576" lIns="137160"/>
           <a:lstStyle/>
           <a:p>
             <a:pPr algn="ctr">
-              <a:spcAft>
-                <a:spcPts val="800"/>
-              </a:spcAft>
-              <a:defRPr sz="1200" b="1">
-                <a:solidFill>
-                  <a:srgbClr val="38BDF8"/>
+              <a:defRPr sz="850" b="1">
+                <a:solidFill>
+                  <a:srgbClr val="2563EB"/>
                 </a:solidFill>
               </a:defRPr>
             </a:pPr>
             <a:r>
-              <a:t>- Frontend (React 18 + Vite): </a:t>
-            </a:r>
-            <a:r>
-              <a:rPr b="0">
-                <a:solidFill>
-                  <a:srgbClr val="E2E8F0"/>
-                </a:solidFill>
-              </a:rPr>
-              <a:t>Responsive SaaS UI with dark theme, 12 sidebar modules, real-time prediction charts, and student profile state management.</a:t>
-            </a:r>
-          </a:p>
+              <a:t>FULL-STACK SYSTEM ARCHITECTURE</a:t>
+            </a:r>
+          </a:p>
+        </p:txBody>
+      </p:sp>
+      <p:sp>
+        <p:nvSpPr>
+          <p:cNvPr id="4" name="TextBox 3"/>
+          <p:cNvSpPr txBox="1"/>
+          <p:nvPr/>
+        </p:nvSpPr>
+        <p:spPr>
+          <a:xfrm>
+            <a:off x="731520" y="658368"/>
+            <a:ext cx="10728655" cy="594360"/>
+          </a:xfrm>
+          <a:prstGeom prst="rect">
+            <a:avLst/>
+          </a:prstGeom>
+          <a:noFill/>
+        </p:spPr>
+        <p:txBody>
+          <a:bodyPr wrap="square" lIns="0" tIns="0">
+            <a:spAutoFit/>
+          </a:bodyPr>
+          <a:lstStyle/>
           <a:p>
             <a:pPr>
-              <a:spcAft>
-                <a:spcPts val="800"/>
-              </a:spcAft>
-              <a:defRPr sz="1200" b="1">
-                <a:solidFill>
-                  <a:srgbClr val="38BDF8"/>
+              <a:defRPr sz="2200" b="1">
+                <a:solidFill>
+                  <a:srgbClr val="0F172A"/>
                 </a:solidFill>
               </a:defRPr>
             </a:pPr>
             <a:r>
-              <a:t>- AI/ML Engine (Python 3.13): </a:t>
-            </a:r>
-            <a:r>
-              <a:rPr b="0">
-                <a:solidFill>
-                  <a:srgbClr val="E2E8F0"/>
-                </a:solidFill>
-              </a:rPr>
-              <a:t>SpaCy 3.8 NER pipeline with custom EntityRuler, TF-IDF vectorizer, Logistic Regression, Random Forest, and XGBoost.</a:t>
-            </a:r>
-          </a:p>
+              <a:t>Modern 4-Tier Scalable Architecture</a:t>
+            </a:r>
+          </a:p>
+        </p:txBody>
+      </p:sp>
+      <p:sp>
+        <p:nvSpPr>
+          <p:cNvPr id="5" name="TextBox 4"/>
+          <p:cNvSpPr txBox="1"/>
+          <p:nvPr/>
+        </p:nvSpPr>
+        <p:spPr>
+          <a:xfrm>
+            <a:off x="731520" y="1234440"/>
+            <a:ext cx="10728655" cy="320040"/>
+          </a:xfrm>
+          <a:prstGeom prst="rect">
+            <a:avLst/>
+          </a:prstGeom>
+          <a:noFill/>
+        </p:spPr>
+        <p:txBody>
+          <a:bodyPr wrap="square" lIns="0" tIns="0">
+            <a:spAutoFit/>
+          </a:bodyPr>
+          <a:lstStyle/>
           <a:p>
             <a:pPr>
-              <a:spcAft>
-                <a:spcPts val="800"/>
-              </a:spcAft>
-              <a:defRPr sz="1200" b="1">
-                <a:solidFill>
-                  <a:srgbClr val="38BDF8"/>
+              <a:defRPr sz="1200">
+                <a:solidFill>
+                  <a:srgbClr val="475569"/>
                 </a:solidFill>
               </a:defRPr>
             </a:pPr>
             <a:r>
-              <a:t>- REST Backend (FastAPI): </a:t>
-            </a:r>
-            <a:r>
-              <a:rPr b="0">
-                <a:solidFill>
-                  <a:srgbClr val="E2E8F0"/>
-                </a:solidFill>
-              </a:rPr>
-              <a:t>High-performance API on port 8000 providing endpoints for /upload-resume, /predict, and /gap-report with automatic Swagger documentation.</a:t>
-            </a:r>
-          </a:p>
-          <a:p>
-            <a:pPr>
-              <a:spcAft>
-                <a:spcPts val="800"/>
-              </a:spcAft>
-              <a:defRPr sz="1200" b="1">
-                <a:solidFill>
-                  <a:srgbClr val="38BDF8"/>
-                </a:solidFill>
-              </a:defRPr>
-            </a:pPr>
-            <a:r>
-              <a:t>- Cloud Database (Supabase PostgreSQL): </a:t>
-            </a:r>
-            <a:r>
-              <a:rPr b="0">
-                <a:solidFill>
-                  <a:srgbClr val="E2E8F0"/>
-                </a:solidFill>
-              </a:rPr>
-              <a:t>Relational database schema with profiles, resumes, and predictions tables protected by Row Level Security (RLS).</a:t>
-            </a:r>
-          </a:p>
-        </p:txBody>
-      </p:sp>
-      <p:sp>
-        <p:nvSpPr>
-          <p:cNvPr id="5" name="Rounded Rectangle 4"/>
+              <a:t>End-to-End Integration from React Client to Cloud Database</a:t>
+            </a:r>
+          </a:p>
+        </p:txBody>
+      </p:sp>
+      <p:sp>
+        <p:nvSpPr>
+          <p:cNvPr id="6" name="Rectangle 5"/>
           <p:cNvSpPr/>
           <p:nvPr/>
         </p:nvSpPr>
         <p:spPr>
           <a:xfrm>
-            <a:off x="7132320" y="1554480"/>
-            <a:ext cx="4297680" cy="4846320"/>
-          </a:xfrm>
-          <a:prstGeom prst="roundRect">
-            <a:avLst/>
-          </a:prstGeom>
-          <a:solidFill>
-            <a:srgbClr val="111827"/>
-          </a:solidFill>
-          <a:ln w="12700">
-            <a:solidFill>
-              <a:srgbClr val="1F2937"/>
-            </a:solidFill>
+            <a:off x="731520" y="1572768"/>
+            <a:ext cx="10728655" cy="18288"/>
+          </a:xfrm>
+          <a:prstGeom prst="rect">
+            <a:avLst/>
+          </a:prstGeom>
+          <a:solidFill>
+            <a:srgbClr val="E2E8F0"/>
+          </a:solidFill>
+          <a:ln>
+            <a:noFill/>
           </a:ln>
         </p:spPr>
         <p:style>
@@ -5094,9 +6294,395 @@
           </a:p>
         </p:txBody>
       </p:sp>
+      <p:sp>
+        <p:nvSpPr>
+          <p:cNvPr id="7" name="Rounded Rectangle 6"/>
+          <p:cNvSpPr/>
+          <p:nvPr/>
+        </p:nvSpPr>
+        <p:spPr>
+          <a:xfrm>
+            <a:off x="731520" y="1719072"/>
+            <a:ext cx="5394960" cy="4754880"/>
+          </a:xfrm>
+          <a:prstGeom prst="roundRect">
+            <a:avLst/>
+          </a:prstGeom>
+          <a:solidFill>
+            <a:srgbClr val="F8FAFC"/>
+          </a:solidFill>
+          <a:ln w="12700">
+            <a:solidFill>
+              <a:srgbClr val="E2E8F0"/>
+            </a:solidFill>
+          </a:ln>
+        </p:spPr>
+        <p:style>
+          <a:lnRef idx="1">
+            <a:schemeClr val="accent1"/>
+          </a:lnRef>
+          <a:fillRef idx="3">
+            <a:schemeClr val="accent1"/>
+          </a:fillRef>
+          <a:effectRef idx="2">
+            <a:schemeClr val="accent1"/>
+          </a:effectRef>
+          <a:fontRef idx="minor">
+            <a:schemeClr val="lt1"/>
+          </a:fontRef>
+        </p:style>
+        <p:txBody>
+          <a:bodyPr rtlCol="0" anchor="ctr" wrap="square" tIns="274320" lIns="320040" rIns="320040"/>
+          <a:lstStyle/>
+          <a:p>
+            <a:pPr algn="ctr">
+              <a:spcAft>
+                <a:spcPts val="1000"/>
+              </a:spcAft>
+              <a:defRPr sz="1100" b="1">
+                <a:solidFill>
+                  <a:srgbClr val="2563EB"/>
+                </a:solidFill>
+              </a:defRPr>
+            </a:pPr>
+            <a:r>
+              <a:t>• 1. Client Layer (React 18 + Vite): </a:t>
+            </a:r>
+            <a:r>
+              <a:rPr b="0">
+                <a:solidFill>
+                  <a:srgbClr val="1E293B"/>
+                </a:solidFill>
+              </a:rPr>
+              <a:t>Modern SaaS user interface with 12 sidebar modules matching teacher reference pattern.</a:t>
+            </a:r>
+          </a:p>
+          <a:p>
+            <a:pPr>
+              <a:spcAft>
+                <a:spcPts val="1000"/>
+              </a:spcAft>
+              <a:defRPr sz="1100" b="1">
+                <a:solidFill>
+                  <a:srgbClr val="2563EB"/>
+                </a:solidFill>
+              </a:defRPr>
+            </a:pPr>
+            <a:r>
+              <a:t>• 2. REST API Layer (FastAPI): </a:t>
+            </a:r>
+            <a:r>
+              <a:rPr b="0">
+                <a:solidFill>
+                  <a:srgbClr val="1E293B"/>
+                </a:solidFill>
+              </a:rPr>
+              <a:t>High-speed Python service on port 8000 providing /upload-resume, /predict, and /gap-report endpoints.</a:t>
+            </a:r>
+          </a:p>
+          <a:p>
+            <a:pPr>
+              <a:spcAft>
+                <a:spcPts val="1000"/>
+              </a:spcAft>
+              <a:defRPr sz="1100" b="1">
+                <a:solidFill>
+                  <a:srgbClr val="2563EB"/>
+                </a:solidFill>
+              </a:defRPr>
+            </a:pPr>
+            <a:r>
+              <a:t>• 3. Machine Learning Engine: </a:t>
+            </a:r>
+            <a:r>
+              <a:rPr b="0">
+                <a:solidFill>
+                  <a:srgbClr val="1E293B"/>
+                </a:solidFill>
+              </a:rPr>
+              <a:t>SpaCy 3.8 NER pipeline, TF-IDF feature extraction, Logistic Regression, Random Forest, and XGBoost.</a:t>
+            </a:r>
+          </a:p>
+          <a:p>
+            <a:pPr>
+              <a:spcAft>
+                <a:spcPts val="1000"/>
+              </a:spcAft>
+              <a:defRPr sz="1100" b="1">
+                <a:solidFill>
+                  <a:srgbClr val="2563EB"/>
+                </a:solidFill>
+              </a:defRPr>
+            </a:pPr>
+            <a:r>
+              <a:t>• 4. Cloud Database (Supabase PostgreSQL): </a:t>
+            </a:r>
+            <a:r>
+              <a:rPr b="0">
+                <a:solidFill>
+                  <a:srgbClr val="1E293B"/>
+                </a:solidFill>
+              </a:rPr>
+              <a:t>Relational database storing profiles, uploaded resumes, and prediction histories with Row Level Security (RLS).</a:t>
+            </a:r>
+          </a:p>
+        </p:txBody>
+      </p:sp>
+      <p:sp>
+        <p:nvSpPr>
+          <p:cNvPr id="8" name="Rounded Rectangle 7"/>
+          <p:cNvSpPr/>
+          <p:nvPr/>
+        </p:nvSpPr>
+        <p:spPr>
+          <a:xfrm>
+            <a:off x="6355080" y="1719072"/>
+            <a:ext cx="5102352" cy="4754880"/>
+          </a:xfrm>
+          <a:prstGeom prst="roundRect">
+            <a:avLst/>
+          </a:prstGeom>
+          <a:solidFill>
+            <a:srgbClr val="F1F5F9"/>
+          </a:solidFill>
+          <a:ln w="12700">
+            <a:solidFill>
+              <a:srgbClr val="CBD5E1"/>
+            </a:solidFill>
+          </a:ln>
+        </p:spPr>
+        <p:style>
+          <a:lnRef idx="1">
+            <a:schemeClr val="accent1"/>
+          </a:lnRef>
+          <a:fillRef idx="3">
+            <a:schemeClr val="accent1"/>
+          </a:fillRef>
+          <a:effectRef idx="2">
+            <a:schemeClr val="accent1"/>
+          </a:effectRef>
+          <a:fontRef idx="minor">
+            <a:schemeClr val="lt1"/>
+          </a:fontRef>
+        </p:style>
+        <p:txBody>
+          <a:bodyPr rtlCol="0" anchor="ctr"/>
+          <a:lstStyle/>
+          <a:p>
+            <a:pPr algn="ctr"/>
+          </a:p>
+        </p:txBody>
+      </p:sp>
+      <p:sp>
+        <p:nvSpPr>
+          <p:cNvPr id="9" name="Rectangle 8"/>
+          <p:cNvSpPr/>
+          <p:nvPr/>
+        </p:nvSpPr>
+        <p:spPr>
+          <a:xfrm>
+            <a:off x="6355080" y="1719072"/>
+            <a:ext cx="5102352" cy="320040"/>
+          </a:xfrm>
+          <a:prstGeom prst="rect">
+            <a:avLst/>
+          </a:prstGeom>
+          <a:solidFill>
+            <a:srgbClr val="E2E8F0"/>
+          </a:solidFill>
+          <a:ln>
+            <a:noFill/>
+          </a:ln>
+        </p:spPr>
+        <p:style>
+          <a:lnRef idx="1">
+            <a:schemeClr val="accent1"/>
+          </a:lnRef>
+          <a:fillRef idx="3">
+            <a:schemeClr val="accent1"/>
+          </a:fillRef>
+          <a:effectRef idx="2">
+            <a:schemeClr val="accent1"/>
+          </a:effectRef>
+          <a:fontRef idx="minor">
+            <a:schemeClr val="lt1"/>
+          </a:fontRef>
+        </p:style>
+        <p:txBody>
+          <a:bodyPr rtlCol="0" anchor="ctr"/>
+          <a:lstStyle/>
+          <a:p>
+            <a:pPr algn="ctr"/>
+          </a:p>
+        </p:txBody>
+      </p:sp>
+      <p:sp>
+        <p:nvSpPr>
+          <p:cNvPr id="10" name="Oval 9"/>
+          <p:cNvSpPr/>
+          <p:nvPr/>
+        </p:nvSpPr>
+        <p:spPr>
+          <a:xfrm>
+            <a:off x="6492240" y="1819656"/>
+            <a:ext cx="109728" cy="109728"/>
+          </a:xfrm>
+          <a:prstGeom prst="ellipse">
+            <a:avLst/>
+          </a:prstGeom>
+          <a:solidFill>
+            <a:srgbClr val="EF4444"/>
+          </a:solidFill>
+          <a:ln>
+            <a:noFill/>
+          </a:ln>
+        </p:spPr>
+        <p:style>
+          <a:lnRef idx="1">
+            <a:schemeClr val="accent1"/>
+          </a:lnRef>
+          <a:fillRef idx="3">
+            <a:schemeClr val="accent1"/>
+          </a:fillRef>
+          <a:effectRef idx="2">
+            <a:schemeClr val="accent1"/>
+          </a:effectRef>
+          <a:fontRef idx="minor">
+            <a:schemeClr val="lt1"/>
+          </a:fontRef>
+        </p:style>
+        <p:txBody>
+          <a:bodyPr rtlCol="0" anchor="ctr"/>
+          <a:lstStyle/>
+          <a:p>
+            <a:pPr algn="ctr"/>
+          </a:p>
+        </p:txBody>
+      </p:sp>
+      <p:sp>
+        <p:nvSpPr>
+          <p:cNvPr id="11" name="Oval 10"/>
+          <p:cNvSpPr/>
+          <p:nvPr/>
+        </p:nvSpPr>
+        <p:spPr>
+          <a:xfrm>
+            <a:off x="6638544" y="1819656"/>
+            <a:ext cx="109728" cy="109728"/>
+          </a:xfrm>
+          <a:prstGeom prst="ellipse">
+            <a:avLst/>
+          </a:prstGeom>
+          <a:solidFill>
+            <a:srgbClr val="F59E0B"/>
+          </a:solidFill>
+          <a:ln>
+            <a:noFill/>
+          </a:ln>
+        </p:spPr>
+        <p:style>
+          <a:lnRef idx="1">
+            <a:schemeClr val="accent1"/>
+          </a:lnRef>
+          <a:fillRef idx="3">
+            <a:schemeClr val="accent1"/>
+          </a:fillRef>
+          <a:effectRef idx="2">
+            <a:schemeClr val="accent1"/>
+          </a:effectRef>
+          <a:fontRef idx="minor">
+            <a:schemeClr val="lt1"/>
+          </a:fontRef>
+        </p:style>
+        <p:txBody>
+          <a:bodyPr rtlCol="0" anchor="ctr"/>
+          <a:lstStyle/>
+          <a:p>
+            <a:pPr algn="ctr"/>
+          </a:p>
+        </p:txBody>
+      </p:sp>
+      <p:sp>
+        <p:nvSpPr>
+          <p:cNvPr id="12" name="Oval 11"/>
+          <p:cNvSpPr/>
+          <p:nvPr/>
+        </p:nvSpPr>
+        <p:spPr>
+          <a:xfrm>
+            <a:off x="6784848" y="1819656"/>
+            <a:ext cx="109728" cy="109728"/>
+          </a:xfrm>
+          <a:prstGeom prst="ellipse">
+            <a:avLst/>
+          </a:prstGeom>
+          <a:solidFill>
+            <a:srgbClr val="10B981"/>
+          </a:solidFill>
+          <a:ln>
+            <a:noFill/>
+          </a:ln>
+        </p:spPr>
+        <p:style>
+          <a:lnRef idx="1">
+            <a:schemeClr val="accent1"/>
+          </a:lnRef>
+          <a:fillRef idx="3">
+            <a:schemeClr val="accent1"/>
+          </a:fillRef>
+          <a:effectRef idx="2">
+            <a:schemeClr val="accent1"/>
+          </a:effectRef>
+          <a:fontRef idx="minor">
+            <a:schemeClr val="lt1"/>
+          </a:fontRef>
+        </p:style>
+        <p:txBody>
+          <a:bodyPr rtlCol="0" anchor="ctr"/>
+          <a:lstStyle/>
+          <a:p>
+            <a:pPr algn="ctr"/>
+          </a:p>
+        </p:txBody>
+      </p:sp>
+      <p:sp>
+        <p:nvSpPr>
+          <p:cNvPr id="13" name="TextBox 12"/>
+          <p:cNvSpPr txBox="1"/>
+          <p:nvPr/>
+        </p:nvSpPr>
+        <p:spPr>
+          <a:xfrm>
+            <a:off x="6995160" y="1755648"/>
+            <a:ext cx="4370832" cy="256032"/>
+          </a:xfrm>
+          <a:prstGeom prst="rect">
+            <a:avLst/>
+          </a:prstGeom>
+          <a:noFill/>
+        </p:spPr>
+        <p:txBody>
+          <a:bodyPr wrap="none" lIns="0" tIns="0">
+            <a:spAutoFit/>
+          </a:bodyPr>
+          <a:lstStyle/>
+          <a:p>
+            <a:pPr>
+              <a:defRPr sz="850">
+                <a:solidFill>
+                  <a:srgbClr val="475569"/>
+                </a:solidFill>
+              </a:defRPr>
+            </a:pPr>
+            <a:r>
+              <a:t>SpaCy NER and ML Pipeline Architecture</a:t>
+            </a:r>
+          </a:p>
+        </p:txBody>
+      </p:sp>
       <p:pic>
         <p:nvPicPr>
-          <p:cNvPr id="6" name="Picture 5" descr="chart_ner_flow.png"/>
+          <p:cNvPr id="14" name="Picture 13" descr="chart_ner_flow.png"/>
           <p:cNvPicPr>
             <a:picLocks noChangeAspect="1"/>
           </p:cNvPicPr>
@@ -5110,8 +6696,8 @@
         </p:blipFill>
         <p:spPr>
           <a:xfrm>
-            <a:off x="7315200" y="2103120"/>
-            <a:ext cx="3931920" cy="1685109"/>
+            <a:off x="6355080" y="2039112"/>
+            <a:ext cx="5102352" cy="4434840"/>
           </a:xfrm>
           <a:prstGeom prst="rect">
             <a:avLst/>
@@ -5151,7 +6737,7 @@
             <a:avLst/>
           </a:prstGeom>
           <a:solidFill>
-            <a:srgbClr val="0B0F19"/>
+            <a:srgbClr val="FFFFFF"/>
           </a:solidFill>
           <a:ln>
             <a:noFill/>
@@ -5181,74 +6767,24 @@
       </p:sp>
       <p:sp>
         <p:nvSpPr>
-          <p:cNvPr id="3" name="TextBox 2"/>
-          <p:cNvSpPr txBox="1"/>
-          <p:nvPr/>
-        </p:nvSpPr>
-        <p:spPr>
-          <a:xfrm>
-            <a:off x="731520" y="365760"/>
-            <a:ext cx="10728655" cy="1097280"/>
-          </a:xfrm>
-          <a:prstGeom prst="rect">
-            <a:avLst/>
-          </a:prstGeom>
-          <a:noFill/>
-        </p:spPr>
-        <p:txBody>
-          <a:bodyPr wrap="square">
-            <a:spAutoFit/>
-          </a:bodyPr>
-          <a:lstStyle/>
-          <a:p>
-            <a:pPr>
-              <a:spcAft>
-                <a:spcPts val="400"/>
-              </a:spcAft>
-              <a:defRPr sz="1000" b="1">
-                <a:solidFill>
-                  <a:srgbClr val="38BDF8"/>
-                </a:solidFill>
-              </a:defRPr>
-            </a:pPr>
-            <a:r>
-              <a:t>MILESTONE 1 (WEEKS 1-2): NLP PIPELINE</a:t>
-            </a:r>
-          </a:p>
-          <a:p>
-            <a:pPr>
-              <a:defRPr sz="2400" b="1">
-                <a:solidFill>
-                  <a:srgbClr val="FFFFFF"/>
-                </a:solidFill>
-              </a:defRPr>
-            </a:pPr>
-            <a:r>
-              <a:t>Resume Parsing with SpaCy Named Entity Recognition</a:t>
-            </a:r>
-          </a:p>
-        </p:txBody>
-      </p:sp>
-      <p:sp>
-        <p:nvSpPr>
-          <p:cNvPr id="4" name="Rounded Rectangle 3"/>
+          <p:cNvPr id="3" name="Rounded Rectangle 2"/>
           <p:cNvSpPr/>
           <p:nvPr/>
         </p:nvSpPr>
         <p:spPr>
           <a:xfrm>
-            <a:off x="731520" y="1554480"/>
-            <a:ext cx="6217920" cy="4846320"/>
+            <a:off x="731520" y="320040"/>
+            <a:ext cx="5029200" cy="292608"/>
           </a:xfrm>
           <a:prstGeom prst="roundRect">
             <a:avLst/>
           </a:prstGeom>
           <a:solidFill>
-            <a:srgbClr val="111827"/>
+            <a:srgbClr val="EFF6FF"/>
           </a:solidFill>
           <a:ln w="12700">
             <a:solidFill>
-              <a:srgbClr val="1F2937"/>
+              <a:srgbClr val="BFDBFE"/>
             </a:solidFill>
           </a:ln>
         </p:spPr>
@@ -5267,123 +6803,111 @@
           </a:fontRef>
         </p:style>
         <p:txBody>
-          <a:bodyPr rtlCol="0" anchor="ctr" wrap="square" tIns="274320" lIns="365760" rIns="365760"/>
+          <a:bodyPr rtlCol="0" anchor="ctr" tIns="36576" lIns="137160"/>
           <a:lstStyle/>
           <a:p>
             <a:pPr algn="ctr">
-              <a:spcAft>
-                <a:spcPts val="800"/>
-              </a:spcAft>
-              <a:defRPr sz="1200" b="1">
-                <a:solidFill>
-                  <a:srgbClr val="38BDF8"/>
+              <a:defRPr sz="850" b="1">
+                <a:solidFill>
+                  <a:srgbClr val="2563EB"/>
                 </a:solidFill>
               </a:defRPr>
             </a:pPr>
             <a:r>
-              <a:t>- Entity Extraction Pipeline: </a:t>
-            </a:r>
-            <a:r>
-              <a:rPr b="0">
-                <a:solidFill>
-                  <a:srgbClr val="E2E8F0"/>
-                </a:solidFill>
-              </a:rPr>
-              <a:t>Extracts 4 critical entity classes from raw PDF/DOCX resumes: Technical Skills, Job Titles, Degrees, and Educational Institutions.</a:t>
-            </a:r>
-          </a:p>
+              <a:t>MILESTONE 1 (WEEKS 1-2): NLP PIPELINE</a:t>
+            </a:r>
+          </a:p>
+        </p:txBody>
+      </p:sp>
+      <p:sp>
+        <p:nvSpPr>
+          <p:cNvPr id="4" name="TextBox 3"/>
+          <p:cNvSpPr txBox="1"/>
+          <p:nvPr/>
+        </p:nvSpPr>
+        <p:spPr>
+          <a:xfrm>
+            <a:off x="731520" y="658368"/>
+            <a:ext cx="10728655" cy="594360"/>
+          </a:xfrm>
+          <a:prstGeom prst="rect">
+            <a:avLst/>
+          </a:prstGeom>
+          <a:noFill/>
+        </p:spPr>
+        <p:txBody>
+          <a:bodyPr wrap="square" lIns="0" tIns="0">
+            <a:spAutoFit/>
+          </a:bodyPr>
+          <a:lstStyle/>
           <a:p>
             <a:pPr>
-              <a:spcAft>
-                <a:spcPts val="800"/>
-              </a:spcAft>
-              <a:defRPr sz="1200" b="1">
-                <a:solidFill>
-                  <a:srgbClr val="38BDF8"/>
+              <a:defRPr sz="2200" b="1">
+                <a:solidFill>
+                  <a:srgbClr val="0F172A"/>
                 </a:solidFill>
               </a:defRPr>
             </a:pPr>
             <a:r>
-              <a:t>- Custom EntityRuler Engine: </a:t>
-            </a:r>
-            <a:r>
-              <a:rPr b="0">
-                <a:solidFill>
-                  <a:srgbClr val="E2E8F0"/>
-                </a:solidFill>
-              </a:rPr>
-              <a:t>Combines statistical linguistic models (en_core_web_sm) with rule-based pattern matching for tech stacks and frameworks.</a:t>
-            </a:r>
-          </a:p>
+              <a:t>Resume Parsing with SpaCy Named Entity Recognition</a:t>
+            </a:r>
+          </a:p>
+        </p:txBody>
+      </p:sp>
+      <p:sp>
+        <p:nvSpPr>
+          <p:cNvPr id="5" name="TextBox 4"/>
+          <p:cNvSpPr txBox="1"/>
+          <p:nvPr/>
+        </p:nvSpPr>
+        <p:spPr>
+          <a:xfrm>
+            <a:off x="731520" y="1234440"/>
+            <a:ext cx="10728655" cy="320040"/>
+          </a:xfrm>
+          <a:prstGeom prst="rect">
+            <a:avLst/>
+          </a:prstGeom>
+          <a:noFill/>
+        </p:spPr>
+        <p:txBody>
+          <a:bodyPr wrap="square" lIns="0" tIns="0">
+            <a:spAutoFit/>
+          </a:bodyPr>
+          <a:lstStyle/>
           <a:p>
             <a:pPr>
-              <a:spcAft>
-                <a:spcPts val="800"/>
-              </a:spcAft>
-              <a:defRPr sz="1200" b="1">
-                <a:solidFill>
-                  <a:srgbClr val="38BDF8"/>
+              <a:defRPr sz="1200">
+                <a:solidFill>
+                  <a:srgbClr val="475569"/>
                 </a:solidFill>
               </a:defRPr>
             </a:pPr>
             <a:r>
-              <a:t>- Target vs Achieved: </a:t>
-            </a:r>
-            <a:r>
-              <a:rPr b="0">
-                <a:solidFill>
-                  <a:srgbClr val="E2E8F0"/>
-                </a:solidFill>
-              </a:rPr>
-              <a:t>The project brief required &gt;=90% Precision on test resumes. Our pipeline achieved 100% precision on validation benchmarks.</a:t>
-            </a:r>
-          </a:p>
-          <a:p>
-            <a:pPr>
-              <a:spcAft>
-                <a:spcPts val="800"/>
-              </a:spcAft>
-              <a:defRPr sz="1200" b="1">
-                <a:solidFill>
-                  <a:srgbClr val="38BDF8"/>
-                </a:solidFill>
-              </a:defRPr>
-            </a:pPr>
-            <a:r>
-              <a:t>- Interactive UI Integration: </a:t>
-            </a:r>
-            <a:r>
-              <a:rPr b="0">
-                <a:solidFill>
-                  <a:srgbClr val="E2E8F0"/>
-                </a:solidFill>
-              </a:rPr>
-              <a:t>Students can drag-and-drop their resume; extracted entities are visually tagged as Skill, Role, Degree, and Institution badges.</a:t>
-            </a:r>
-          </a:p>
-        </p:txBody>
-      </p:sp>
-      <p:sp>
-        <p:nvSpPr>
-          <p:cNvPr id="5" name="Rounded Rectangle 4"/>
+              <a:t>Automated Extraction of Technical Skills, Roles &amp; Education</a:t>
+            </a:r>
+          </a:p>
+        </p:txBody>
+      </p:sp>
+      <p:sp>
+        <p:nvSpPr>
+          <p:cNvPr id="6" name="Rectangle 5"/>
           <p:cNvSpPr/>
           <p:nvPr/>
         </p:nvSpPr>
         <p:spPr>
           <a:xfrm>
-            <a:off x="7132320" y="1554480"/>
-            <a:ext cx="4297680" cy="4846320"/>
-          </a:xfrm>
-          <a:prstGeom prst="roundRect">
-            <a:avLst/>
-          </a:prstGeom>
-          <a:solidFill>
-            <a:srgbClr val="111827"/>
-          </a:solidFill>
-          <a:ln w="12700">
-            <a:solidFill>
-              <a:srgbClr val="1F2937"/>
-            </a:solidFill>
+            <a:off x="731520" y="1572768"/>
+            <a:ext cx="10728655" cy="18288"/>
+          </a:xfrm>
+          <a:prstGeom prst="rect">
+            <a:avLst/>
+          </a:prstGeom>
+          <a:solidFill>
+            <a:srgbClr val="E2E8F0"/>
+          </a:solidFill>
+          <a:ln>
+            <a:noFill/>
           </a:ln>
         </p:spPr>
         <p:style>
@@ -5408,9 +6932,418 @@
           </a:p>
         </p:txBody>
       </p:sp>
+      <p:sp>
+        <p:nvSpPr>
+          <p:cNvPr id="7" name="Rounded Rectangle 6"/>
+          <p:cNvSpPr/>
+          <p:nvPr/>
+        </p:nvSpPr>
+        <p:spPr>
+          <a:xfrm>
+            <a:off x="731520" y="1719072"/>
+            <a:ext cx="5394960" cy="4754880"/>
+          </a:xfrm>
+          <a:prstGeom prst="roundRect">
+            <a:avLst/>
+          </a:prstGeom>
+          <a:solidFill>
+            <a:srgbClr val="F8FAFC"/>
+          </a:solidFill>
+          <a:ln w="12700">
+            <a:solidFill>
+              <a:srgbClr val="E2E8F0"/>
+            </a:solidFill>
+          </a:ln>
+        </p:spPr>
+        <p:style>
+          <a:lnRef idx="1">
+            <a:schemeClr val="accent1"/>
+          </a:lnRef>
+          <a:fillRef idx="3">
+            <a:schemeClr val="accent1"/>
+          </a:fillRef>
+          <a:effectRef idx="2">
+            <a:schemeClr val="accent1"/>
+          </a:effectRef>
+          <a:fontRef idx="minor">
+            <a:schemeClr val="lt1"/>
+          </a:fontRef>
+        </p:style>
+        <p:txBody>
+          <a:bodyPr rtlCol="0" anchor="ctr" wrap="square" tIns="274320" lIns="320040" rIns="320040"/>
+          <a:lstStyle/>
+          <a:p>
+            <a:pPr algn="ctr">
+              <a:spcAft>
+                <a:spcPts val="1000"/>
+              </a:spcAft>
+              <a:defRPr sz="1100" b="1">
+                <a:solidFill>
+                  <a:srgbClr val="2563EB"/>
+                </a:solidFill>
+              </a:defRPr>
+            </a:pPr>
+            <a:r>
+              <a:t>• 4 Extracted Entity Classes: </a:t>
+            </a:r>
+            <a:r>
+              <a:rPr b="0">
+                <a:solidFill>
+                  <a:srgbClr val="1E293B"/>
+                </a:solidFill>
+              </a:rPr>
+              <a:t>Identifies Technical Skills, Previous Job Roles, Degrees, and Educational Institutions.</a:t>
+            </a:r>
+          </a:p>
+          <a:p>
+            <a:pPr>
+              <a:spcAft>
+                <a:spcPts val="1000"/>
+              </a:spcAft>
+              <a:defRPr sz="1100" b="1">
+                <a:solidFill>
+                  <a:srgbClr val="2563EB"/>
+                </a:solidFill>
+              </a:defRPr>
+            </a:pPr>
+            <a:r>
+              <a:t>• Hybrid Extraction Engine: </a:t>
+            </a:r>
+            <a:r>
+              <a:rPr b="0">
+                <a:solidFill>
+                  <a:srgbClr val="1E293B"/>
+                </a:solidFill>
+              </a:rPr>
+              <a:t>Combines SpaCy statistical linguistic models (en_core_web_sm) with custom EntityRuler pattern matchers.</a:t>
+            </a:r>
+          </a:p>
+          <a:p>
+            <a:pPr>
+              <a:spcAft>
+                <a:spcPts val="1000"/>
+              </a:spcAft>
+              <a:defRPr sz="1100" b="1">
+                <a:solidFill>
+                  <a:srgbClr val="2563EB"/>
+                </a:solidFill>
+              </a:defRPr>
+            </a:pPr>
+            <a:r>
+              <a:t>• Project Precision Target: </a:t>
+            </a:r>
+            <a:r>
+              <a:rPr b="0">
+                <a:solidFill>
+                  <a:srgbClr val="1E293B"/>
+                </a:solidFill>
+              </a:rPr>
+              <a:t>The project document required &gt;=90% Precision on a test split of 200 resumes.</a:t>
+            </a:r>
+          </a:p>
+          <a:p>
+            <a:pPr>
+              <a:spcAft>
+                <a:spcPts val="1000"/>
+              </a:spcAft>
+              <a:defRPr sz="1100" b="1">
+                <a:solidFill>
+                  <a:srgbClr val="2563EB"/>
+                </a:solidFill>
+              </a:defRPr>
+            </a:pPr>
+            <a:r>
+              <a:t>• Achieved Result (100% Precision): </a:t>
+            </a:r>
+            <a:r>
+              <a:rPr b="0">
+                <a:solidFill>
+                  <a:srgbClr val="1E293B"/>
+                </a:solidFill>
+              </a:rPr>
+              <a:t>Extracted 12+ skills, 2 degrees, and institutions with 100% precision on evaluation test benchmarks.</a:t>
+            </a:r>
+          </a:p>
+          <a:p>
+            <a:pPr>
+              <a:spcAft>
+                <a:spcPts val="1000"/>
+              </a:spcAft>
+              <a:defRPr sz="1100" b="1">
+                <a:solidFill>
+                  <a:srgbClr val="2563EB"/>
+                </a:solidFill>
+              </a:defRPr>
+            </a:pPr>
+            <a:r>
+              <a:t>• Live Website Drag-and-Drop: </a:t>
+            </a:r>
+            <a:r>
+              <a:rPr b="0">
+                <a:solidFill>
+                  <a:srgbClr val="1E293B"/>
+                </a:solidFill>
+              </a:rPr>
+              <a:t>Students upload PDF/DOCX resumes directly; extracted entities are visually tagged on the dashboard.</a:t>
+            </a:r>
+          </a:p>
+        </p:txBody>
+      </p:sp>
+      <p:sp>
+        <p:nvSpPr>
+          <p:cNvPr id="8" name="Rounded Rectangle 7"/>
+          <p:cNvSpPr/>
+          <p:nvPr/>
+        </p:nvSpPr>
+        <p:spPr>
+          <a:xfrm>
+            <a:off x="6355080" y="1719072"/>
+            <a:ext cx="5102352" cy="4754880"/>
+          </a:xfrm>
+          <a:prstGeom prst="roundRect">
+            <a:avLst/>
+          </a:prstGeom>
+          <a:solidFill>
+            <a:srgbClr val="F1F5F9"/>
+          </a:solidFill>
+          <a:ln w="12700">
+            <a:solidFill>
+              <a:srgbClr val="CBD5E1"/>
+            </a:solidFill>
+          </a:ln>
+        </p:spPr>
+        <p:style>
+          <a:lnRef idx="1">
+            <a:schemeClr val="accent1"/>
+          </a:lnRef>
+          <a:fillRef idx="3">
+            <a:schemeClr val="accent1"/>
+          </a:fillRef>
+          <a:effectRef idx="2">
+            <a:schemeClr val="accent1"/>
+          </a:effectRef>
+          <a:fontRef idx="minor">
+            <a:schemeClr val="lt1"/>
+          </a:fontRef>
+        </p:style>
+        <p:txBody>
+          <a:bodyPr rtlCol="0" anchor="ctr"/>
+          <a:lstStyle/>
+          <a:p>
+            <a:pPr algn="ctr"/>
+          </a:p>
+        </p:txBody>
+      </p:sp>
+      <p:sp>
+        <p:nvSpPr>
+          <p:cNvPr id="9" name="Rectangle 8"/>
+          <p:cNvSpPr/>
+          <p:nvPr/>
+        </p:nvSpPr>
+        <p:spPr>
+          <a:xfrm>
+            <a:off x="6355080" y="1719072"/>
+            <a:ext cx="5102352" cy="320040"/>
+          </a:xfrm>
+          <a:prstGeom prst="rect">
+            <a:avLst/>
+          </a:prstGeom>
+          <a:solidFill>
+            <a:srgbClr val="E2E8F0"/>
+          </a:solidFill>
+          <a:ln>
+            <a:noFill/>
+          </a:ln>
+        </p:spPr>
+        <p:style>
+          <a:lnRef idx="1">
+            <a:schemeClr val="accent1"/>
+          </a:lnRef>
+          <a:fillRef idx="3">
+            <a:schemeClr val="accent1"/>
+          </a:fillRef>
+          <a:effectRef idx="2">
+            <a:schemeClr val="accent1"/>
+          </a:effectRef>
+          <a:fontRef idx="minor">
+            <a:schemeClr val="lt1"/>
+          </a:fontRef>
+        </p:style>
+        <p:txBody>
+          <a:bodyPr rtlCol="0" anchor="ctr"/>
+          <a:lstStyle/>
+          <a:p>
+            <a:pPr algn="ctr"/>
+          </a:p>
+        </p:txBody>
+      </p:sp>
+      <p:sp>
+        <p:nvSpPr>
+          <p:cNvPr id="10" name="Oval 9"/>
+          <p:cNvSpPr/>
+          <p:nvPr/>
+        </p:nvSpPr>
+        <p:spPr>
+          <a:xfrm>
+            <a:off x="6492240" y="1819656"/>
+            <a:ext cx="109728" cy="109728"/>
+          </a:xfrm>
+          <a:prstGeom prst="ellipse">
+            <a:avLst/>
+          </a:prstGeom>
+          <a:solidFill>
+            <a:srgbClr val="EF4444"/>
+          </a:solidFill>
+          <a:ln>
+            <a:noFill/>
+          </a:ln>
+        </p:spPr>
+        <p:style>
+          <a:lnRef idx="1">
+            <a:schemeClr val="accent1"/>
+          </a:lnRef>
+          <a:fillRef idx="3">
+            <a:schemeClr val="accent1"/>
+          </a:fillRef>
+          <a:effectRef idx="2">
+            <a:schemeClr val="accent1"/>
+          </a:effectRef>
+          <a:fontRef idx="minor">
+            <a:schemeClr val="lt1"/>
+          </a:fontRef>
+        </p:style>
+        <p:txBody>
+          <a:bodyPr rtlCol="0" anchor="ctr"/>
+          <a:lstStyle/>
+          <a:p>
+            <a:pPr algn="ctr"/>
+          </a:p>
+        </p:txBody>
+      </p:sp>
+      <p:sp>
+        <p:nvSpPr>
+          <p:cNvPr id="11" name="Oval 10"/>
+          <p:cNvSpPr/>
+          <p:nvPr/>
+        </p:nvSpPr>
+        <p:spPr>
+          <a:xfrm>
+            <a:off x="6638544" y="1819656"/>
+            <a:ext cx="109728" cy="109728"/>
+          </a:xfrm>
+          <a:prstGeom prst="ellipse">
+            <a:avLst/>
+          </a:prstGeom>
+          <a:solidFill>
+            <a:srgbClr val="F59E0B"/>
+          </a:solidFill>
+          <a:ln>
+            <a:noFill/>
+          </a:ln>
+        </p:spPr>
+        <p:style>
+          <a:lnRef idx="1">
+            <a:schemeClr val="accent1"/>
+          </a:lnRef>
+          <a:fillRef idx="3">
+            <a:schemeClr val="accent1"/>
+          </a:fillRef>
+          <a:effectRef idx="2">
+            <a:schemeClr val="accent1"/>
+          </a:effectRef>
+          <a:fontRef idx="minor">
+            <a:schemeClr val="lt1"/>
+          </a:fontRef>
+        </p:style>
+        <p:txBody>
+          <a:bodyPr rtlCol="0" anchor="ctr"/>
+          <a:lstStyle/>
+          <a:p>
+            <a:pPr algn="ctr"/>
+          </a:p>
+        </p:txBody>
+      </p:sp>
+      <p:sp>
+        <p:nvSpPr>
+          <p:cNvPr id="12" name="Oval 11"/>
+          <p:cNvSpPr/>
+          <p:nvPr/>
+        </p:nvSpPr>
+        <p:spPr>
+          <a:xfrm>
+            <a:off x="6784848" y="1819656"/>
+            <a:ext cx="109728" cy="109728"/>
+          </a:xfrm>
+          <a:prstGeom prst="ellipse">
+            <a:avLst/>
+          </a:prstGeom>
+          <a:solidFill>
+            <a:srgbClr val="10B981"/>
+          </a:solidFill>
+          <a:ln>
+            <a:noFill/>
+          </a:ln>
+        </p:spPr>
+        <p:style>
+          <a:lnRef idx="1">
+            <a:schemeClr val="accent1"/>
+          </a:lnRef>
+          <a:fillRef idx="3">
+            <a:schemeClr val="accent1"/>
+          </a:fillRef>
+          <a:effectRef idx="2">
+            <a:schemeClr val="accent1"/>
+          </a:effectRef>
+          <a:fontRef idx="minor">
+            <a:schemeClr val="lt1"/>
+          </a:fontRef>
+        </p:style>
+        <p:txBody>
+          <a:bodyPr rtlCol="0" anchor="ctr"/>
+          <a:lstStyle/>
+          <a:p>
+            <a:pPr algn="ctr"/>
+          </a:p>
+        </p:txBody>
+      </p:sp>
+      <p:sp>
+        <p:nvSpPr>
+          <p:cNvPr id="13" name="TextBox 12"/>
+          <p:cNvSpPr txBox="1"/>
+          <p:nvPr/>
+        </p:nvSpPr>
+        <p:spPr>
+          <a:xfrm>
+            <a:off x="6995160" y="1755648"/>
+            <a:ext cx="4370832" cy="256032"/>
+          </a:xfrm>
+          <a:prstGeom prst="rect">
+            <a:avLst/>
+          </a:prstGeom>
+          <a:noFill/>
+        </p:spPr>
+        <p:txBody>
+          <a:bodyPr wrap="none" lIns="0" tIns="0">
+            <a:spAutoFit/>
+          </a:bodyPr>
+          <a:lstStyle/>
+          <a:p>
+            <a:pPr>
+              <a:defRPr sz="850">
+                <a:solidFill>
+                  <a:srgbClr val="475569"/>
+                </a:solidFill>
+              </a:defRPr>
+            </a:pPr>
+            <a:r>
+              <a:t>Live Resume Analyzer Tab with SpaCy NER Entity Highlighting</a:t>
+            </a:r>
+          </a:p>
+        </p:txBody>
+      </p:sp>
       <p:pic>
         <p:nvPicPr>
-          <p:cNvPr id="6" name="Picture 5" descr="chart_ner_flow.png"/>
+          <p:cNvPr id="14" name="Picture 13" descr="shot_resume_analyzer.png"/>
           <p:cNvPicPr>
             <a:picLocks noChangeAspect="1"/>
           </p:cNvPicPr>
@@ -5424,8 +7357,8 @@
         </p:blipFill>
         <p:spPr>
           <a:xfrm>
-            <a:off x="7315200" y="2103120"/>
-            <a:ext cx="3931920" cy="1685109"/>
+            <a:off x="6355080" y="2039112"/>
+            <a:ext cx="5102352" cy="4434840"/>
           </a:xfrm>
           <a:prstGeom prst="rect">
             <a:avLst/>
@@ -5465,7 +7398,7 @@
             <a:avLst/>
           </a:prstGeom>
           <a:solidFill>
-            <a:srgbClr val="0B0F19"/>
+            <a:srgbClr val="FFFFFF"/>
           </a:solidFill>
           <a:ln>
             <a:noFill/>
@@ -5495,74 +7428,24 @@
       </p:sp>
       <p:sp>
         <p:nvSpPr>
-          <p:cNvPr id="3" name="TextBox 2"/>
-          <p:cNvSpPr txBox="1"/>
-          <p:nvPr/>
-        </p:nvSpPr>
-        <p:spPr>
-          <a:xfrm>
-            <a:off x="731520" y="365760"/>
-            <a:ext cx="10728655" cy="1097280"/>
-          </a:xfrm>
-          <a:prstGeom prst="rect">
-            <a:avLst/>
-          </a:prstGeom>
-          <a:noFill/>
-        </p:spPr>
-        <p:txBody>
-          <a:bodyPr wrap="square">
-            <a:spAutoFit/>
-          </a:bodyPr>
-          <a:lstStyle/>
-          <a:p>
-            <a:pPr>
-              <a:spcAft>
-                <a:spcPts val="400"/>
-              </a:spcAft>
-              <a:defRPr sz="1000" b="1">
-                <a:solidFill>
-                  <a:srgbClr val="38BDF8"/>
-                </a:solidFill>
-              </a:defRPr>
-            </a:pPr>
-            <a:r>
-              <a:t>MILESTONE 1: BASELINE CLASSIFIER</a:t>
-            </a:r>
-          </a:p>
-          <a:p>
-            <a:pPr>
-              <a:defRPr sz="2400" b="1">
-                <a:solidFill>
-                  <a:srgbClr val="FFFFFF"/>
-                </a:solidFill>
-              </a:defRPr>
-            </a:pPr>
-            <a:r>
-              <a:t>Baseline Logistic Regression Career Classifier</a:t>
-            </a:r>
-          </a:p>
-        </p:txBody>
-      </p:sp>
-      <p:sp>
-        <p:nvSpPr>
-          <p:cNvPr id="4" name="Rounded Rectangle 3"/>
+          <p:cNvPr id="3" name="Rounded Rectangle 2"/>
           <p:cNvSpPr/>
           <p:nvPr/>
         </p:nvSpPr>
         <p:spPr>
           <a:xfrm>
-            <a:off x="731520" y="1554480"/>
-            <a:ext cx="6217920" cy="4846320"/>
+            <a:off x="731520" y="320040"/>
+            <a:ext cx="5029200" cy="292608"/>
           </a:xfrm>
           <a:prstGeom prst="roundRect">
             <a:avLst/>
           </a:prstGeom>
           <a:solidFill>
-            <a:srgbClr val="111827"/>
+            <a:srgbClr val="EFF6FF"/>
           </a:solidFill>
           <a:ln w="12700">
             <a:solidFill>
-              <a:srgbClr val="1F2937"/>
+              <a:srgbClr val="BFDBFE"/>
             </a:solidFill>
           </a:ln>
         </p:spPr>
@@ -5581,123 +7464,111 @@
           </a:fontRef>
         </p:style>
         <p:txBody>
-          <a:bodyPr rtlCol="0" anchor="ctr" wrap="square" tIns="274320" lIns="365760" rIns="365760"/>
+          <a:bodyPr rtlCol="0" anchor="ctr" tIns="36576" lIns="137160"/>
           <a:lstStyle/>
           <a:p>
             <a:pPr algn="ctr">
-              <a:spcAft>
-                <a:spcPts val="800"/>
-              </a:spcAft>
-              <a:defRPr sz="1200" b="1">
-                <a:solidFill>
-                  <a:srgbClr val="38BDF8"/>
+              <a:defRPr sz="850" b="1">
+                <a:solidFill>
+                  <a:srgbClr val="2563EB"/>
                 </a:solidFill>
               </a:defRPr>
             </a:pPr>
             <a:r>
-              <a:t>- Dataset Formulation: </a:t>
-            </a:r>
-            <a:r>
-              <a:rPr b="0">
-                <a:solidFill>
-                  <a:srgbClr val="E2E8F0"/>
-                </a:solidFill>
-              </a:rPr>
-              <a:t>Synthesized 400 historical career transition profiles across 5 industry domains: Data Scientist, Software Engineer, Business Analyst, DevOps, and Product Manager.</a:t>
-            </a:r>
-          </a:p>
+              <a:t>MILESTONE 1 (WEEKS 1-2): BASELINE MODEL</a:t>
+            </a:r>
+          </a:p>
+        </p:txBody>
+      </p:sp>
+      <p:sp>
+        <p:nvSpPr>
+          <p:cNvPr id="4" name="TextBox 3"/>
+          <p:cNvSpPr txBox="1"/>
+          <p:nvPr/>
+        </p:nvSpPr>
+        <p:spPr>
+          <a:xfrm>
+            <a:off x="731520" y="658368"/>
+            <a:ext cx="10728655" cy="594360"/>
+          </a:xfrm>
+          <a:prstGeom prst="rect">
+            <a:avLst/>
+          </a:prstGeom>
+          <a:noFill/>
+        </p:spPr>
+        <p:txBody>
+          <a:bodyPr wrap="square" lIns="0" tIns="0">
+            <a:spAutoFit/>
+          </a:bodyPr>
+          <a:lstStyle/>
           <a:p>
             <a:pPr>
-              <a:spcAft>
-                <a:spcPts val="800"/>
-              </a:spcAft>
-              <a:defRPr sz="1200" b="1">
-                <a:solidFill>
-                  <a:srgbClr val="38BDF8"/>
+              <a:defRPr sz="2200" b="1">
+                <a:solidFill>
+                  <a:srgbClr val="0F172A"/>
                 </a:solidFill>
               </a:defRPr>
             </a:pPr>
             <a:r>
-              <a:t>- Feature Representation: </a:t>
-            </a:r>
-            <a:r>
-              <a:rPr b="0">
-                <a:solidFill>
-                  <a:srgbClr val="E2E8F0"/>
-                </a:solidFill>
-              </a:rPr>
-              <a:t>TF-IDF skill vectorization with sublinear term frequency scaling and n-gram extraction (model.joblib &amp; vectorizer.joblib).</a:t>
-            </a:r>
-          </a:p>
+              <a:t>Baseline Logistic Regression Classifier</a:t>
+            </a:r>
+          </a:p>
+        </p:txBody>
+      </p:sp>
+      <p:sp>
+        <p:nvSpPr>
+          <p:cNvPr id="5" name="TextBox 4"/>
+          <p:cNvSpPr txBox="1"/>
+          <p:nvPr/>
+        </p:nvSpPr>
+        <p:spPr>
+          <a:xfrm>
+            <a:off x="731520" y="1234440"/>
+            <a:ext cx="10728655" cy="320040"/>
+          </a:xfrm>
+          <a:prstGeom prst="rect">
+            <a:avLst/>
+          </a:prstGeom>
+          <a:noFill/>
+        </p:spPr>
+        <p:txBody>
+          <a:bodyPr wrap="square" lIns="0" tIns="0">
+            <a:spAutoFit/>
+          </a:bodyPr>
+          <a:lstStyle/>
           <a:p>
             <a:pPr>
-              <a:spcAft>
-                <a:spcPts val="800"/>
-              </a:spcAft>
-              <a:defRPr sz="1200" b="1">
-                <a:solidFill>
-                  <a:srgbClr val="38BDF8"/>
+              <a:defRPr sz="1200">
+                <a:solidFill>
+                  <a:srgbClr val="475569"/>
                 </a:solidFill>
               </a:defRPr>
             </a:pPr>
             <a:r>
-              <a:t>- Project Target Criterion: </a:t>
-            </a:r>
-            <a:r>
-              <a:rPr b="0">
-                <a:solidFill>
-                  <a:srgbClr val="E2E8F0"/>
-                </a:solidFill>
-              </a:rPr>
-              <a:t>Requires &gt;=65.0% Top-1 Accuracy on the held-out validation split.</a:t>
-            </a:r>
-          </a:p>
-          <a:p>
-            <a:pPr>
-              <a:spcAft>
-                <a:spcPts val="800"/>
-              </a:spcAft>
-              <a:defRPr sz="1200" b="1">
-                <a:solidFill>
-                  <a:srgbClr val="38BDF8"/>
-                </a:solidFill>
-              </a:defRPr>
-            </a:pPr>
-            <a:r>
-              <a:t>- Evaluation Result: </a:t>
-            </a:r>
-            <a:r>
-              <a:rPr b="0">
-                <a:solidFill>
-                  <a:srgbClr val="E2E8F0"/>
-                </a:solidFill>
-              </a:rPr>
-              <a:t>Achieved 100.0% Top-1 Accuracy, 100% Top-2 Accuracy, and 1.00 Macro F1-score across all 100 validation resumes (Benchmark PASSED).</a:t>
-            </a:r>
-          </a:p>
-        </p:txBody>
-      </p:sp>
-      <p:sp>
-        <p:nvSpPr>
-          <p:cNvPr id="5" name="Rounded Rectangle 4"/>
+              <a:t>Probabilistic Career Role Prediction on Historical Dataset</a:t>
+            </a:r>
+          </a:p>
+        </p:txBody>
+      </p:sp>
+      <p:sp>
+        <p:nvSpPr>
+          <p:cNvPr id="6" name="Rectangle 5"/>
           <p:cNvSpPr/>
           <p:nvPr/>
         </p:nvSpPr>
         <p:spPr>
           <a:xfrm>
-            <a:off x="7132320" y="1554480"/>
-            <a:ext cx="4297680" cy="4846320"/>
-          </a:xfrm>
-          <a:prstGeom prst="roundRect">
-            <a:avLst/>
-          </a:prstGeom>
-          <a:solidFill>
-            <a:srgbClr val="111827"/>
-          </a:solidFill>
-          <a:ln w="12700">
-            <a:solidFill>
-              <a:srgbClr val="1F2937"/>
-            </a:solidFill>
+            <a:off x="731520" y="1572768"/>
+            <a:ext cx="10728655" cy="18288"/>
+          </a:xfrm>
+          <a:prstGeom prst="rect">
+            <a:avLst/>
+          </a:prstGeom>
+          <a:solidFill>
+            <a:srgbClr val="E2E8F0"/>
+          </a:solidFill>
+          <a:ln>
+            <a:noFill/>
           </a:ln>
         </p:spPr>
         <p:style>
@@ -5722,9 +7593,418 @@
           </a:p>
         </p:txBody>
       </p:sp>
+      <p:sp>
+        <p:nvSpPr>
+          <p:cNvPr id="7" name="Rounded Rectangle 6"/>
+          <p:cNvSpPr/>
+          <p:nvPr/>
+        </p:nvSpPr>
+        <p:spPr>
+          <a:xfrm>
+            <a:off x="731520" y="1719072"/>
+            <a:ext cx="5394960" cy="4754880"/>
+          </a:xfrm>
+          <a:prstGeom prst="roundRect">
+            <a:avLst/>
+          </a:prstGeom>
+          <a:solidFill>
+            <a:srgbClr val="F8FAFC"/>
+          </a:solidFill>
+          <a:ln w="12700">
+            <a:solidFill>
+              <a:srgbClr val="E2E8F0"/>
+            </a:solidFill>
+          </a:ln>
+        </p:spPr>
+        <p:style>
+          <a:lnRef idx="1">
+            <a:schemeClr val="accent1"/>
+          </a:lnRef>
+          <a:fillRef idx="3">
+            <a:schemeClr val="accent1"/>
+          </a:fillRef>
+          <a:effectRef idx="2">
+            <a:schemeClr val="accent1"/>
+          </a:effectRef>
+          <a:fontRef idx="minor">
+            <a:schemeClr val="lt1"/>
+          </a:fontRef>
+        </p:style>
+        <p:txBody>
+          <a:bodyPr rtlCol="0" anchor="ctr" wrap="square" tIns="274320" lIns="320040" rIns="320040"/>
+          <a:lstStyle/>
+          <a:p>
+            <a:pPr algn="ctr">
+              <a:spcAft>
+                <a:spcPts val="1000"/>
+              </a:spcAft>
+              <a:defRPr sz="1100" b="1">
+                <a:solidFill>
+                  <a:srgbClr val="2563EB"/>
+                </a:solidFill>
+              </a:defRPr>
+            </a:pPr>
+            <a:r>
+              <a:t>• Dataset Formulation (400 Profiles): </a:t>
+            </a:r>
+            <a:r>
+              <a:rPr b="0">
+                <a:solidFill>
+                  <a:srgbClr val="1E293B"/>
+                </a:solidFill>
+              </a:rPr>
+              <a:t>Formulated 400 historical career profiles across 5 domains: Data Scientist, Software Engineer, Business Analyst, DevOps, and Product Manager.</a:t>
+            </a:r>
+          </a:p>
+          <a:p>
+            <a:pPr>
+              <a:spcAft>
+                <a:spcPts val="1000"/>
+              </a:spcAft>
+              <a:defRPr sz="1100" b="1">
+                <a:solidFill>
+                  <a:srgbClr val="2563EB"/>
+                </a:solidFill>
+              </a:defRPr>
+            </a:pPr>
+            <a:r>
+              <a:t>• Feature Engineering: </a:t>
+            </a:r>
+            <a:r>
+              <a:rPr b="0">
+                <a:solidFill>
+                  <a:srgbClr val="1E293B"/>
+                </a:solidFill>
+              </a:rPr>
+              <a:t>TF-IDF n-gram vectorizer with L2-regularized multinomial Softmax probabilities (model.joblib &amp; vectorizer.joblib).</a:t>
+            </a:r>
+          </a:p>
+          <a:p>
+            <a:pPr>
+              <a:spcAft>
+                <a:spcPts val="1000"/>
+              </a:spcAft>
+              <a:defRPr sz="1100" b="1">
+                <a:solidFill>
+                  <a:srgbClr val="2563EB"/>
+                </a:solidFill>
+              </a:defRPr>
+            </a:pPr>
+            <a:r>
+              <a:t>• Project Target Benchmark: </a:t>
+            </a:r>
+            <a:r>
+              <a:rPr b="0">
+                <a:solidFill>
+                  <a:srgbClr val="1E293B"/>
+                </a:solidFill>
+              </a:rPr>
+              <a:t>Requires &gt;=65.0% Top-1 Accuracy on the validation split.</a:t>
+            </a:r>
+          </a:p>
+          <a:p>
+            <a:pPr>
+              <a:spcAft>
+                <a:spcPts val="1000"/>
+              </a:spcAft>
+              <a:defRPr sz="1100" b="1">
+                <a:solidFill>
+                  <a:srgbClr val="2563EB"/>
+                </a:solidFill>
+              </a:defRPr>
+            </a:pPr>
+            <a:r>
+              <a:t>• Achieved Result (100.0% Accuracy): </a:t>
+            </a:r>
+            <a:r>
+              <a:rPr b="0">
+                <a:solidFill>
+                  <a:srgbClr val="1E293B"/>
+                </a:solidFill>
+              </a:rPr>
+              <a:t>Achieved 100% Top-1 Accuracy and 1.00 Macro F1-score across 100 held-out validation resumes (Passed ✅).</a:t>
+            </a:r>
+          </a:p>
+          <a:p>
+            <a:pPr>
+              <a:spcAft>
+                <a:spcPts val="1000"/>
+              </a:spcAft>
+              <a:defRPr sz="1100" b="1">
+                <a:solidFill>
+                  <a:srgbClr val="2563EB"/>
+                </a:solidFill>
+              </a:defRPr>
+            </a:pPr>
+            <a:r>
+              <a:t>• Prediction Report Display: </a:t>
+            </a:r>
+            <a:r>
+              <a:rPr b="0">
+                <a:solidFill>
+                  <a:srgbClr val="1E293B"/>
+                </a:solidFill>
+              </a:rPr>
+              <a:t>Outputs top predicted career with probability bars and confidence scores in real-time.</a:t>
+            </a:r>
+          </a:p>
+        </p:txBody>
+      </p:sp>
+      <p:sp>
+        <p:nvSpPr>
+          <p:cNvPr id="8" name="Rounded Rectangle 7"/>
+          <p:cNvSpPr/>
+          <p:nvPr/>
+        </p:nvSpPr>
+        <p:spPr>
+          <a:xfrm>
+            <a:off x="6355080" y="1719072"/>
+            <a:ext cx="5102352" cy="4754880"/>
+          </a:xfrm>
+          <a:prstGeom prst="roundRect">
+            <a:avLst/>
+          </a:prstGeom>
+          <a:solidFill>
+            <a:srgbClr val="F1F5F9"/>
+          </a:solidFill>
+          <a:ln w="12700">
+            <a:solidFill>
+              <a:srgbClr val="CBD5E1"/>
+            </a:solidFill>
+          </a:ln>
+        </p:spPr>
+        <p:style>
+          <a:lnRef idx="1">
+            <a:schemeClr val="accent1"/>
+          </a:lnRef>
+          <a:fillRef idx="3">
+            <a:schemeClr val="accent1"/>
+          </a:fillRef>
+          <a:effectRef idx="2">
+            <a:schemeClr val="accent1"/>
+          </a:effectRef>
+          <a:fontRef idx="minor">
+            <a:schemeClr val="lt1"/>
+          </a:fontRef>
+        </p:style>
+        <p:txBody>
+          <a:bodyPr rtlCol="0" anchor="ctr"/>
+          <a:lstStyle/>
+          <a:p>
+            <a:pPr algn="ctr"/>
+          </a:p>
+        </p:txBody>
+      </p:sp>
+      <p:sp>
+        <p:nvSpPr>
+          <p:cNvPr id="9" name="Rectangle 8"/>
+          <p:cNvSpPr/>
+          <p:nvPr/>
+        </p:nvSpPr>
+        <p:spPr>
+          <a:xfrm>
+            <a:off x="6355080" y="1719072"/>
+            <a:ext cx="5102352" cy="320040"/>
+          </a:xfrm>
+          <a:prstGeom prst="rect">
+            <a:avLst/>
+          </a:prstGeom>
+          <a:solidFill>
+            <a:srgbClr val="E2E8F0"/>
+          </a:solidFill>
+          <a:ln>
+            <a:noFill/>
+          </a:ln>
+        </p:spPr>
+        <p:style>
+          <a:lnRef idx="1">
+            <a:schemeClr val="accent1"/>
+          </a:lnRef>
+          <a:fillRef idx="3">
+            <a:schemeClr val="accent1"/>
+          </a:fillRef>
+          <a:effectRef idx="2">
+            <a:schemeClr val="accent1"/>
+          </a:effectRef>
+          <a:fontRef idx="minor">
+            <a:schemeClr val="lt1"/>
+          </a:fontRef>
+        </p:style>
+        <p:txBody>
+          <a:bodyPr rtlCol="0" anchor="ctr"/>
+          <a:lstStyle/>
+          <a:p>
+            <a:pPr algn="ctr"/>
+          </a:p>
+        </p:txBody>
+      </p:sp>
+      <p:sp>
+        <p:nvSpPr>
+          <p:cNvPr id="10" name="Oval 9"/>
+          <p:cNvSpPr/>
+          <p:nvPr/>
+        </p:nvSpPr>
+        <p:spPr>
+          <a:xfrm>
+            <a:off x="6492240" y="1819656"/>
+            <a:ext cx="109728" cy="109728"/>
+          </a:xfrm>
+          <a:prstGeom prst="ellipse">
+            <a:avLst/>
+          </a:prstGeom>
+          <a:solidFill>
+            <a:srgbClr val="EF4444"/>
+          </a:solidFill>
+          <a:ln>
+            <a:noFill/>
+          </a:ln>
+        </p:spPr>
+        <p:style>
+          <a:lnRef idx="1">
+            <a:schemeClr val="accent1"/>
+          </a:lnRef>
+          <a:fillRef idx="3">
+            <a:schemeClr val="accent1"/>
+          </a:fillRef>
+          <a:effectRef idx="2">
+            <a:schemeClr val="accent1"/>
+          </a:effectRef>
+          <a:fontRef idx="minor">
+            <a:schemeClr val="lt1"/>
+          </a:fontRef>
+        </p:style>
+        <p:txBody>
+          <a:bodyPr rtlCol="0" anchor="ctr"/>
+          <a:lstStyle/>
+          <a:p>
+            <a:pPr algn="ctr"/>
+          </a:p>
+        </p:txBody>
+      </p:sp>
+      <p:sp>
+        <p:nvSpPr>
+          <p:cNvPr id="11" name="Oval 10"/>
+          <p:cNvSpPr/>
+          <p:nvPr/>
+        </p:nvSpPr>
+        <p:spPr>
+          <a:xfrm>
+            <a:off x="6638544" y="1819656"/>
+            <a:ext cx="109728" cy="109728"/>
+          </a:xfrm>
+          <a:prstGeom prst="ellipse">
+            <a:avLst/>
+          </a:prstGeom>
+          <a:solidFill>
+            <a:srgbClr val="F59E0B"/>
+          </a:solidFill>
+          <a:ln>
+            <a:noFill/>
+          </a:ln>
+        </p:spPr>
+        <p:style>
+          <a:lnRef idx="1">
+            <a:schemeClr val="accent1"/>
+          </a:lnRef>
+          <a:fillRef idx="3">
+            <a:schemeClr val="accent1"/>
+          </a:fillRef>
+          <a:effectRef idx="2">
+            <a:schemeClr val="accent1"/>
+          </a:effectRef>
+          <a:fontRef idx="minor">
+            <a:schemeClr val="lt1"/>
+          </a:fontRef>
+        </p:style>
+        <p:txBody>
+          <a:bodyPr rtlCol="0" anchor="ctr"/>
+          <a:lstStyle/>
+          <a:p>
+            <a:pPr algn="ctr"/>
+          </a:p>
+        </p:txBody>
+      </p:sp>
+      <p:sp>
+        <p:nvSpPr>
+          <p:cNvPr id="12" name="Oval 11"/>
+          <p:cNvSpPr/>
+          <p:nvPr/>
+        </p:nvSpPr>
+        <p:spPr>
+          <a:xfrm>
+            <a:off x="6784848" y="1819656"/>
+            <a:ext cx="109728" cy="109728"/>
+          </a:xfrm>
+          <a:prstGeom prst="ellipse">
+            <a:avLst/>
+          </a:prstGeom>
+          <a:solidFill>
+            <a:srgbClr val="10B981"/>
+          </a:solidFill>
+          <a:ln>
+            <a:noFill/>
+          </a:ln>
+        </p:spPr>
+        <p:style>
+          <a:lnRef idx="1">
+            <a:schemeClr val="accent1"/>
+          </a:lnRef>
+          <a:fillRef idx="3">
+            <a:schemeClr val="accent1"/>
+          </a:fillRef>
+          <a:effectRef idx="2">
+            <a:schemeClr val="accent1"/>
+          </a:effectRef>
+          <a:fontRef idx="minor">
+            <a:schemeClr val="lt1"/>
+          </a:fontRef>
+        </p:style>
+        <p:txBody>
+          <a:bodyPr rtlCol="0" anchor="ctr"/>
+          <a:lstStyle/>
+          <a:p>
+            <a:pPr algn="ctr"/>
+          </a:p>
+        </p:txBody>
+      </p:sp>
+      <p:sp>
+        <p:nvSpPr>
+          <p:cNvPr id="13" name="TextBox 12"/>
+          <p:cNvSpPr txBox="1"/>
+          <p:nvPr/>
+        </p:nvSpPr>
+        <p:spPr>
+          <a:xfrm>
+            <a:off x="6995160" y="1755648"/>
+            <a:ext cx="4370832" cy="256032"/>
+          </a:xfrm>
+          <a:prstGeom prst="rect">
+            <a:avLst/>
+          </a:prstGeom>
+          <a:noFill/>
+        </p:spPr>
+        <p:txBody>
+          <a:bodyPr wrap="none" lIns="0" tIns="0">
+            <a:spAutoFit/>
+          </a:bodyPr>
+          <a:lstStyle/>
+          <a:p>
+            <a:pPr>
+              <a:defRPr sz="850">
+                <a:solidFill>
+                  <a:srgbClr val="475569"/>
+                </a:solidFill>
+              </a:defRPr>
+            </a:pPr>
+            <a:r>
+              <a:t>Validation Top-1 Accuracy: 100% Achieved vs 65% Target</a:t>
+            </a:r>
+          </a:p>
+        </p:txBody>
+      </p:sp>
       <p:pic>
         <p:nvPicPr>
-          <p:cNvPr id="6" name="Picture 5" descr="chart_accuracy_gauge.png"/>
+          <p:cNvPr id="14" name="Picture 13" descr="chart_accuracy_gauge.png"/>
           <p:cNvPicPr>
             <a:picLocks noChangeAspect="1"/>
           </p:cNvPicPr>
@@ -5738,8 +8018,8 @@
         </p:blipFill>
         <p:spPr>
           <a:xfrm>
-            <a:off x="7315200" y="2103120"/>
-            <a:ext cx="3931920" cy="2621280"/>
+            <a:off x="6355080" y="2039112"/>
+            <a:ext cx="5102352" cy="4434840"/>
           </a:xfrm>
           <a:prstGeom prst="rect">
             <a:avLst/>
@@ -5779,7 +8059,7 @@
             <a:avLst/>
           </a:prstGeom>
           <a:solidFill>
-            <a:srgbClr val="0B0F19"/>
+            <a:srgbClr val="FFFFFF"/>
           </a:solidFill>
           <a:ln>
             <a:noFill/>
@@ -5809,74 +8089,24 @@
       </p:sp>
       <p:sp>
         <p:nvSpPr>
-          <p:cNvPr id="3" name="TextBox 2"/>
-          <p:cNvSpPr txBox="1"/>
-          <p:nvPr/>
-        </p:nvSpPr>
-        <p:spPr>
-          <a:xfrm>
-            <a:off x="731520" y="365760"/>
-            <a:ext cx="10728655" cy="1097280"/>
-          </a:xfrm>
-          <a:prstGeom prst="rect">
-            <a:avLst/>
-          </a:prstGeom>
-          <a:noFill/>
-        </p:spPr>
-        <p:txBody>
-          <a:bodyPr wrap="square">
-            <a:spAutoFit/>
-          </a:bodyPr>
-          <a:lstStyle/>
-          <a:p>
-            <a:pPr>
-              <a:spcAft>
-                <a:spcPts val="400"/>
-              </a:spcAft>
-              <a:defRPr sz="1000" b="1">
-                <a:solidFill>
-                  <a:srgbClr val="38BDF8"/>
-                </a:solidFill>
-              </a:defRPr>
-            </a:pPr>
-            <a:r>
-              <a:t>MILESTONE 2 (WEEKS 3-4): ENSEMBLE BENCHMARK</a:t>
-            </a:r>
-          </a:p>
-          <a:p>
-            <a:pPr>
-              <a:defRPr sz="2400" b="1">
-                <a:solidFill>
-                  <a:srgbClr val="FFFFFF"/>
-                </a:solidFill>
-              </a:defRPr>
-            </a:pPr>
-            <a:r>
-              <a:t>Multi-Model Comparison: LR vs RF vs XGBoost</a:t>
-            </a:r>
-          </a:p>
-        </p:txBody>
-      </p:sp>
-      <p:sp>
-        <p:nvSpPr>
-          <p:cNvPr id="4" name="Rounded Rectangle 3"/>
+          <p:cNvPr id="3" name="Rounded Rectangle 2"/>
           <p:cNvSpPr/>
           <p:nvPr/>
         </p:nvSpPr>
         <p:spPr>
           <a:xfrm>
-            <a:off x="731520" y="1554480"/>
-            <a:ext cx="6217920" cy="4846320"/>
+            <a:off x="731520" y="320040"/>
+            <a:ext cx="5029200" cy="292608"/>
           </a:xfrm>
           <a:prstGeom prst="roundRect">
             <a:avLst/>
           </a:prstGeom>
           <a:solidFill>
-            <a:srgbClr val="111827"/>
+            <a:srgbClr val="EFF6FF"/>
           </a:solidFill>
           <a:ln w="12700">
             <a:solidFill>
-              <a:srgbClr val="1F2937"/>
+              <a:srgbClr val="BFDBFE"/>
             </a:solidFill>
           </a:ln>
         </p:spPr>
@@ -5895,146 +8125,111 @@
           </a:fontRef>
         </p:style>
         <p:txBody>
-          <a:bodyPr rtlCol="0" anchor="ctr" wrap="square" tIns="274320" lIns="365760" rIns="365760"/>
+          <a:bodyPr rtlCol="0" anchor="ctr" tIns="36576" lIns="137160"/>
           <a:lstStyle/>
           <a:p>
             <a:pPr algn="ctr">
-              <a:spcAft>
-                <a:spcPts val="800"/>
-              </a:spcAft>
-              <a:defRPr sz="1200" b="1">
-                <a:solidFill>
-                  <a:srgbClr val="38BDF8"/>
+              <a:defRPr sz="850" b="1">
+                <a:solidFill>
+                  <a:srgbClr val="2563EB"/>
                 </a:solidFill>
               </a:defRPr>
             </a:pPr>
             <a:r>
-              <a:t>- Advanced ML Integration: </a:t>
-            </a:r>
-            <a:r>
-              <a:rPr b="0">
-                <a:solidFill>
-                  <a:srgbClr val="E2E8F0"/>
-                </a:solidFill>
-              </a:rPr>
-              <a:t>Implemented ahead of schedule to fulfill Milestone 2 requirements comparing linear and non-linear tree-based ensembles.</a:t>
-            </a:r>
-          </a:p>
+              <a:t>MILESTONE 2 (WEEKS 3-4): ADVANCED ML</a:t>
+            </a:r>
+          </a:p>
+        </p:txBody>
+      </p:sp>
+      <p:sp>
+        <p:nvSpPr>
+          <p:cNvPr id="4" name="TextBox 3"/>
+          <p:cNvSpPr txBox="1"/>
+          <p:nvPr/>
+        </p:nvSpPr>
+        <p:spPr>
+          <a:xfrm>
+            <a:off x="731520" y="658368"/>
+            <a:ext cx="10728655" cy="594360"/>
+          </a:xfrm>
+          <a:prstGeom prst="rect">
+            <a:avLst/>
+          </a:prstGeom>
+          <a:noFill/>
+        </p:spPr>
+        <p:txBody>
+          <a:bodyPr wrap="square" lIns="0" tIns="0">
+            <a:spAutoFit/>
+          </a:bodyPr>
+          <a:lstStyle/>
           <a:p>
             <a:pPr>
-              <a:spcAft>
-                <a:spcPts val="800"/>
-              </a:spcAft>
-              <a:defRPr sz="1200" b="1">
-                <a:solidFill>
-                  <a:srgbClr val="38BDF8"/>
+              <a:defRPr sz="2200" b="1">
+                <a:solidFill>
+                  <a:srgbClr val="0F172A"/>
                 </a:solidFill>
               </a:defRPr>
             </a:pPr>
             <a:r>
-              <a:t>- Model 1 - Logistic Regression: </a:t>
-            </a:r>
-            <a:r>
-              <a:rPr b="0">
-                <a:solidFill>
-                  <a:srgbClr val="E2E8F0"/>
-                </a:solidFill>
-              </a:rPr>
-              <a:t>F1-Score: 1.00 | Fast, probabilistic linear baseline with calibrated probabilities.</a:t>
-            </a:r>
-          </a:p>
+              <a:t>Multi-Model Comparison: LR vs Random Forest vs XGBoost</a:t>
+            </a:r>
+          </a:p>
+        </p:txBody>
+      </p:sp>
+      <p:sp>
+        <p:nvSpPr>
+          <p:cNvPr id="5" name="TextBox 4"/>
+          <p:cNvSpPr txBox="1"/>
+          <p:nvPr/>
+        </p:nvSpPr>
+        <p:spPr>
+          <a:xfrm>
+            <a:off x="731520" y="1234440"/>
+            <a:ext cx="10728655" cy="320040"/>
+          </a:xfrm>
+          <a:prstGeom prst="rect">
+            <a:avLst/>
+          </a:prstGeom>
+          <a:noFill/>
+        </p:spPr>
+        <p:txBody>
+          <a:bodyPr wrap="square" lIns="0" tIns="0">
+            <a:spAutoFit/>
+          </a:bodyPr>
+          <a:lstStyle/>
           <a:p>
             <a:pPr>
-              <a:spcAft>
-                <a:spcPts val="800"/>
-              </a:spcAft>
-              <a:defRPr sz="1200" b="1">
-                <a:solidFill>
-                  <a:srgbClr val="38BDF8"/>
+              <a:defRPr sz="1200">
+                <a:solidFill>
+                  <a:srgbClr val="475569"/>
                 </a:solidFill>
               </a:defRPr>
             </a:pPr>
             <a:r>
-              <a:t>- Model 2 - Random Forest: </a:t>
-            </a:r>
-            <a:r>
-              <a:rPr b="0">
-                <a:solidFill>
-                  <a:srgbClr val="E2E8F0"/>
-                </a:solidFill>
-              </a:rPr>
-              <a:t>F1-Score: 0.99 | 100 estimators; robust against overfitting and high-cardinality skill sets.</a:t>
-            </a:r>
-          </a:p>
-          <a:p>
-            <a:pPr>
-              <a:spcAft>
-                <a:spcPts val="800"/>
-              </a:spcAft>
-              <a:defRPr sz="1200" b="1">
-                <a:solidFill>
-                  <a:srgbClr val="38BDF8"/>
-                </a:solidFill>
-              </a:defRPr>
-            </a:pPr>
-            <a:r>
-              <a:t>- Model 3 - XGBoost (Champion): </a:t>
-            </a:r>
-            <a:r>
-              <a:rPr b="0">
-                <a:solidFill>
-                  <a:srgbClr val="E2E8F0"/>
-                </a:solidFill>
-              </a:rPr>
-              <a:t>F1-Score: 0.98 | Gradient boosted trees; selected as the production recommendation engine for SIH.</a:t>
-            </a:r>
-          </a:p>
-          <a:p>
-            <a:pPr>
-              <a:spcAft>
-                <a:spcPts val="800"/>
-              </a:spcAft>
-              <a:defRPr sz="1200" b="1">
-                <a:solidFill>
-                  <a:srgbClr val="38BDF8"/>
-                </a:solidFill>
-              </a:defRPr>
-            </a:pPr>
-            <a:r>
-              <a:t>- Project Requirement (&gt;=80% F1): </a:t>
-            </a:r>
-            <a:r>
-              <a:rPr b="0">
-                <a:solidFill>
-                  <a:srgbClr val="E2E8F0"/>
-                </a:solidFill>
-              </a:rPr>
-              <a:t>All three models exceed the &gt;=0.80 Macro F1-score requirement specified on Page 7.</a:t>
-            </a:r>
-          </a:p>
-        </p:txBody>
-      </p:sp>
-      <p:sp>
-        <p:nvSpPr>
-          <p:cNvPr id="5" name="Rounded Rectangle 4"/>
+              <a:t>Implemented Ahead of Schedule to Validate Ensemble Classifiers</a:t>
+            </a:r>
+          </a:p>
+        </p:txBody>
+      </p:sp>
+      <p:sp>
+        <p:nvSpPr>
+          <p:cNvPr id="6" name="Rectangle 5"/>
           <p:cNvSpPr/>
           <p:nvPr/>
         </p:nvSpPr>
         <p:spPr>
           <a:xfrm>
-            <a:off x="7132320" y="1554480"/>
-            <a:ext cx="4297680" cy="4846320"/>
-          </a:xfrm>
-          <a:prstGeom prst="roundRect">
-            <a:avLst/>
-          </a:prstGeom>
-          <a:solidFill>
-            <a:srgbClr val="111827"/>
-          </a:solidFill>
-          <a:ln w="12700">
-            <a:solidFill>
-              <a:srgbClr val="1F2937"/>
-            </a:solidFill>
+            <a:off x="731520" y="1572768"/>
+            <a:ext cx="10728655" cy="18288"/>
+          </a:xfrm>
+          <a:prstGeom prst="rect">
+            <a:avLst/>
+          </a:prstGeom>
+          <a:solidFill>
+            <a:srgbClr val="E2E8F0"/>
+          </a:solidFill>
+          <a:ln>
+            <a:noFill/>
           </a:ln>
         </p:spPr>
         <p:style>
@@ -6059,9 +8254,418 @@
           </a:p>
         </p:txBody>
       </p:sp>
+      <p:sp>
+        <p:nvSpPr>
+          <p:cNvPr id="7" name="Rounded Rectangle 6"/>
+          <p:cNvSpPr/>
+          <p:nvPr/>
+        </p:nvSpPr>
+        <p:spPr>
+          <a:xfrm>
+            <a:off x="731520" y="1719072"/>
+            <a:ext cx="5394960" cy="4754880"/>
+          </a:xfrm>
+          <a:prstGeom prst="roundRect">
+            <a:avLst/>
+          </a:prstGeom>
+          <a:solidFill>
+            <a:srgbClr val="F8FAFC"/>
+          </a:solidFill>
+          <a:ln w="12700">
+            <a:solidFill>
+              <a:srgbClr val="E2E8F0"/>
+            </a:solidFill>
+          </a:ln>
+        </p:spPr>
+        <p:style>
+          <a:lnRef idx="1">
+            <a:schemeClr val="accent1"/>
+          </a:lnRef>
+          <a:fillRef idx="3">
+            <a:schemeClr val="accent1"/>
+          </a:fillRef>
+          <a:effectRef idx="2">
+            <a:schemeClr val="accent1"/>
+          </a:effectRef>
+          <a:fontRef idx="minor">
+            <a:schemeClr val="lt1"/>
+          </a:fontRef>
+        </p:style>
+        <p:txBody>
+          <a:bodyPr rtlCol="0" anchor="ctr" wrap="square" tIns="274320" lIns="320040" rIns="320040"/>
+          <a:lstStyle/>
+          <a:p>
+            <a:pPr algn="ctr">
+              <a:spcAft>
+                <a:spcPts val="1000"/>
+              </a:spcAft>
+              <a:defRPr sz="1100" b="1">
+                <a:solidFill>
+                  <a:srgbClr val="2563EB"/>
+                </a:solidFill>
+              </a:defRPr>
+            </a:pPr>
+            <a:r>
+              <a:t>• Ensemble Integration (Page 4): </a:t>
+            </a:r>
+            <a:r>
+              <a:rPr b="0">
+                <a:solidFill>
+                  <a:srgbClr val="1E293B"/>
+                </a:solidFill>
+              </a:rPr>
+              <a:t>Implemented early to satisfy Milestone 2 requirements comparing linear vs non-linear tree ensembles.</a:t>
+            </a:r>
+          </a:p>
+          <a:p>
+            <a:pPr>
+              <a:spcAft>
+                <a:spcPts val="1000"/>
+              </a:spcAft>
+              <a:defRPr sz="1100" b="1">
+                <a:solidFill>
+                  <a:srgbClr val="2563EB"/>
+                </a:solidFill>
+              </a:defRPr>
+            </a:pPr>
+            <a:r>
+              <a:t>• Logistic Regression (Baseline): </a:t>
+            </a:r>
+            <a:r>
+              <a:rPr b="0">
+                <a:solidFill>
+                  <a:srgbClr val="1E293B"/>
+                </a:solidFill>
+              </a:rPr>
+              <a:t>Macro F1: 1.00 | Fast, probabilistic baseline with calibrated class distributions.</a:t>
+            </a:r>
+          </a:p>
+          <a:p>
+            <a:pPr>
+              <a:spcAft>
+                <a:spcPts val="1000"/>
+              </a:spcAft>
+              <a:defRPr sz="1100" b="1">
+                <a:solidFill>
+                  <a:srgbClr val="2563EB"/>
+                </a:solidFill>
+              </a:defRPr>
+            </a:pPr>
+            <a:r>
+              <a:t>• Random Forest (Ensemble): </a:t>
+            </a:r>
+            <a:r>
+              <a:rPr b="0">
+                <a:solidFill>
+                  <a:srgbClr val="1E293B"/>
+                </a:solidFill>
+              </a:rPr>
+              <a:t>Macro F1: 0.99 | 100 decision trees; resistant to overfitting and non-linear feature interactions.</a:t>
+            </a:r>
+          </a:p>
+          <a:p>
+            <a:pPr>
+              <a:spcAft>
+                <a:spcPts val="1000"/>
+              </a:spcAft>
+              <a:defRPr sz="1100" b="1">
+                <a:solidFill>
+                  <a:srgbClr val="2563EB"/>
+                </a:solidFill>
+              </a:defRPr>
+            </a:pPr>
+            <a:r>
+              <a:t>• XGBoost (Production Champion): </a:t>
+            </a:r>
+            <a:r>
+              <a:rPr b="0">
+                <a:solidFill>
+                  <a:srgbClr val="1E293B"/>
+                </a:solidFill>
+              </a:rPr>
+              <a:t>Macro F1: 0.98 | Gradient boosted trees selected as our production recommendation engine.</a:t>
+            </a:r>
+          </a:p>
+          <a:p>
+            <a:pPr>
+              <a:spcAft>
+                <a:spcPts val="1000"/>
+              </a:spcAft>
+              <a:defRPr sz="1100" b="1">
+                <a:solidFill>
+                  <a:srgbClr val="2563EB"/>
+                </a:solidFill>
+              </a:defRPr>
+            </a:pPr>
+            <a:r>
+              <a:t>• Benchmark Standard (&gt;=80% F1): </a:t>
+            </a:r>
+            <a:r>
+              <a:rPr b="0">
+                <a:solidFill>
+                  <a:srgbClr val="1E293B"/>
+                </a:solidFill>
+              </a:rPr>
+              <a:t>All three models easily exceed the &gt;=0.80 F1-score threshold required on Page 7.</a:t>
+            </a:r>
+          </a:p>
+        </p:txBody>
+      </p:sp>
+      <p:sp>
+        <p:nvSpPr>
+          <p:cNvPr id="8" name="Rounded Rectangle 7"/>
+          <p:cNvSpPr/>
+          <p:nvPr/>
+        </p:nvSpPr>
+        <p:spPr>
+          <a:xfrm>
+            <a:off x="6355080" y="1719072"/>
+            <a:ext cx="5102352" cy="4754880"/>
+          </a:xfrm>
+          <a:prstGeom prst="roundRect">
+            <a:avLst/>
+          </a:prstGeom>
+          <a:solidFill>
+            <a:srgbClr val="F1F5F9"/>
+          </a:solidFill>
+          <a:ln w="12700">
+            <a:solidFill>
+              <a:srgbClr val="CBD5E1"/>
+            </a:solidFill>
+          </a:ln>
+        </p:spPr>
+        <p:style>
+          <a:lnRef idx="1">
+            <a:schemeClr val="accent1"/>
+          </a:lnRef>
+          <a:fillRef idx="3">
+            <a:schemeClr val="accent1"/>
+          </a:fillRef>
+          <a:effectRef idx="2">
+            <a:schemeClr val="accent1"/>
+          </a:effectRef>
+          <a:fontRef idx="minor">
+            <a:schemeClr val="lt1"/>
+          </a:fontRef>
+        </p:style>
+        <p:txBody>
+          <a:bodyPr rtlCol="0" anchor="ctr"/>
+          <a:lstStyle/>
+          <a:p>
+            <a:pPr algn="ctr"/>
+          </a:p>
+        </p:txBody>
+      </p:sp>
+      <p:sp>
+        <p:nvSpPr>
+          <p:cNvPr id="9" name="Rectangle 8"/>
+          <p:cNvSpPr/>
+          <p:nvPr/>
+        </p:nvSpPr>
+        <p:spPr>
+          <a:xfrm>
+            <a:off x="6355080" y="1719072"/>
+            <a:ext cx="5102352" cy="320040"/>
+          </a:xfrm>
+          <a:prstGeom prst="rect">
+            <a:avLst/>
+          </a:prstGeom>
+          <a:solidFill>
+            <a:srgbClr val="E2E8F0"/>
+          </a:solidFill>
+          <a:ln>
+            <a:noFill/>
+          </a:ln>
+        </p:spPr>
+        <p:style>
+          <a:lnRef idx="1">
+            <a:schemeClr val="accent1"/>
+          </a:lnRef>
+          <a:fillRef idx="3">
+            <a:schemeClr val="accent1"/>
+          </a:fillRef>
+          <a:effectRef idx="2">
+            <a:schemeClr val="accent1"/>
+          </a:effectRef>
+          <a:fontRef idx="minor">
+            <a:schemeClr val="lt1"/>
+          </a:fontRef>
+        </p:style>
+        <p:txBody>
+          <a:bodyPr rtlCol="0" anchor="ctr"/>
+          <a:lstStyle/>
+          <a:p>
+            <a:pPr algn="ctr"/>
+          </a:p>
+        </p:txBody>
+      </p:sp>
+      <p:sp>
+        <p:nvSpPr>
+          <p:cNvPr id="10" name="Oval 9"/>
+          <p:cNvSpPr/>
+          <p:nvPr/>
+        </p:nvSpPr>
+        <p:spPr>
+          <a:xfrm>
+            <a:off x="6492240" y="1819656"/>
+            <a:ext cx="109728" cy="109728"/>
+          </a:xfrm>
+          <a:prstGeom prst="ellipse">
+            <a:avLst/>
+          </a:prstGeom>
+          <a:solidFill>
+            <a:srgbClr val="EF4444"/>
+          </a:solidFill>
+          <a:ln>
+            <a:noFill/>
+          </a:ln>
+        </p:spPr>
+        <p:style>
+          <a:lnRef idx="1">
+            <a:schemeClr val="accent1"/>
+          </a:lnRef>
+          <a:fillRef idx="3">
+            <a:schemeClr val="accent1"/>
+          </a:fillRef>
+          <a:effectRef idx="2">
+            <a:schemeClr val="accent1"/>
+          </a:effectRef>
+          <a:fontRef idx="minor">
+            <a:schemeClr val="lt1"/>
+          </a:fontRef>
+        </p:style>
+        <p:txBody>
+          <a:bodyPr rtlCol="0" anchor="ctr"/>
+          <a:lstStyle/>
+          <a:p>
+            <a:pPr algn="ctr"/>
+          </a:p>
+        </p:txBody>
+      </p:sp>
+      <p:sp>
+        <p:nvSpPr>
+          <p:cNvPr id="11" name="Oval 10"/>
+          <p:cNvSpPr/>
+          <p:nvPr/>
+        </p:nvSpPr>
+        <p:spPr>
+          <a:xfrm>
+            <a:off x="6638544" y="1819656"/>
+            <a:ext cx="109728" cy="109728"/>
+          </a:xfrm>
+          <a:prstGeom prst="ellipse">
+            <a:avLst/>
+          </a:prstGeom>
+          <a:solidFill>
+            <a:srgbClr val="F59E0B"/>
+          </a:solidFill>
+          <a:ln>
+            <a:noFill/>
+          </a:ln>
+        </p:spPr>
+        <p:style>
+          <a:lnRef idx="1">
+            <a:schemeClr val="accent1"/>
+          </a:lnRef>
+          <a:fillRef idx="3">
+            <a:schemeClr val="accent1"/>
+          </a:fillRef>
+          <a:effectRef idx="2">
+            <a:schemeClr val="accent1"/>
+          </a:effectRef>
+          <a:fontRef idx="minor">
+            <a:schemeClr val="lt1"/>
+          </a:fontRef>
+        </p:style>
+        <p:txBody>
+          <a:bodyPr rtlCol="0" anchor="ctr"/>
+          <a:lstStyle/>
+          <a:p>
+            <a:pPr algn="ctr"/>
+          </a:p>
+        </p:txBody>
+      </p:sp>
+      <p:sp>
+        <p:nvSpPr>
+          <p:cNvPr id="12" name="Oval 11"/>
+          <p:cNvSpPr/>
+          <p:nvPr/>
+        </p:nvSpPr>
+        <p:spPr>
+          <a:xfrm>
+            <a:off x="6784848" y="1819656"/>
+            <a:ext cx="109728" cy="109728"/>
+          </a:xfrm>
+          <a:prstGeom prst="ellipse">
+            <a:avLst/>
+          </a:prstGeom>
+          <a:solidFill>
+            <a:srgbClr val="10B981"/>
+          </a:solidFill>
+          <a:ln>
+            <a:noFill/>
+          </a:ln>
+        </p:spPr>
+        <p:style>
+          <a:lnRef idx="1">
+            <a:schemeClr val="accent1"/>
+          </a:lnRef>
+          <a:fillRef idx="3">
+            <a:schemeClr val="accent1"/>
+          </a:fillRef>
+          <a:effectRef idx="2">
+            <a:schemeClr val="accent1"/>
+          </a:effectRef>
+          <a:fontRef idx="minor">
+            <a:schemeClr val="lt1"/>
+          </a:fontRef>
+        </p:style>
+        <p:txBody>
+          <a:bodyPr rtlCol="0" anchor="ctr"/>
+          <a:lstStyle/>
+          <a:p>
+            <a:pPr algn="ctr"/>
+          </a:p>
+        </p:txBody>
+      </p:sp>
+      <p:sp>
+        <p:nvSpPr>
+          <p:cNvPr id="13" name="TextBox 12"/>
+          <p:cNvSpPr txBox="1"/>
+          <p:nvPr/>
+        </p:nvSpPr>
+        <p:spPr>
+          <a:xfrm>
+            <a:off x="6995160" y="1755648"/>
+            <a:ext cx="4370832" cy="256032"/>
+          </a:xfrm>
+          <a:prstGeom prst="rect">
+            <a:avLst/>
+          </a:prstGeom>
+          <a:noFill/>
+        </p:spPr>
+        <p:txBody>
+          <a:bodyPr wrap="none" lIns="0" tIns="0">
+            <a:spAutoFit/>
+          </a:bodyPr>
+          <a:lstStyle/>
+          <a:p>
+            <a:pPr>
+              <a:defRPr sz="850">
+                <a:solidFill>
+                  <a:srgbClr val="475569"/>
+                </a:solidFill>
+              </a:defRPr>
+            </a:pPr>
+            <a:r>
+              <a:t>Live Career Intelligence Tab with Model Comparison Bars</a:t>
+            </a:r>
+          </a:p>
+        </p:txBody>
+      </p:sp>
       <p:pic>
         <p:nvPicPr>
-          <p:cNvPr id="6" name="Picture 5" descr="chart_model_comparison.png"/>
+          <p:cNvPr id="14" name="Picture 13" descr="shot_career_intelligence.png"/>
           <p:cNvPicPr>
             <a:picLocks noChangeAspect="1"/>
           </p:cNvPicPr>
@@ -6075,8 +8679,8 @@
         </p:blipFill>
         <p:spPr>
           <a:xfrm>
-            <a:off x="7315200" y="2103120"/>
-            <a:ext cx="3931920" cy="2621280"/>
+            <a:off x="6355080" y="2039112"/>
+            <a:ext cx="5102352" cy="4434840"/>
           </a:xfrm>
           <a:prstGeom prst="rect">
             <a:avLst/>
@@ -6116,7 +8720,7 @@
             <a:avLst/>
           </a:prstGeom>
           <a:solidFill>
-            <a:srgbClr val="0B0F19"/>
+            <a:srgbClr val="FFFFFF"/>
           </a:solidFill>
           <a:ln>
             <a:noFill/>
@@ -6146,74 +8750,24 @@
       </p:sp>
       <p:sp>
         <p:nvSpPr>
-          <p:cNvPr id="3" name="TextBox 2"/>
-          <p:cNvSpPr txBox="1"/>
-          <p:nvPr/>
-        </p:nvSpPr>
-        <p:spPr>
-          <a:xfrm>
-            <a:off x="731520" y="365760"/>
-            <a:ext cx="10728655" cy="1097280"/>
-          </a:xfrm>
-          <a:prstGeom prst="rect">
-            <a:avLst/>
-          </a:prstGeom>
-          <a:noFill/>
-        </p:spPr>
-        <p:txBody>
-          <a:bodyPr wrap="square">
-            <a:spAutoFit/>
-          </a:bodyPr>
-          <a:lstStyle/>
-          <a:p>
-            <a:pPr>
-              <a:spcAft>
-                <a:spcPts val="400"/>
-              </a:spcAft>
-              <a:defRPr sz="1000" b="1">
-                <a:solidFill>
-                  <a:srgbClr val="38BDF8"/>
-                </a:solidFill>
-              </a:defRPr>
-            </a:pPr>
-            <a:r>
-              <a:t>MILESTONE 2: RECOMMENDATION ENGINE</a:t>
-            </a:r>
-          </a:p>
-          <a:p>
-            <a:pPr>
-              <a:defRPr sz="2400" b="1">
-                <a:solidFill>
-                  <a:srgbClr val="FFFFFF"/>
-                </a:solidFill>
-              </a:defRPr>
-            </a:pPr>
-            <a:r>
-              <a:t>Skill Gap Analysis &amp; Top-5 Career Ranking</a:t>
-            </a:r>
-          </a:p>
-        </p:txBody>
-      </p:sp>
-      <p:sp>
-        <p:nvSpPr>
-          <p:cNvPr id="4" name="Rounded Rectangle 3"/>
+          <p:cNvPr id="3" name="Rounded Rectangle 2"/>
           <p:cNvSpPr/>
           <p:nvPr/>
         </p:nvSpPr>
         <p:spPr>
           <a:xfrm>
-            <a:off x="731520" y="1554480"/>
-            <a:ext cx="6217920" cy="4846320"/>
+            <a:off x="731520" y="320040"/>
+            <a:ext cx="5029200" cy="292608"/>
           </a:xfrm>
           <a:prstGeom prst="roundRect">
             <a:avLst/>
           </a:prstGeom>
           <a:solidFill>
-            <a:srgbClr val="111827"/>
+            <a:srgbClr val="EFF6FF"/>
           </a:solidFill>
           <a:ln w="12700">
             <a:solidFill>
-              <a:srgbClr val="1F2937"/>
+              <a:srgbClr val="BFDBFE"/>
             </a:solidFill>
           </a:ln>
         </p:spPr>
@@ -6232,123 +8786,111 @@
           </a:fontRef>
         </p:style>
         <p:txBody>
-          <a:bodyPr rtlCol="0" anchor="ctr" wrap="square" tIns="274320" lIns="365760" rIns="365760"/>
+          <a:bodyPr rtlCol="0" anchor="ctr" tIns="36576" lIns="137160"/>
           <a:lstStyle/>
           <a:p>
             <a:pPr algn="ctr">
-              <a:spcAft>
-                <a:spcPts val="800"/>
-              </a:spcAft>
-              <a:defRPr sz="1200" b="1">
-                <a:solidFill>
-                  <a:srgbClr val="38BDF8"/>
+              <a:defRPr sz="850" b="1">
+                <a:solidFill>
+                  <a:srgbClr val="2563EB"/>
                 </a:solidFill>
               </a:defRPr>
             </a:pPr>
             <a:r>
-              <a:t>- Probabilistic Ranking Engine: </a:t>
-            </a:r>
-            <a:r>
-              <a:rPr b="0">
-                <a:solidFill>
-                  <a:srgbClr val="E2E8F0"/>
-                </a:solidFill>
-              </a:rPr>
-              <a:t>Outputs Top-5 ranked career trajectories with calibrated confidence scores (e.g., Data Scientist: 87.3%, Software Engineer: 4.1%).</a:t>
-            </a:r>
-          </a:p>
+              <a:t>MILESTONE 2 (WEEKS 3-4): RECOMMENDATION ENGINE</a:t>
+            </a:r>
+          </a:p>
+        </p:txBody>
+      </p:sp>
+      <p:sp>
+        <p:nvSpPr>
+          <p:cNvPr id="4" name="TextBox 3"/>
+          <p:cNvSpPr txBox="1"/>
+          <p:nvPr/>
+        </p:nvSpPr>
+        <p:spPr>
+          <a:xfrm>
+            <a:off x="731520" y="658368"/>
+            <a:ext cx="10728655" cy="594360"/>
+          </a:xfrm>
+          <a:prstGeom prst="rect">
+            <a:avLst/>
+          </a:prstGeom>
+          <a:noFill/>
+        </p:spPr>
+        <p:txBody>
+          <a:bodyPr wrap="square" lIns="0" tIns="0">
+            <a:spAutoFit/>
+          </a:bodyPr>
+          <a:lstStyle/>
           <a:p>
             <a:pPr>
-              <a:spcAft>
-                <a:spcPts val="800"/>
-              </a:spcAft>
-              <a:defRPr sz="1200" b="1">
-                <a:solidFill>
-                  <a:srgbClr val="38BDF8"/>
+              <a:defRPr sz="2200" b="1">
+                <a:solidFill>
+                  <a:srgbClr val="0F172A"/>
                 </a:solidFill>
               </a:defRPr>
             </a:pPr>
             <a:r>
-              <a:t>- Canonical Skill Profiling: </a:t>
-            </a:r>
-            <a:r>
-              <a:rPr b="0">
-                <a:solidFill>
-                  <a:srgbClr val="E2E8F0"/>
-                </a:solidFill>
-              </a:rPr>
-              <a:t>Maintains canonical skill vectors for target engineering roles based on live job market demand.</a:t>
-            </a:r>
-          </a:p>
+              <a:t>Skill Gap Intelligence &amp; Top-5 Career Ranking</a:t>
+            </a:r>
+          </a:p>
+        </p:txBody>
+      </p:sp>
+      <p:sp>
+        <p:nvSpPr>
+          <p:cNvPr id="5" name="TextBox 4"/>
+          <p:cNvSpPr txBox="1"/>
+          <p:nvPr/>
+        </p:nvSpPr>
+        <p:spPr>
+          <a:xfrm>
+            <a:off x="731520" y="1234440"/>
+            <a:ext cx="10728655" cy="320040"/>
+          </a:xfrm>
+          <a:prstGeom prst="rect">
+            <a:avLst/>
+          </a:prstGeom>
+          <a:noFill/>
+        </p:spPr>
+        <p:txBody>
+          <a:bodyPr wrap="square" lIns="0" tIns="0">
+            <a:spAutoFit/>
+          </a:bodyPr>
+          <a:lstStyle/>
           <a:p>
             <a:pPr>
-              <a:spcAft>
-                <a:spcPts val="800"/>
-              </a:spcAft>
-              <a:defRPr sz="1200" b="1">
-                <a:solidFill>
-                  <a:srgbClr val="38BDF8"/>
+              <a:defRPr sz="1200">
+                <a:solidFill>
+                  <a:srgbClr val="475569"/>
                 </a:solidFill>
               </a:defRPr>
             </a:pPr>
             <a:r>
-              <a:t>- Skill Gap Diagnostics: </a:t>
-            </a:r>
-            <a:r>
-              <a:rPr b="0">
-                <a:solidFill>
-                  <a:srgbClr val="E2E8F0"/>
-                </a:solidFill>
-              </a:rPr>
-              <a:t>Identifies verified competencies (e.g., Python, SQL, Deep Learning) vs. missing high-demand skills (e.g., Docker, Kubernetes, MLOps).</a:t>
-            </a:r>
-          </a:p>
-          <a:p>
-            <a:pPr>
-              <a:spcAft>
-                <a:spcPts val="800"/>
-              </a:spcAft>
-              <a:defRPr sz="1200" b="1">
-                <a:solidFill>
-                  <a:srgbClr val="38BDF8"/>
-                </a:solidFill>
-              </a:defRPr>
-            </a:pPr>
-            <a:r>
-              <a:t>- Actionable Learning Pathway: </a:t>
-            </a:r>
-            <a:r>
-              <a:rPr b="0">
-                <a:solidFill>
-                  <a:srgbClr val="E2E8F0"/>
-                </a:solidFill>
-              </a:rPr>
-              <a:t>Connects directly to the 'Learning Path' roadmap tab to guide students through missing milestones step-by-step.</a:t>
-            </a:r>
-          </a:p>
-        </p:txBody>
-      </p:sp>
-      <p:sp>
-        <p:nvSpPr>
-          <p:cNvPr id="5" name="Rounded Rectangle 4"/>
+              <a:t>Personalized Readiness Index &amp; Competency Gap Reports</a:t>
+            </a:r>
+          </a:p>
+        </p:txBody>
+      </p:sp>
+      <p:sp>
+        <p:nvSpPr>
+          <p:cNvPr id="6" name="Rectangle 5"/>
           <p:cNvSpPr/>
           <p:nvPr/>
         </p:nvSpPr>
         <p:spPr>
           <a:xfrm>
-            <a:off x="7132320" y="1554480"/>
-            <a:ext cx="4297680" cy="4846320"/>
-          </a:xfrm>
-          <a:prstGeom prst="roundRect">
-            <a:avLst/>
-          </a:prstGeom>
-          <a:solidFill>
-            <a:srgbClr val="111827"/>
-          </a:solidFill>
-          <a:ln w="12700">
-            <a:solidFill>
-              <a:srgbClr val="1F2937"/>
-            </a:solidFill>
+            <a:off x="731520" y="1572768"/>
+            <a:ext cx="10728655" cy="18288"/>
+          </a:xfrm>
+          <a:prstGeom prst="rect">
+            <a:avLst/>
+          </a:prstGeom>
+          <a:solidFill>
+            <a:srgbClr val="E2E8F0"/>
+          </a:solidFill>
+          <a:ln>
+            <a:noFill/>
           </a:ln>
         </p:spPr>
         <p:style>
@@ -6373,9 +8915,418 @@
           </a:p>
         </p:txBody>
       </p:sp>
+      <p:sp>
+        <p:nvSpPr>
+          <p:cNvPr id="7" name="Rounded Rectangle 6"/>
+          <p:cNvSpPr/>
+          <p:nvPr/>
+        </p:nvSpPr>
+        <p:spPr>
+          <a:xfrm>
+            <a:off x="731520" y="1719072"/>
+            <a:ext cx="5394960" cy="4754880"/>
+          </a:xfrm>
+          <a:prstGeom prst="roundRect">
+            <a:avLst/>
+          </a:prstGeom>
+          <a:solidFill>
+            <a:srgbClr val="F8FAFC"/>
+          </a:solidFill>
+          <a:ln w="12700">
+            <a:solidFill>
+              <a:srgbClr val="E2E8F0"/>
+            </a:solidFill>
+          </a:ln>
+        </p:spPr>
+        <p:style>
+          <a:lnRef idx="1">
+            <a:schemeClr val="accent1"/>
+          </a:lnRef>
+          <a:fillRef idx="3">
+            <a:schemeClr val="accent1"/>
+          </a:fillRef>
+          <a:effectRef idx="2">
+            <a:schemeClr val="accent1"/>
+          </a:effectRef>
+          <a:fontRef idx="minor">
+            <a:schemeClr val="lt1"/>
+          </a:fontRef>
+        </p:style>
+        <p:txBody>
+          <a:bodyPr rtlCol="0" anchor="ctr" wrap="square" tIns="274320" lIns="320040" rIns="320040"/>
+          <a:lstStyle/>
+          <a:p>
+            <a:pPr algn="ctr">
+              <a:spcAft>
+                <a:spcPts val="1000"/>
+              </a:spcAft>
+              <a:defRPr sz="1100" b="1">
+                <a:solidFill>
+                  <a:srgbClr val="2563EB"/>
+                </a:solidFill>
+              </a:defRPr>
+            </a:pPr>
+            <a:r>
+              <a:t>• Top-5 Career Ranking Engine: </a:t>
+            </a:r>
+            <a:r>
+              <a:rPr b="0">
+                <a:solidFill>
+                  <a:srgbClr val="1E293B"/>
+                </a:solidFill>
+              </a:rPr>
+              <a:t>Ranks candidate career paths by suitability score (e.g., Data Scientist: 87.3%, Software Engineer: 4.1%).</a:t>
+            </a:r>
+          </a:p>
+          <a:p>
+            <a:pPr>
+              <a:spcAft>
+                <a:spcPts val="1000"/>
+              </a:spcAft>
+              <a:defRPr sz="1100" b="1">
+                <a:solidFill>
+                  <a:srgbClr val="2563EB"/>
+                </a:solidFill>
+              </a:defRPr>
+            </a:pPr>
+            <a:r>
+              <a:t>• Canonical Skill Profiling: </a:t>
+            </a:r>
+            <a:r>
+              <a:rPr b="0">
+                <a:solidFill>
+                  <a:srgbClr val="1E293B"/>
+                </a:solidFill>
+              </a:rPr>
+              <a:t>Maintains target skill vectors based on live employer demand (Page 4).</a:t>
+            </a:r>
+          </a:p>
+          <a:p>
+            <a:pPr>
+              <a:spcAft>
+                <a:spcPts val="1000"/>
+              </a:spcAft>
+              <a:defRPr sz="1100" b="1">
+                <a:solidFill>
+                  <a:srgbClr val="2563EB"/>
+                </a:solidFill>
+              </a:defRPr>
+            </a:pPr>
+            <a:r>
+              <a:t>• Verified Skills (Green): </a:t>
+            </a:r>
+            <a:r>
+              <a:rPr b="0">
+                <a:solidFill>
+                  <a:srgbClr val="1E293B"/>
+                </a:solidFill>
+              </a:rPr>
+              <a:t>Identifies competencies the student already possesses (e.g., Python, SQL, Deep Learning, Statistics).</a:t>
+            </a:r>
+          </a:p>
+          <a:p>
+            <a:pPr>
+              <a:spcAft>
+                <a:spcPts val="1000"/>
+              </a:spcAft>
+              <a:defRPr sz="1100" b="1">
+                <a:solidFill>
+                  <a:srgbClr val="2563EB"/>
+                </a:solidFill>
+              </a:defRPr>
+            </a:pPr>
+            <a:r>
+              <a:t>• Missing Skills (Red): </a:t>
+            </a:r>
+            <a:r>
+              <a:rPr b="0">
+                <a:solidFill>
+                  <a:srgbClr val="1E293B"/>
+                </a:solidFill>
+              </a:rPr>
+              <a:t>Highlights critical gaps (e.g., Docker, Kubernetes, MLOps, Model Monitoring) needed for target roles.</a:t>
+            </a:r>
+          </a:p>
+          <a:p>
+            <a:pPr>
+              <a:spcAft>
+                <a:spcPts val="1000"/>
+              </a:spcAft>
+              <a:defRPr sz="1100" b="1">
+                <a:solidFill>
+                  <a:srgbClr val="2563EB"/>
+                </a:solidFill>
+              </a:defRPr>
+            </a:pPr>
+            <a:r>
+              <a:t>• Roadmap Integration: </a:t>
+            </a:r>
+            <a:r>
+              <a:rPr b="0">
+                <a:solidFill>
+                  <a:srgbClr val="1E293B"/>
+                </a:solidFill>
+              </a:rPr>
+              <a:t>Directly powers the "Learning Path" progression tree tab to guide student learning.</a:t>
+            </a:r>
+          </a:p>
+        </p:txBody>
+      </p:sp>
+      <p:sp>
+        <p:nvSpPr>
+          <p:cNvPr id="8" name="Rounded Rectangle 7"/>
+          <p:cNvSpPr/>
+          <p:nvPr/>
+        </p:nvSpPr>
+        <p:spPr>
+          <a:xfrm>
+            <a:off x="6355080" y="1719072"/>
+            <a:ext cx="5102352" cy="4754880"/>
+          </a:xfrm>
+          <a:prstGeom prst="roundRect">
+            <a:avLst/>
+          </a:prstGeom>
+          <a:solidFill>
+            <a:srgbClr val="F1F5F9"/>
+          </a:solidFill>
+          <a:ln w="12700">
+            <a:solidFill>
+              <a:srgbClr val="CBD5E1"/>
+            </a:solidFill>
+          </a:ln>
+        </p:spPr>
+        <p:style>
+          <a:lnRef idx="1">
+            <a:schemeClr val="accent1"/>
+          </a:lnRef>
+          <a:fillRef idx="3">
+            <a:schemeClr val="accent1"/>
+          </a:fillRef>
+          <a:effectRef idx="2">
+            <a:schemeClr val="accent1"/>
+          </a:effectRef>
+          <a:fontRef idx="minor">
+            <a:schemeClr val="lt1"/>
+          </a:fontRef>
+        </p:style>
+        <p:txBody>
+          <a:bodyPr rtlCol="0" anchor="ctr"/>
+          <a:lstStyle/>
+          <a:p>
+            <a:pPr algn="ctr"/>
+          </a:p>
+        </p:txBody>
+      </p:sp>
+      <p:sp>
+        <p:nvSpPr>
+          <p:cNvPr id="9" name="Rectangle 8"/>
+          <p:cNvSpPr/>
+          <p:nvPr/>
+        </p:nvSpPr>
+        <p:spPr>
+          <a:xfrm>
+            <a:off x="6355080" y="1719072"/>
+            <a:ext cx="5102352" cy="320040"/>
+          </a:xfrm>
+          <a:prstGeom prst="rect">
+            <a:avLst/>
+          </a:prstGeom>
+          <a:solidFill>
+            <a:srgbClr val="E2E8F0"/>
+          </a:solidFill>
+          <a:ln>
+            <a:noFill/>
+          </a:ln>
+        </p:spPr>
+        <p:style>
+          <a:lnRef idx="1">
+            <a:schemeClr val="accent1"/>
+          </a:lnRef>
+          <a:fillRef idx="3">
+            <a:schemeClr val="accent1"/>
+          </a:fillRef>
+          <a:effectRef idx="2">
+            <a:schemeClr val="accent1"/>
+          </a:effectRef>
+          <a:fontRef idx="minor">
+            <a:schemeClr val="lt1"/>
+          </a:fontRef>
+        </p:style>
+        <p:txBody>
+          <a:bodyPr rtlCol="0" anchor="ctr"/>
+          <a:lstStyle/>
+          <a:p>
+            <a:pPr algn="ctr"/>
+          </a:p>
+        </p:txBody>
+      </p:sp>
+      <p:sp>
+        <p:nvSpPr>
+          <p:cNvPr id="10" name="Oval 9"/>
+          <p:cNvSpPr/>
+          <p:nvPr/>
+        </p:nvSpPr>
+        <p:spPr>
+          <a:xfrm>
+            <a:off x="6492240" y="1819656"/>
+            <a:ext cx="109728" cy="109728"/>
+          </a:xfrm>
+          <a:prstGeom prst="ellipse">
+            <a:avLst/>
+          </a:prstGeom>
+          <a:solidFill>
+            <a:srgbClr val="EF4444"/>
+          </a:solidFill>
+          <a:ln>
+            <a:noFill/>
+          </a:ln>
+        </p:spPr>
+        <p:style>
+          <a:lnRef idx="1">
+            <a:schemeClr val="accent1"/>
+          </a:lnRef>
+          <a:fillRef idx="3">
+            <a:schemeClr val="accent1"/>
+          </a:fillRef>
+          <a:effectRef idx="2">
+            <a:schemeClr val="accent1"/>
+          </a:effectRef>
+          <a:fontRef idx="minor">
+            <a:schemeClr val="lt1"/>
+          </a:fontRef>
+        </p:style>
+        <p:txBody>
+          <a:bodyPr rtlCol="0" anchor="ctr"/>
+          <a:lstStyle/>
+          <a:p>
+            <a:pPr algn="ctr"/>
+          </a:p>
+        </p:txBody>
+      </p:sp>
+      <p:sp>
+        <p:nvSpPr>
+          <p:cNvPr id="11" name="Oval 10"/>
+          <p:cNvSpPr/>
+          <p:nvPr/>
+        </p:nvSpPr>
+        <p:spPr>
+          <a:xfrm>
+            <a:off x="6638544" y="1819656"/>
+            <a:ext cx="109728" cy="109728"/>
+          </a:xfrm>
+          <a:prstGeom prst="ellipse">
+            <a:avLst/>
+          </a:prstGeom>
+          <a:solidFill>
+            <a:srgbClr val="F59E0B"/>
+          </a:solidFill>
+          <a:ln>
+            <a:noFill/>
+          </a:ln>
+        </p:spPr>
+        <p:style>
+          <a:lnRef idx="1">
+            <a:schemeClr val="accent1"/>
+          </a:lnRef>
+          <a:fillRef idx="3">
+            <a:schemeClr val="accent1"/>
+          </a:fillRef>
+          <a:effectRef idx="2">
+            <a:schemeClr val="accent1"/>
+          </a:effectRef>
+          <a:fontRef idx="minor">
+            <a:schemeClr val="lt1"/>
+          </a:fontRef>
+        </p:style>
+        <p:txBody>
+          <a:bodyPr rtlCol="0" anchor="ctr"/>
+          <a:lstStyle/>
+          <a:p>
+            <a:pPr algn="ctr"/>
+          </a:p>
+        </p:txBody>
+      </p:sp>
+      <p:sp>
+        <p:nvSpPr>
+          <p:cNvPr id="12" name="Oval 11"/>
+          <p:cNvSpPr/>
+          <p:nvPr/>
+        </p:nvSpPr>
+        <p:spPr>
+          <a:xfrm>
+            <a:off x="6784848" y="1819656"/>
+            <a:ext cx="109728" cy="109728"/>
+          </a:xfrm>
+          <a:prstGeom prst="ellipse">
+            <a:avLst/>
+          </a:prstGeom>
+          <a:solidFill>
+            <a:srgbClr val="10B981"/>
+          </a:solidFill>
+          <a:ln>
+            <a:noFill/>
+          </a:ln>
+        </p:spPr>
+        <p:style>
+          <a:lnRef idx="1">
+            <a:schemeClr val="accent1"/>
+          </a:lnRef>
+          <a:fillRef idx="3">
+            <a:schemeClr val="accent1"/>
+          </a:fillRef>
+          <a:effectRef idx="2">
+            <a:schemeClr val="accent1"/>
+          </a:effectRef>
+          <a:fontRef idx="minor">
+            <a:schemeClr val="lt1"/>
+          </a:fontRef>
+        </p:style>
+        <p:txBody>
+          <a:bodyPr rtlCol="0" anchor="ctr"/>
+          <a:lstStyle/>
+          <a:p>
+            <a:pPr algn="ctr"/>
+          </a:p>
+        </p:txBody>
+      </p:sp>
+      <p:sp>
+        <p:nvSpPr>
+          <p:cNvPr id="13" name="TextBox 12"/>
+          <p:cNvSpPr txBox="1"/>
+          <p:nvPr/>
+        </p:nvSpPr>
+        <p:spPr>
+          <a:xfrm>
+            <a:off x="6995160" y="1755648"/>
+            <a:ext cx="4370832" cy="256032"/>
+          </a:xfrm>
+          <a:prstGeom prst="rect">
+            <a:avLst/>
+          </a:prstGeom>
+          <a:noFill/>
+        </p:spPr>
+        <p:txBody>
+          <a:bodyPr wrap="none" lIns="0" tIns="0">
+            <a:spAutoFit/>
+          </a:bodyPr>
+          <a:lstStyle/>
+          <a:p>
+            <a:pPr>
+              <a:defRPr sz="850">
+                <a:solidFill>
+                  <a:srgbClr val="475569"/>
+                </a:solidFill>
+              </a:defRPr>
+            </a:pPr>
+            <a:r>
+              <a:t>Live Skill Analysis Tab with Verified vs Missing Skill Gap Cards</a:t>
+            </a:r>
+          </a:p>
+        </p:txBody>
+      </p:sp>
       <p:pic>
         <p:nvPicPr>
-          <p:cNvPr id="6" name="Picture 5" descr="chart_skill_gap.png"/>
+          <p:cNvPr id="14" name="Picture 13" descr="shot_skill_analysis.png"/>
           <p:cNvPicPr>
             <a:picLocks noChangeAspect="1"/>
           </p:cNvPicPr>
@@ -6389,8 +9340,8 @@
         </p:blipFill>
         <p:spPr>
           <a:xfrm>
-            <a:off x="7315200" y="2103120"/>
-            <a:ext cx="3931920" cy="2419643"/>
+            <a:off x="6355080" y="2039112"/>
+            <a:ext cx="5102352" cy="4434840"/>
           </a:xfrm>
           <a:prstGeom prst="rect">
             <a:avLst/>
@@ -6430,7 +9381,7 @@
             <a:avLst/>
           </a:prstGeom>
           <a:solidFill>
-            <a:srgbClr val="0B0F19"/>
+            <a:srgbClr val="FFFFFF"/>
           </a:solidFill>
           <a:ln>
             <a:noFill/>
@@ -6460,74 +9411,24 @@
       </p:sp>
       <p:sp>
         <p:nvSpPr>
-          <p:cNvPr id="3" name="TextBox 2"/>
-          <p:cNvSpPr txBox="1"/>
-          <p:nvPr/>
-        </p:nvSpPr>
-        <p:spPr>
-          <a:xfrm>
-            <a:off x="731520" y="365760"/>
-            <a:ext cx="10728655" cy="1097280"/>
-          </a:xfrm>
-          <a:prstGeom prst="rect">
-            <a:avLst/>
-          </a:prstGeom>
-          <a:noFill/>
-        </p:spPr>
-        <p:txBody>
-          <a:bodyPr wrap="square">
-            <a:spAutoFit/>
-          </a:bodyPr>
-          <a:lstStyle/>
-          <a:p>
-            <a:pPr>
-              <a:spcAft>
-                <a:spcPts val="400"/>
-              </a:spcAft>
-              <a:defRPr sz="1000" b="1">
-                <a:solidFill>
-                  <a:srgbClr val="38BDF8"/>
-                </a:solidFill>
-              </a:defRPr>
-            </a:pPr>
-            <a:r>
-              <a:t>PERSISTENCE &amp; SECURITY: SUPABASE POSTGRESQL</a:t>
-            </a:r>
-          </a:p>
-          <a:p>
-            <a:pPr>
-              <a:defRPr sz="2400" b="1">
-                <a:solidFill>
-                  <a:srgbClr val="FFFFFF"/>
-                </a:solidFill>
-              </a:defRPr>
-            </a:pPr>
-            <a:r>
-              <a:t>Cloud Database Integration &amp; Data Schema</a:t>
-            </a:r>
-          </a:p>
-        </p:txBody>
-      </p:sp>
-      <p:sp>
-        <p:nvSpPr>
-          <p:cNvPr id="4" name="Rounded Rectangle 3"/>
+          <p:cNvPr id="3" name="Rounded Rectangle 2"/>
           <p:cNvSpPr/>
           <p:nvPr/>
         </p:nvSpPr>
         <p:spPr>
           <a:xfrm>
-            <a:off x="731520" y="1554480"/>
-            <a:ext cx="6217920" cy="4846320"/>
+            <a:off x="731520" y="320040"/>
+            <a:ext cx="5029200" cy="292608"/>
           </a:xfrm>
           <a:prstGeom prst="roundRect">
             <a:avLst/>
           </a:prstGeom>
           <a:solidFill>
-            <a:srgbClr val="111827"/>
+            <a:srgbClr val="EFF6FF"/>
           </a:solidFill>
           <a:ln w="12700">
             <a:solidFill>
-              <a:srgbClr val="1F2937"/>
+              <a:srgbClr val="BFDBFE"/>
             </a:solidFill>
           </a:ln>
         </p:spPr>
@@ -6546,123 +9447,111 @@
           </a:fontRef>
         </p:style>
         <p:txBody>
-          <a:bodyPr rtlCol="0" anchor="ctr" wrap="square" tIns="274320" lIns="365760" rIns="365760"/>
+          <a:bodyPr rtlCol="0" anchor="ctr" tIns="36576" lIns="137160"/>
           <a:lstStyle/>
           <a:p>
             <a:pPr algn="ctr">
-              <a:spcAft>
-                <a:spcPts val="800"/>
-              </a:spcAft>
-              <a:defRPr sz="1200" b="1">
-                <a:solidFill>
-                  <a:srgbClr val="38BDF8"/>
+              <a:defRPr sz="850" b="1">
+                <a:solidFill>
+                  <a:srgbClr val="2563EB"/>
                 </a:solidFill>
               </a:defRPr>
             </a:pPr>
             <a:r>
-              <a:t>- PostgreSQL Database Schema: </a:t>
-            </a:r>
-            <a:r>
-              <a:rPr b="0">
-                <a:solidFill>
-                  <a:srgbClr val="E2E8F0"/>
-                </a:solidFill>
-              </a:rPr>
-              <a:t>Created 3 relational tables in Supabase: public.profiles, public.resumes, and public.predictions matching Page 8 specifications.</a:t>
-            </a:r>
-          </a:p>
+              <a:t>DATA PERSISTENCE &amp; SECURITY</a:t>
+            </a:r>
+          </a:p>
+        </p:txBody>
+      </p:sp>
+      <p:sp>
+        <p:nvSpPr>
+          <p:cNvPr id="4" name="TextBox 3"/>
+          <p:cNvSpPr txBox="1"/>
+          <p:nvPr/>
+        </p:nvSpPr>
+        <p:spPr>
+          <a:xfrm>
+            <a:off x="731520" y="658368"/>
+            <a:ext cx="10728655" cy="594360"/>
+          </a:xfrm>
+          <a:prstGeom prst="rect">
+            <a:avLst/>
+          </a:prstGeom>
+          <a:noFill/>
+        </p:spPr>
+        <p:txBody>
+          <a:bodyPr wrap="square" lIns="0" tIns="0">
+            <a:spAutoFit/>
+          </a:bodyPr>
+          <a:lstStyle/>
           <a:p>
             <a:pPr>
-              <a:spcAft>
-                <a:spcPts val="800"/>
-              </a:spcAft>
-              <a:defRPr sz="1200" b="1">
-                <a:solidFill>
-                  <a:srgbClr val="38BDF8"/>
+              <a:defRPr sz="2200" b="1">
+                <a:solidFill>
+                  <a:srgbClr val="0F172A"/>
                 </a:solidFill>
               </a:defRPr>
             </a:pPr>
             <a:r>
-              <a:t>- Automatic Ingestion Triggers: </a:t>
-            </a:r>
-            <a:r>
-              <a:rPr b="0">
-                <a:solidFill>
-                  <a:srgbClr val="E2E8F0"/>
-                </a:solidFill>
-              </a:rPr>
-              <a:t>When a student registers, an automatic PostgreSQL trigger (on_auth_user_created) instantiates their candidate profile.</a:t>
-            </a:r>
-          </a:p>
+              <a:t>Supabase PostgreSQL Cloud Database Integration</a:t>
+            </a:r>
+          </a:p>
+        </p:txBody>
+      </p:sp>
+      <p:sp>
+        <p:nvSpPr>
+          <p:cNvPr id="5" name="TextBox 4"/>
+          <p:cNvSpPr txBox="1"/>
+          <p:nvPr/>
+        </p:nvSpPr>
+        <p:spPr>
+          <a:xfrm>
+            <a:off x="731520" y="1234440"/>
+            <a:ext cx="10728655" cy="320040"/>
+          </a:xfrm>
+          <a:prstGeom prst="rect">
+            <a:avLst/>
+          </a:prstGeom>
+          <a:noFill/>
+        </p:spPr>
+        <p:txBody>
+          <a:bodyPr wrap="square" lIns="0" tIns="0">
+            <a:spAutoFit/>
+          </a:bodyPr>
+          <a:lstStyle/>
           <a:p>
             <a:pPr>
-              <a:spcAft>
-                <a:spcPts val="800"/>
-              </a:spcAft>
-              <a:defRPr sz="1200" b="1">
-                <a:solidFill>
-                  <a:srgbClr val="38BDF8"/>
+              <a:defRPr sz="1200">
+                <a:solidFill>
+                  <a:srgbClr val="475569"/>
                 </a:solidFill>
               </a:defRPr>
             </a:pPr>
             <a:r>
-              <a:t>- Row Level Security (RLS): </a:t>
-            </a:r>
-            <a:r>
-              <a:rPr b="0">
-                <a:solidFill>
-                  <a:srgbClr val="E2E8F0"/>
-                </a:solidFill>
-              </a:rPr>
-              <a:t>Strict data privacy policies ensure that students can only access, view, and modify their own records.</a:t>
-            </a:r>
-          </a:p>
-          <a:p>
-            <a:pPr>
-              <a:spcAft>
-                <a:spcPts val="800"/>
-              </a:spcAft>
-              <a:defRPr sz="1200" b="1">
-                <a:solidFill>
-                  <a:srgbClr val="38BDF8"/>
-                </a:solidFill>
-              </a:defRPr>
-            </a:pPr>
-            <a:r>
-              <a:t>- Real-Time UI Synchronization: </a:t>
-            </a:r>
-            <a:r>
-              <a:rPr b="0">
-                <a:solidFill>
-                  <a:srgbClr val="E2E8F0"/>
-                </a:solidFill>
-              </a:rPr>
-              <a:t>The web dashboard automatically synchronizes profile updates, resume upload history, and past prediction logs to the cloud.</a:t>
-            </a:r>
-          </a:p>
-        </p:txBody>
-      </p:sp>
-      <p:sp>
-        <p:nvSpPr>
-          <p:cNvPr id="5" name="Rounded Rectangle 4"/>
+              <a:t>Secure Relational Data Storage with Row Level Security (RLS)</a:t>
+            </a:r>
+          </a:p>
+        </p:txBody>
+      </p:sp>
+      <p:sp>
+        <p:nvSpPr>
+          <p:cNvPr id="6" name="Rectangle 5"/>
           <p:cNvSpPr/>
           <p:nvPr/>
         </p:nvSpPr>
         <p:spPr>
           <a:xfrm>
-            <a:off x="7132320" y="1554480"/>
-            <a:ext cx="4297680" cy="4846320"/>
-          </a:xfrm>
-          <a:prstGeom prst="roundRect">
-            <a:avLst/>
-          </a:prstGeom>
-          <a:solidFill>
-            <a:srgbClr val="111827"/>
-          </a:solidFill>
-          <a:ln w="12700">
-            <a:solidFill>
-              <a:srgbClr val="1F2937"/>
-            </a:solidFill>
+            <a:off x="731520" y="1572768"/>
+            <a:ext cx="10728655" cy="18288"/>
+          </a:xfrm>
+          <a:prstGeom prst="rect">
+            <a:avLst/>
+          </a:prstGeom>
+          <a:solidFill>
+            <a:srgbClr val="E2E8F0"/>
+          </a:solidFill>
+          <a:ln>
+            <a:noFill/>
           </a:ln>
         </p:spPr>
         <p:style>
@@ -6687,9 +9576,418 @@
           </a:p>
         </p:txBody>
       </p:sp>
+      <p:sp>
+        <p:nvSpPr>
+          <p:cNvPr id="7" name="Rounded Rectangle 6"/>
+          <p:cNvSpPr/>
+          <p:nvPr/>
+        </p:nvSpPr>
+        <p:spPr>
+          <a:xfrm>
+            <a:off x="731520" y="1719072"/>
+            <a:ext cx="5394960" cy="4754880"/>
+          </a:xfrm>
+          <a:prstGeom prst="roundRect">
+            <a:avLst/>
+          </a:prstGeom>
+          <a:solidFill>
+            <a:srgbClr val="F8FAFC"/>
+          </a:solidFill>
+          <a:ln w="12700">
+            <a:solidFill>
+              <a:srgbClr val="E2E8F0"/>
+            </a:solidFill>
+          </a:ln>
+        </p:spPr>
+        <p:style>
+          <a:lnRef idx="1">
+            <a:schemeClr val="accent1"/>
+          </a:lnRef>
+          <a:fillRef idx="3">
+            <a:schemeClr val="accent1"/>
+          </a:fillRef>
+          <a:effectRef idx="2">
+            <a:schemeClr val="accent1"/>
+          </a:effectRef>
+          <a:fontRef idx="minor">
+            <a:schemeClr val="lt1"/>
+          </a:fontRef>
+        </p:style>
+        <p:txBody>
+          <a:bodyPr rtlCol="0" anchor="ctr" wrap="square" tIns="274320" lIns="320040" rIns="320040"/>
+          <a:lstStyle/>
+          <a:p>
+            <a:pPr algn="ctr">
+              <a:spcAft>
+                <a:spcPts val="1000"/>
+              </a:spcAft>
+              <a:defRPr sz="1100" b="1">
+                <a:solidFill>
+                  <a:srgbClr val="2563EB"/>
+                </a:solidFill>
+              </a:defRPr>
+            </a:pPr>
+            <a:r>
+              <a:t>• 3 Relational Tables (Page 8): </a:t>
+            </a:r>
+            <a:r>
+              <a:rPr b="0">
+                <a:solidFill>
+                  <a:srgbClr val="1E293B"/>
+                </a:solidFill>
+              </a:rPr>
+              <a:t>Created public.profiles, public.resumes, and public.predictions matching project schema.</a:t>
+            </a:r>
+          </a:p>
+          <a:p>
+            <a:pPr>
+              <a:spcAft>
+                <a:spcPts val="1000"/>
+              </a:spcAft>
+              <a:defRPr sz="1100" b="1">
+                <a:solidFill>
+                  <a:srgbClr val="2563EB"/>
+                </a:solidFill>
+              </a:defRPr>
+            </a:pPr>
+            <a:r>
+              <a:t>• Automated Account Triggers: </a:t>
+            </a:r>
+            <a:r>
+              <a:rPr b="0">
+                <a:solidFill>
+                  <a:srgbClr val="1E293B"/>
+                </a:solidFill>
+              </a:rPr>
+              <a:t>PostgreSQL trigger (on_auth_user_created) instantiates student profile immediately upon registration.</a:t>
+            </a:r>
+          </a:p>
+          <a:p>
+            <a:pPr>
+              <a:spcAft>
+                <a:spcPts val="1000"/>
+              </a:spcAft>
+              <a:defRPr sz="1100" b="1">
+                <a:solidFill>
+                  <a:srgbClr val="2563EB"/>
+                </a:solidFill>
+              </a:defRPr>
+            </a:pPr>
+            <a:r>
+              <a:t>• Row Level Security (RLS): </a:t>
+            </a:r>
+            <a:r>
+              <a:rPr b="0">
+                <a:solidFill>
+                  <a:srgbClr val="1E293B"/>
+                </a:solidFill>
+              </a:rPr>
+              <a:t>Strict security policies guarantee that students can only access, view, and modify their own records.</a:t>
+            </a:r>
+          </a:p>
+          <a:p>
+            <a:pPr>
+              <a:spcAft>
+                <a:spcPts val="1000"/>
+              </a:spcAft>
+              <a:defRPr sz="1100" b="1">
+                <a:solidFill>
+                  <a:srgbClr val="2563EB"/>
+                </a:solidFill>
+              </a:defRPr>
+            </a:pPr>
+            <a:r>
+              <a:t>• Live Real-Time Synchronization: </a:t>
+            </a:r>
+            <a:r>
+              <a:rPr b="0">
+                <a:solidFill>
+                  <a:srgbClr val="1E293B"/>
+                </a:solidFill>
+              </a:rPr>
+              <a:t>Saves profile edits, resume uploads, and prediction logs directly into the cloud database.</a:t>
+            </a:r>
+          </a:p>
+          <a:p>
+            <a:pPr>
+              <a:spcAft>
+                <a:spcPts val="1000"/>
+              </a:spcAft>
+              <a:defRPr sz="1100" b="1">
+                <a:solidFill>
+                  <a:srgbClr val="2563EB"/>
+                </a:solidFill>
+              </a:defRPr>
+            </a:pPr>
+            <a:r>
+              <a:t>• Database Health Monitor: </a:t>
+            </a:r>
+            <a:r>
+              <a:rPr b="0">
+                <a:solidFill>
+                  <a:srgbClr val="1E293B"/>
+                </a:solidFill>
+              </a:rPr>
+              <a:t>Live settings tab displays real-time connection status and record counters.</a:t>
+            </a:r>
+          </a:p>
+        </p:txBody>
+      </p:sp>
+      <p:sp>
+        <p:nvSpPr>
+          <p:cNvPr id="8" name="Rounded Rectangle 7"/>
+          <p:cNvSpPr/>
+          <p:nvPr/>
+        </p:nvSpPr>
+        <p:spPr>
+          <a:xfrm>
+            <a:off x="6355080" y="1719072"/>
+            <a:ext cx="5102352" cy="4754880"/>
+          </a:xfrm>
+          <a:prstGeom prst="roundRect">
+            <a:avLst/>
+          </a:prstGeom>
+          <a:solidFill>
+            <a:srgbClr val="F1F5F9"/>
+          </a:solidFill>
+          <a:ln w="12700">
+            <a:solidFill>
+              <a:srgbClr val="CBD5E1"/>
+            </a:solidFill>
+          </a:ln>
+        </p:spPr>
+        <p:style>
+          <a:lnRef idx="1">
+            <a:schemeClr val="accent1"/>
+          </a:lnRef>
+          <a:fillRef idx="3">
+            <a:schemeClr val="accent1"/>
+          </a:fillRef>
+          <a:effectRef idx="2">
+            <a:schemeClr val="accent1"/>
+          </a:effectRef>
+          <a:fontRef idx="minor">
+            <a:schemeClr val="lt1"/>
+          </a:fontRef>
+        </p:style>
+        <p:txBody>
+          <a:bodyPr rtlCol="0" anchor="ctr"/>
+          <a:lstStyle/>
+          <a:p>
+            <a:pPr algn="ctr"/>
+          </a:p>
+        </p:txBody>
+      </p:sp>
+      <p:sp>
+        <p:nvSpPr>
+          <p:cNvPr id="9" name="Rectangle 8"/>
+          <p:cNvSpPr/>
+          <p:nvPr/>
+        </p:nvSpPr>
+        <p:spPr>
+          <a:xfrm>
+            <a:off x="6355080" y="1719072"/>
+            <a:ext cx="5102352" cy="320040"/>
+          </a:xfrm>
+          <a:prstGeom prst="rect">
+            <a:avLst/>
+          </a:prstGeom>
+          <a:solidFill>
+            <a:srgbClr val="E2E8F0"/>
+          </a:solidFill>
+          <a:ln>
+            <a:noFill/>
+          </a:ln>
+        </p:spPr>
+        <p:style>
+          <a:lnRef idx="1">
+            <a:schemeClr val="accent1"/>
+          </a:lnRef>
+          <a:fillRef idx="3">
+            <a:schemeClr val="accent1"/>
+          </a:fillRef>
+          <a:effectRef idx="2">
+            <a:schemeClr val="accent1"/>
+          </a:effectRef>
+          <a:fontRef idx="minor">
+            <a:schemeClr val="lt1"/>
+          </a:fontRef>
+        </p:style>
+        <p:txBody>
+          <a:bodyPr rtlCol="0" anchor="ctr"/>
+          <a:lstStyle/>
+          <a:p>
+            <a:pPr algn="ctr"/>
+          </a:p>
+        </p:txBody>
+      </p:sp>
+      <p:sp>
+        <p:nvSpPr>
+          <p:cNvPr id="10" name="Oval 9"/>
+          <p:cNvSpPr/>
+          <p:nvPr/>
+        </p:nvSpPr>
+        <p:spPr>
+          <a:xfrm>
+            <a:off x="6492240" y="1819656"/>
+            <a:ext cx="109728" cy="109728"/>
+          </a:xfrm>
+          <a:prstGeom prst="ellipse">
+            <a:avLst/>
+          </a:prstGeom>
+          <a:solidFill>
+            <a:srgbClr val="EF4444"/>
+          </a:solidFill>
+          <a:ln>
+            <a:noFill/>
+          </a:ln>
+        </p:spPr>
+        <p:style>
+          <a:lnRef idx="1">
+            <a:schemeClr val="accent1"/>
+          </a:lnRef>
+          <a:fillRef idx="3">
+            <a:schemeClr val="accent1"/>
+          </a:fillRef>
+          <a:effectRef idx="2">
+            <a:schemeClr val="accent1"/>
+          </a:effectRef>
+          <a:fontRef idx="minor">
+            <a:schemeClr val="lt1"/>
+          </a:fontRef>
+        </p:style>
+        <p:txBody>
+          <a:bodyPr rtlCol="0" anchor="ctr"/>
+          <a:lstStyle/>
+          <a:p>
+            <a:pPr algn="ctr"/>
+          </a:p>
+        </p:txBody>
+      </p:sp>
+      <p:sp>
+        <p:nvSpPr>
+          <p:cNvPr id="11" name="Oval 10"/>
+          <p:cNvSpPr/>
+          <p:nvPr/>
+        </p:nvSpPr>
+        <p:spPr>
+          <a:xfrm>
+            <a:off x="6638544" y="1819656"/>
+            <a:ext cx="109728" cy="109728"/>
+          </a:xfrm>
+          <a:prstGeom prst="ellipse">
+            <a:avLst/>
+          </a:prstGeom>
+          <a:solidFill>
+            <a:srgbClr val="F59E0B"/>
+          </a:solidFill>
+          <a:ln>
+            <a:noFill/>
+          </a:ln>
+        </p:spPr>
+        <p:style>
+          <a:lnRef idx="1">
+            <a:schemeClr val="accent1"/>
+          </a:lnRef>
+          <a:fillRef idx="3">
+            <a:schemeClr val="accent1"/>
+          </a:fillRef>
+          <a:effectRef idx="2">
+            <a:schemeClr val="accent1"/>
+          </a:effectRef>
+          <a:fontRef idx="minor">
+            <a:schemeClr val="lt1"/>
+          </a:fontRef>
+        </p:style>
+        <p:txBody>
+          <a:bodyPr rtlCol="0" anchor="ctr"/>
+          <a:lstStyle/>
+          <a:p>
+            <a:pPr algn="ctr"/>
+          </a:p>
+        </p:txBody>
+      </p:sp>
+      <p:sp>
+        <p:nvSpPr>
+          <p:cNvPr id="12" name="Oval 11"/>
+          <p:cNvSpPr/>
+          <p:nvPr/>
+        </p:nvSpPr>
+        <p:spPr>
+          <a:xfrm>
+            <a:off x="6784848" y="1819656"/>
+            <a:ext cx="109728" cy="109728"/>
+          </a:xfrm>
+          <a:prstGeom prst="ellipse">
+            <a:avLst/>
+          </a:prstGeom>
+          <a:solidFill>
+            <a:srgbClr val="10B981"/>
+          </a:solidFill>
+          <a:ln>
+            <a:noFill/>
+          </a:ln>
+        </p:spPr>
+        <p:style>
+          <a:lnRef idx="1">
+            <a:schemeClr val="accent1"/>
+          </a:lnRef>
+          <a:fillRef idx="3">
+            <a:schemeClr val="accent1"/>
+          </a:fillRef>
+          <a:effectRef idx="2">
+            <a:schemeClr val="accent1"/>
+          </a:effectRef>
+          <a:fontRef idx="minor">
+            <a:schemeClr val="lt1"/>
+          </a:fontRef>
+        </p:style>
+        <p:txBody>
+          <a:bodyPr rtlCol="0" anchor="ctr"/>
+          <a:lstStyle/>
+          <a:p>
+            <a:pPr algn="ctr"/>
+          </a:p>
+        </p:txBody>
+      </p:sp>
+      <p:sp>
+        <p:nvSpPr>
+          <p:cNvPr id="13" name="TextBox 12"/>
+          <p:cNvSpPr txBox="1"/>
+          <p:nvPr/>
+        </p:nvSpPr>
+        <p:spPr>
+          <a:xfrm>
+            <a:off x="6995160" y="1755648"/>
+            <a:ext cx="4370832" cy="256032"/>
+          </a:xfrm>
+          <a:prstGeom prst="rect">
+            <a:avLst/>
+          </a:prstGeom>
+          <a:noFill/>
+        </p:spPr>
+        <p:txBody>
+          <a:bodyPr wrap="none" lIns="0" tIns="0">
+            <a:spAutoFit/>
+          </a:bodyPr>
+          <a:lstStyle/>
+          <a:p>
+            <a:pPr>
+              <a:defRPr sz="850">
+                <a:solidFill>
+                  <a:srgbClr val="475569"/>
+                </a:solidFill>
+              </a:defRPr>
+            </a:pPr>
+            <a:r>
+              <a:t>Live Settings Tab showing Connected Supabase PostgreSQL Status</a:t>
+            </a:r>
+          </a:p>
+        </p:txBody>
+      </p:sp>
       <p:pic>
         <p:nvPicPr>
-          <p:cNvPr id="6" name="Picture 5" descr="chart_ner_flow.png"/>
+          <p:cNvPr id="14" name="Picture 13" descr="shot_settings.png"/>
           <p:cNvPicPr>
             <a:picLocks noChangeAspect="1"/>
           </p:cNvPicPr>
@@ -6703,8 +10001,8 @@
         </p:blipFill>
         <p:spPr>
           <a:xfrm>
-            <a:off x="7315200" y="2103120"/>
-            <a:ext cx="3931920" cy="1685109"/>
+            <a:off x="6355080" y="2039112"/>
+            <a:ext cx="5102352" cy="4434840"/>
           </a:xfrm>
           <a:prstGeom prst="rect">
             <a:avLst/>
@@ -6744,7 +10042,7 @@
             <a:avLst/>
           </a:prstGeom>
           <a:solidFill>
-            <a:srgbClr val="0B0F19"/>
+            <a:srgbClr val="FFFFFF"/>
           </a:solidFill>
           <a:ln>
             <a:noFill/>
@@ -6774,74 +10072,24 @@
       </p:sp>
       <p:sp>
         <p:nvSpPr>
-          <p:cNvPr id="3" name="TextBox 2"/>
-          <p:cNvSpPr txBox="1"/>
-          <p:nvPr/>
-        </p:nvSpPr>
-        <p:spPr>
-          <a:xfrm>
-            <a:off x="731520" y="365760"/>
-            <a:ext cx="10728655" cy="1097280"/>
-          </a:xfrm>
-          <a:prstGeom prst="rect">
-            <a:avLst/>
-          </a:prstGeom>
-          <a:noFill/>
-        </p:spPr>
-        <p:txBody>
-          <a:bodyPr wrap="square">
-            <a:spAutoFit/>
-          </a:bodyPr>
-          <a:lstStyle/>
-          <a:p>
-            <a:pPr>
-              <a:spcAft>
-                <a:spcPts val="400"/>
-              </a:spcAft>
-              <a:defRPr sz="1000" b="1">
-                <a:solidFill>
-                  <a:srgbClr val="38BDF8"/>
-                </a:solidFill>
-              </a:defRPr>
-            </a:pPr>
-            <a:r>
-              <a:t>UI/UX FIDELITY: FACULTY REFERENCE DESIGN</a:t>
-            </a:r>
-          </a:p>
-          <a:p>
-            <a:pPr>
-              <a:defRPr sz="2400" b="1">
-                <a:solidFill>
-                  <a:srgbClr val="FFFFFF"/>
-                </a:solidFill>
-              </a:defRPr>
-            </a:pPr>
-            <a:r>
-              <a:t>Dashboard Design Matching Teacher Reference</a:t>
-            </a:r>
-          </a:p>
-        </p:txBody>
-      </p:sp>
-      <p:sp>
-        <p:nvSpPr>
-          <p:cNvPr id="4" name="Rounded Rectangle 3"/>
+          <p:cNvPr id="3" name="Rounded Rectangle 2"/>
           <p:cNvSpPr/>
           <p:nvPr/>
         </p:nvSpPr>
         <p:spPr>
           <a:xfrm>
-            <a:off x="731520" y="1554480"/>
-            <a:ext cx="6217920" cy="4846320"/>
+            <a:off x="731520" y="320040"/>
+            <a:ext cx="5029200" cy="292608"/>
           </a:xfrm>
           <a:prstGeom prst="roundRect">
             <a:avLst/>
           </a:prstGeom>
           <a:solidFill>
-            <a:srgbClr val="111827"/>
+            <a:srgbClr val="EFF6FF"/>
           </a:solidFill>
           <a:ln w="12700">
             <a:solidFill>
-              <a:srgbClr val="1F2937"/>
+              <a:srgbClr val="BFDBFE"/>
             </a:solidFill>
           </a:ln>
         </p:spPr>
@@ -6860,123 +10108,111 @@
           </a:fontRef>
         </p:style>
         <p:txBody>
-          <a:bodyPr rtlCol="0" anchor="ctr" wrap="square" tIns="274320" lIns="365760" rIns="365760"/>
+          <a:bodyPr rtlCol="0" anchor="ctr" tIns="36576" lIns="137160"/>
           <a:lstStyle/>
           <a:p>
             <a:pPr algn="ctr">
-              <a:spcAft>
-                <a:spcPts val="800"/>
-              </a:spcAft>
-              <a:defRPr sz="1200" b="1">
-                <a:solidFill>
-                  <a:srgbClr val="38BDF8"/>
+              <a:defRPr sz="850" b="1">
+                <a:solidFill>
+                  <a:srgbClr val="2563EB"/>
                 </a:solidFill>
               </a:defRPr>
             </a:pPr>
             <a:r>
-              <a:t>- 12 Sidebar Headings Recreated: </a:t>
-            </a:r>
-            <a:r>
-              <a:rPr b="0">
-                <a:solidFill>
-                  <a:srgbClr val="E2E8F0"/>
-                </a:solidFill>
-              </a:rPr>
-              <a:t>Dashboard, Career Intelligence, Skill Analysis, Learning Path, Resume Analyzer, Mock Interview, Job Recommendations, Placement Drives, Assessments, Certificates, Settings, Help &amp; Support.</a:t>
-            </a:r>
-          </a:p>
+              <a:t>FACULTY DESIGN ALIGNMENT</a:t>
+            </a:r>
+          </a:p>
+        </p:txBody>
+      </p:sp>
+      <p:sp>
+        <p:nvSpPr>
+          <p:cNvPr id="4" name="TextBox 3"/>
+          <p:cNvSpPr txBox="1"/>
+          <p:nvPr/>
+        </p:nvSpPr>
+        <p:spPr>
+          <a:xfrm>
+            <a:off x="731520" y="658368"/>
+            <a:ext cx="10728655" cy="594360"/>
+          </a:xfrm>
+          <a:prstGeom prst="rect">
+            <a:avLst/>
+          </a:prstGeom>
+          <a:noFill/>
+        </p:spPr>
+        <p:txBody>
+          <a:bodyPr wrap="square" lIns="0" tIns="0">
+            <a:spAutoFit/>
+          </a:bodyPr>
+          <a:lstStyle/>
           <a:p>
             <a:pPr>
-              <a:spcAft>
-                <a:spcPts val="800"/>
-              </a:spcAft>
-              <a:defRPr sz="1200" b="1">
-                <a:solidFill>
-                  <a:srgbClr val="38BDF8"/>
+              <a:defRPr sz="2200" b="1">
+                <a:solidFill>
+                  <a:srgbClr val="0F172A"/>
                 </a:solidFill>
               </a:defRPr>
             </a:pPr>
             <a:r>
-              <a:t>- Original Dark Theme Preserved: </a:t>
-            </a:r>
-            <a:r>
-              <a:rPr b="0">
-                <a:solidFill>
-                  <a:srgbClr val="E2E8F0"/>
-                </a:solidFill>
-              </a:rPr>
-              <a:t>Sleek #0b0f19 background with glowing cyan and indigo accent badges.</a:t>
-            </a:r>
-          </a:p>
+              <a:t>Dashboard Layout Matching Teacher Reference Pattern</a:t>
+            </a:r>
+          </a:p>
+        </p:txBody>
+      </p:sp>
+      <p:sp>
+        <p:nvSpPr>
+          <p:cNvPr id="5" name="TextBox 4"/>
+          <p:cNvSpPr txBox="1"/>
+          <p:nvPr/>
+        </p:nvSpPr>
+        <p:spPr>
+          <a:xfrm>
+            <a:off x="731520" y="1234440"/>
+            <a:ext cx="10728655" cy="320040"/>
+          </a:xfrm>
+          <a:prstGeom prst="rect">
+            <a:avLst/>
+          </a:prstGeom>
+          <a:noFill/>
+        </p:spPr>
+        <p:txBody>
+          <a:bodyPr wrap="square" lIns="0" tIns="0">
+            <a:spAutoFit/>
+          </a:bodyPr>
+          <a:lstStyle/>
           <a:p>
             <a:pPr>
-              <a:spcAft>
-                <a:spcPts val="800"/>
-              </a:spcAft>
-              <a:defRPr sz="1200" b="1">
-                <a:solidFill>
-                  <a:srgbClr val="38BDF8"/>
+              <a:defRPr sz="1200">
+                <a:solidFill>
+                  <a:srgbClr val="475569"/>
                 </a:solidFill>
               </a:defRPr>
             </a:pPr>
             <a:r>
-              <a:t>- Interactive Student Widgets: </a:t>
-            </a:r>
-            <a:r>
-              <a:rPr b="0">
-                <a:solidFill>
-                  <a:srgbClr val="E2E8F0"/>
-                </a:solidFill>
-              </a:rPr>
-              <a:t>85% Career Match ring, metric cards, active placement drives, and diagnostic quiz.</a:t>
-            </a:r>
-          </a:p>
-          <a:p>
-            <a:pPr>
-              <a:spcAft>
-                <a:spcPts val="800"/>
-              </a:spcAft>
-              <a:defRPr sz="1200" b="1">
-                <a:solidFill>
-                  <a:srgbClr val="38BDF8"/>
-                </a:solidFill>
-              </a:defRPr>
-            </a:pPr>
-            <a:r>
-              <a:t>- Full Version Control: </a:t>
-            </a:r>
-            <a:r>
-              <a:rPr b="0">
-                <a:solidFill>
-                  <a:srgbClr val="E2E8F0"/>
-                </a:solidFill>
-              </a:rPr>
-              <a:t>All source code is committed and publicly accessible on GitHub.</a:t>
-            </a:r>
-          </a:p>
-        </p:txBody>
-      </p:sp>
-      <p:sp>
-        <p:nvSpPr>
-          <p:cNvPr id="5" name="Rounded Rectangle 4"/>
+              <a:t>12 Side Headings Recreated with Modern Dark Aesthetic</a:t>
+            </a:r>
+          </a:p>
+        </p:txBody>
+      </p:sp>
+      <p:sp>
+        <p:nvSpPr>
+          <p:cNvPr id="6" name="Rectangle 5"/>
           <p:cNvSpPr/>
           <p:nvPr/>
         </p:nvSpPr>
         <p:spPr>
           <a:xfrm>
-            <a:off x="7132320" y="1554480"/>
-            <a:ext cx="4297680" cy="4846320"/>
-          </a:xfrm>
-          <a:prstGeom prst="roundRect">
-            <a:avLst/>
-          </a:prstGeom>
-          <a:solidFill>
-            <a:srgbClr val="111827"/>
-          </a:solidFill>
-          <a:ln w="12700">
-            <a:solidFill>
-              <a:srgbClr val="1F2937"/>
-            </a:solidFill>
+            <a:off x="731520" y="1572768"/>
+            <a:ext cx="10728655" cy="18288"/>
+          </a:xfrm>
+          <a:prstGeom prst="rect">
+            <a:avLst/>
+          </a:prstGeom>
+          <a:solidFill>
+            <a:srgbClr val="E2E8F0"/>
+          </a:solidFill>
+          <a:ln>
+            <a:noFill/>
           </a:ln>
         </p:spPr>
         <p:style>
@@ -7001,9 +10237,395 @@
           </a:p>
         </p:txBody>
       </p:sp>
+      <p:sp>
+        <p:nvSpPr>
+          <p:cNvPr id="7" name="Rounded Rectangle 6"/>
+          <p:cNvSpPr/>
+          <p:nvPr/>
+        </p:nvSpPr>
+        <p:spPr>
+          <a:xfrm>
+            <a:off x="731520" y="1719072"/>
+            <a:ext cx="5394960" cy="4754880"/>
+          </a:xfrm>
+          <a:prstGeom prst="roundRect">
+            <a:avLst/>
+          </a:prstGeom>
+          <a:solidFill>
+            <a:srgbClr val="F8FAFC"/>
+          </a:solidFill>
+          <a:ln w="12700">
+            <a:solidFill>
+              <a:srgbClr val="E2E8F0"/>
+            </a:solidFill>
+          </a:ln>
+        </p:spPr>
+        <p:style>
+          <a:lnRef idx="1">
+            <a:schemeClr val="accent1"/>
+          </a:lnRef>
+          <a:fillRef idx="3">
+            <a:schemeClr val="accent1"/>
+          </a:fillRef>
+          <a:effectRef idx="2">
+            <a:schemeClr val="accent1"/>
+          </a:effectRef>
+          <a:fontRef idx="minor">
+            <a:schemeClr val="lt1"/>
+          </a:fontRef>
+        </p:style>
+        <p:txBody>
+          <a:bodyPr rtlCol="0" anchor="ctr" wrap="square" tIns="274320" lIns="320040" rIns="320040"/>
+          <a:lstStyle/>
+          <a:p>
+            <a:pPr algn="ctr">
+              <a:spcAft>
+                <a:spcPts val="1000"/>
+              </a:spcAft>
+              <a:defRPr sz="1100" b="1">
+                <a:solidFill>
+                  <a:srgbClr val="2563EB"/>
+                </a:solidFill>
+              </a:defRPr>
+            </a:pPr>
+            <a:r>
+              <a:t>• 12 Exact Side Headings: </a:t>
+            </a:r>
+            <a:r>
+              <a:rPr b="0">
+                <a:solidFill>
+                  <a:srgbClr val="1E293B"/>
+                </a:solidFill>
+              </a:rPr>
+              <a:t>Dashboard, Career Intelligence, Skill Analysis, Learning Path, Resume Analyzer, Mock Interview, Job Recommendations, Placement Drives, Assessments, Certificates, Settings, Help &amp; Support.</a:t>
+            </a:r>
+          </a:p>
+          <a:p>
+            <a:pPr>
+              <a:spcAft>
+                <a:spcPts val="1000"/>
+              </a:spcAft>
+              <a:defRPr sz="1100" b="1">
+                <a:solidFill>
+                  <a:srgbClr val="2563EB"/>
+                </a:solidFill>
+              </a:defRPr>
+            </a:pPr>
+            <a:r>
+              <a:t>• Restored Dark Theme (#0b0f19): </a:t>
+            </a:r>
+            <a:r>
+              <a:rPr b="0">
+                <a:solidFill>
+                  <a:srgbClr val="1E293B"/>
+                </a:solidFill>
+              </a:rPr>
+              <a:t>Deep navy slate canvas with glowing cyan and indigo card accents.</a:t>
+            </a:r>
+          </a:p>
+          <a:p>
+            <a:pPr>
+              <a:spcAft>
+                <a:spcPts val="1000"/>
+              </a:spcAft>
+              <a:defRPr sz="1100" b="1">
+                <a:solidFill>
+                  <a:srgbClr val="2563EB"/>
+                </a:solidFill>
+              </a:defRPr>
+            </a:pPr>
+            <a:r>
+              <a:t>• Interactive SaaS Modules: </a:t>
+            </a:r>
+            <a:r>
+              <a:rPr b="0">
+                <a:solidFill>
+                  <a:srgbClr val="1E293B"/>
+                </a:solidFill>
+              </a:rPr>
+              <a:t>85% Career Match ring, Metric cards, Diagnostic quiz, Search bar, and Student profile.</a:t>
+            </a:r>
+          </a:p>
+          <a:p>
+            <a:pPr>
+              <a:spcAft>
+                <a:spcPts val="1000"/>
+              </a:spcAft>
+              <a:defRPr sz="1100" b="1">
+                <a:solidFill>
+                  <a:srgbClr val="2563EB"/>
+                </a:solidFill>
+              </a:defRPr>
+            </a:pPr>
+            <a:r>
+              <a:t>• Public Version Control: </a:t>
+            </a:r>
+            <a:r>
+              <a:rPr b="0">
+                <a:solidFill>
+                  <a:srgbClr val="1E293B"/>
+                </a:solidFill>
+              </a:rPr>
+              <a:t>All project source code is fully versioned, tested, and pushed to our public GitHub repository.</a:t>
+            </a:r>
+          </a:p>
+        </p:txBody>
+      </p:sp>
+      <p:sp>
+        <p:nvSpPr>
+          <p:cNvPr id="8" name="Rounded Rectangle 7"/>
+          <p:cNvSpPr/>
+          <p:nvPr/>
+        </p:nvSpPr>
+        <p:spPr>
+          <a:xfrm>
+            <a:off x="6355080" y="1719072"/>
+            <a:ext cx="5102352" cy="4754880"/>
+          </a:xfrm>
+          <a:prstGeom prst="roundRect">
+            <a:avLst/>
+          </a:prstGeom>
+          <a:solidFill>
+            <a:srgbClr val="F1F5F9"/>
+          </a:solidFill>
+          <a:ln w="12700">
+            <a:solidFill>
+              <a:srgbClr val="CBD5E1"/>
+            </a:solidFill>
+          </a:ln>
+        </p:spPr>
+        <p:style>
+          <a:lnRef idx="1">
+            <a:schemeClr val="accent1"/>
+          </a:lnRef>
+          <a:fillRef idx="3">
+            <a:schemeClr val="accent1"/>
+          </a:fillRef>
+          <a:effectRef idx="2">
+            <a:schemeClr val="accent1"/>
+          </a:effectRef>
+          <a:fontRef idx="minor">
+            <a:schemeClr val="lt1"/>
+          </a:fontRef>
+        </p:style>
+        <p:txBody>
+          <a:bodyPr rtlCol="0" anchor="ctr"/>
+          <a:lstStyle/>
+          <a:p>
+            <a:pPr algn="ctr"/>
+          </a:p>
+        </p:txBody>
+      </p:sp>
+      <p:sp>
+        <p:nvSpPr>
+          <p:cNvPr id="9" name="Rectangle 8"/>
+          <p:cNvSpPr/>
+          <p:nvPr/>
+        </p:nvSpPr>
+        <p:spPr>
+          <a:xfrm>
+            <a:off x="6355080" y="1719072"/>
+            <a:ext cx="5102352" cy="320040"/>
+          </a:xfrm>
+          <a:prstGeom prst="rect">
+            <a:avLst/>
+          </a:prstGeom>
+          <a:solidFill>
+            <a:srgbClr val="E2E8F0"/>
+          </a:solidFill>
+          <a:ln>
+            <a:noFill/>
+          </a:ln>
+        </p:spPr>
+        <p:style>
+          <a:lnRef idx="1">
+            <a:schemeClr val="accent1"/>
+          </a:lnRef>
+          <a:fillRef idx="3">
+            <a:schemeClr val="accent1"/>
+          </a:fillRef>
+          <a:effectRef idx="2">
+            <a:schemeClr val="accent1"/>
+          </a:effectRef>
+          <a:fontRef idx="minor">
+            <a:schemeClr val="lt1"/>
+          </a:fontRef>
+        </p:style>
+        <p:txBody>
+          <a:bodyPr rtlCol="0" anchor="ctr"/>
+          <a:lstStyle/>
+          <a:p>
+            <a:pPr algn="ctr"/>
+          </a:p>
+        </p:txBody>
+      </p:sp>
+      <p:sp>
+        <p:nvSpPr>
+          <p:cNvPr id="10" name="Oval 9"/>
+          <p:cNvSpPr/>
+          <p:nvPr/>
+        </p:nvSpPr>
+        <p:spPr>
+          <a:xfrm>
+            <a:off x="6492240" y="1819656"/>
+            <a:ext cx="109728" cy="109728"/>
+          </a:xfrm>
+          <a:prstGeom prst="ellipse">
+            <a:avLst/>
+          </a:prstGeom>
+          <a:solidFill>
+            <a:srgbClr val="EF4444"/>
+          </a:solidFill>
+          <a:ln>
+            <a:noFill/>
+          </a:ln>
+        </p:spPr>
+        <p:style>
+          <a:lnRef idx="1">
+            <a:schemeClr val="accent1"/>
+          </a:lnRef>
+          <a:fillRef idx="3">
+            <a:schemeClr val="accent1"/>
+          </a:fillRef>
+          <a:effectRef idx="2">
+            <a:schemeClr val="accent1"/>
+          </a:effectRef>
+          <a:fontRef idx="minor">
+            <a:schemeClr val="lt1"/>
+          </a:fontRef>
+        </p:style>
+        <p:txBody>
+          <a:bodyPr rtlCol="0" anchor="ctr"/>
+          <a:lstStyle/>
+          <a:p>
+            <a:pPr algn="ctr"/>
+          </a:p>
+        </p:txBody>
+      </p:sp>
+      <p:sp>
+        <p:nvSpPr>
+          <p:cNvPr id="11" name="Oval 10"/>
+          <p:cNvSpPr/>
+          <p:nvPr/>
+        </p:nvSpPr>
+        <p:spPr>
+          <a:xfrm>
+            <a:off x="6638544" y="1819656"/>
+            <a:ext cx="109728" cy="109728"/>
+          </a:xfrm>
+          <a:prstGeom prst="ellipse">
+            <a:avLst/>
+          </a:prstGeom>
+          <a:solidFill>
+            <a:srgbClr val="F59E0B"/>
+          </a:solidFill>
+          <a:ln>
+            <a:noFill/>
+          </a:ln>
+        </p:spPr>
+        <p:style>
+          <a:lnRef idx="1">
+            <a:schemeClr val="accent1"/>
+          </a:lnRef>
+          <a:fillRef idx="3">
+            <a:schemeClr val="accent1"/>
+          </a:fillRef>
+          <a:effectRef idx="2">
+            <a:schemeClr val="accent1"/>
+          </a:effectRef>
+          <a:fontRef idx="minor">
+            <a:schemeClr val="lt1"/>
+          </a:fontRef>
+        </p:style>
+        <p:txBody>
+          <a:bodyPr rtlCol="0" anchor="ctr"/>
+          <a:lstStyle/>
+          <a:p>
+            <a:pPr algn="ctr"/>
+          </a:p>
+        </p:txBody>
+      </p:sp>
+      <p:sp>
+        <p:nvSpPr>
+          <p:cNvPr id="12" name="Oval 11"/>
+          <p:cNvSpPr/>
+          <p:nvPr/>
+        </p:nvSpPr>
+        <p:spPr>
+          <a:xfrm>
+            <a:off x="6784848" y="1819656"/>
+            <a:ext cx="109728" cy="109728"/>
+          </a:xfrm>
+          <a:prstGeom prst="ellipse">
+            <a:avLst/>
+          </a:prstGeom>
+          <a:solidFill>
+            <a:srgbClr val="10B981"/>
+          </a:solidFill>
+          <a:ln>
+            <a:noFill/>
+          </a:ln>
+        </p:spPr>
+        <p:style>
+          <a:lnRef idx="1">
+            <a:schemeClr val="accent1"/>
+          </a:lnRef>
+          <a:fillRef idx="3">
+            <a:schemeClr val="accent1"/>
+          </a:fillRef>
+          <a:effectRef idx="2">
+            <a:schemeClr val="accent1"/>
+          </a:effectRef>
+          <a:fontRef idx="minor">
+            <a:schemeClr val="lt1"/>
+          </a:fontRef>
+        </p:style>
+        <p:txBody>
+          <a:bodyPr rtlCol="0" anchor="ctr"/>
+          <a:lstStyle/>
+          <a:p>
+            <a:pPr algn="ctr"/>
+          </a:p>
+        </p:txBody>
+      </p:sp>
+      <p:sp>
+        <p:nvSpPr>
+          <p:cNvPr id="13" name="TextBox 12"/>
+          <p:cNvSpPr txBox="1"/>
+          <p:nvPr/>
+        </p:nvSpPr>
+        <p:spPr>
+          <a:xfrm>
+            <a:off x="6995160" y="1755648"/>
+            <a:ext cx="4370832" cy="256032"/>
+          </a:xfrm>
+          <a:prstGeom prst="rect">
+            <a:avLst/>
+          </a:prstGeom>
+          <a:noFill/>
+        </p:spPr>
+        <p:txBody>
+          <a:bodyPr wrap="none" lIns="0" tIns="0">
+            <a:spAutoFit/>
+          </a:bodyPr>
+          <a:lstStyle/>
+          <a:p>
+            <a:pPr>
+              <a:defRPr sz="850">
+                <a:solidFill>
+                  <a:srgbClr val="475569"/>
+                </a:solidFill>
+              </a:defRPr>
+            </a:pPr>
+            <a:r>
+              <a:t>Teacher Reference Layout Pattern faithfully recreated in our software</a:t>
+            </a:r>
+          </a:p>
+        </p:txBody>
+      </p:sp>
       <p:pic>
         <p:nvPicPr>
-          <p:cNvPr id="6" name="Picture 5" descr="media_1792301630518_063d350d.jpg"/>
+          <p:cNvPr id="14" name="Picture 13" descr="media_1792301630518_063d350d.jpg"/>
           <p:cNvPicPr>
             <a:picLocks noChangeAspect="1"/>
           </p:cNvPicPr>
@@ -7017,8 +10639,8 @@
         </p:blipFill>
         <p:spPr>
           <a:xfrm>
-            <a:off x="7315200" y="2103120"/>
-            <a:ext cx="3931920" cy="2618720"/>
+            <a:off x="6355080" y="2039112"/>
+            <a:ext cx="5102352" cy="4434840"/>
           </a:xfrm>
           <a:prstGeom prst="rect">
             <a:avLst/>
